--- a/koco_frame.pptx
+++ b/koco_frame.pptx
@@ -12,13 +12,17 @@
     <p:sldId id="310" r:id="rId6"/>
     <p:sldId id="311" r:id="rId7"/>
     <p:sldId id="312" r:id="rId8"/>
-    <p:sldId id="313" r:id="rId9"/>
-    <p:sldId id="289" r:id="rId10"/>
-    <p:sldId id="294" r:id="rId11"/>
-    <p:sldId id="283" r:id="rId12"/>
-    <p:sldId id="284" r:id="rId13"/>
-    <p:sldId id="285" r:id="rId14"/>
-    <p:sldId id="286" r:id="rId15"/>
+    <p:sldId id="314" r:id="rId9"/>
+    <p:sldId id="315" r:id="rId10"/>
+    <p:sldId id="316" r:id="rId11"/>
+    <p:sldId id="317" r:id="rId12"/>
+    <p:sldId id="313" r:id="rId13"/>
+    <p:sldId id="289" r:id="rId14"/>
+    <p:sldId id="294" r:id="rId15"/>
+    <p:sldId id="283" r:id="rId16"/>
+    <p:sldId id="284" r:id="rId17"/>
+    <p:sldId id="285" r:id="rId18"/>
+    <p:sldId id="286" r:id="rId19"/>
   </p:sldIdLst>
   <p:sldSz cx="9144000" cy="6858000" type="screen4x3"/>
   <p:notesSz cx="6858000" cy="9144000"/>
@@ -495,7 +499,7 @@
           <a:p>
             <a:fld id="{B00729D7-BDA7-41E1-AD79-DC61E6DD2EC2}" type="datetimeFigureOut">
               <a:rPr lang="ko-KR" altLang="en-US" smtClean="0"/>
-              <a:t>2025-02-10</a:t>
+              <a:t>2025-02-17</a:t>
             </a:fld>
             <a:endParaRPr lang="ko-KR" altLang="en-US"/>
           </a:p>
@@ -665,7 +669,7 @@
           <a:p>
             <a:fld id="{B00729D7-BDA7-41E1-AD79-DC61E6DD2EC2}" type="datetimeFigureOut">
               <a:rPr lang="ko-KR" altLang="en-US" smtClean="0"/>
-              <a:t>2025-02-10</a:t>
+              <a:t>2025-02-17</a:t>
             </a:fld>
             <a:endParaRPr lang="ko-KR" altLang="en-US"/>
           </a:p>
@@ -845,7 +849,7 @@
           <a:p>
             <a:fld id="{B00729D7-BDA7-41E1-AD79-DC61E6DD2EC2}" type="datetimeFigureOut">
               <a:rPr lang="ko-KR" altLang="en-US" smtClean="0"/>
-              <a:t>2025-02-10</a:t>
+              <a:t>2025-02-17</a:t>
             </a:fld>
             <a:endParaRPr lang="ko-KR" altLang="en-US"/>
           </a:p>
@@ -1521,7 +1525,7 @@
           <a:p>
             <a:fld id="{B00729D7-BDA7-41E1-AD79-DC61E6DD2EC2}" type="datetimeFigureOut">
               <a:rPr lang="ko-KR" altLang="en-US" smtClean="0"/>
-              <a:t>2025-02-10</a:t>
+              <a:t>2025-02-17</a:t>
             </a:fld>
             <a:endParaRPr lang="ko-KR" altLang="en-US"/>
           </a:p>
@@ -1765,7 +1769,7 @@
           <a:p>
             <a:fld id="{B00729D7-BDA7-41E1-AD79-DC61E6DD2EC2}" type="datetimeFigureOut">
               <a:rPr lang="ko-KR" altLang="en-US" smtClean="0"/>
-              <a:t>2025-02-10</a:t>
+              <a:t>2025-02-17</a:t>
             </a:fld>
             <a:endParaRPr lang="ko-KR" altLang="en-US"/>
           </a:p>
@@ -1997,7 +2001,7 @@
           <a:p>
             <a:fld id="{B00729D7-BDA7-41E1-AD79-DC61E6DD2EC2}" type="datetimeFigureOut">
               <a:rPr lang="ko-KR" altLang="en-US" smtClean="0"/>
-              <a:t>2025-02-10</a:t>
+              <a:t>2025-02-17</a:t>
             </a:fld>
             <a:endParaRPr lang="ko-KR" altLang="en-US"/>
           </a:p>
@@ -2364,7 +2368,7 @@
           <a:p>
             <a:fld id="{B00729D7-BDA7-41E1-AD79-DC61E6DD2EC2}" type="datetimeFigureOut">
               <a:rPr lang="ko-KR" altLang="en-US" smtClean="0"/>
-              <a:t>2025-02-10</a:t>
+              <a:t>2025-02-17</a:t>
             </a:fld>
             <a:endParaRPr lang="ko-KR" altLang="en-US"/>
           </a:p>
@@ -2482,7 +2486,7 @@
           <a:p>
             <a:fld id="{B00729D7-BDA7-41E1-AD79-DC61E6DD2EC2}" type="datetimeFigureOut">
               <a:rPr lang="ko-KR" altLang="en-US" smtClean="0"/>
-              <a:t>2025-02-10</a:t>
+              <a:t>2025-02-17</a:t>
             </a:fld>
             <a:endParaRPr lang="ko-KR" altLang="en-US"/>
           </a:p>
@@ -2577,7 +2581,7 @@
           <a:p>
             <a:fld id="{B00729D7-BDA7-41E1-AD79-DC61E6DD2EC2}" type="datetimeFigureOut">
               <a:rPr lang="ko-KR" altLang="en-US" smtClean="0"/>
-              <a:t>2025-02-10</a:t>
+              <a:t>2025-02-17</a:t>
             </a:fld>
             <a:endParaRPr lang="ko-KR" altLang="en-US"/>
           </a:p>
@@ -2854,7 +2858,7 @@
           <a:p>
             <a:fld id="{B00729D7-BDA7-41E1-AD79-DC61E6DD2EC2}" type="datetimeFigureOut">
               <a:rPr lang="ko-KR" altLang="en-US" smtClean="0"/>
-              <a:t>2025-02-10</a:t>
+              <a:t>2025-02-17</a:t>
             </a:fld>
             <a:endParaRPr lang="ko-KR" altLang="en-US"/>
           </a:p>
@@ -3067,7 +3071,7 @@
           <a:p>
             <a:fld id="{B00729D7-BDA7-41E1-AD79-DC61E6DD2EC2}" type="datetimeFigureOut">
               <a:rPr lang="ko-KR" altLang="en-US" smtClean="0"/>
-              <a:t>2025-02-10</a:t>
+              <a:t>2025-02-17</a:t>
             </a:fld>
             <a:endParaRPr lang="ko-KR" altLang="en-US"/>
           </a:p>
@@ -19648,6 +19652,2563 @@
           <a:chExt cx="0" cy="0"/>
         </a:xfrm>
       </p:grpSpPr>
+    </p:spTree>
+    <p:extLst>
+      <p:ext uri="{BB962C8B-B14F-4D97-AF65-F5344CB8AC3E}">
+        <p14:creationId xmlns:p14="http://schemas.microsoft.com/office/powerpoint/2010/main" val="2939465190"/>
+      </p:ext>
+    </p:extLst>
+  </p:cSld>
+  <p:clrMapOvr>
+    <a:masterClrMapping/>
+  </p:clrMapOvr>
+</p:sld>
+</file>
+
+<file path=ppt/slides/slide11.xml><?xml version="1.0" encoding="utf-8"?>
+<p:sld xmlns:a="http://schemas.openxmlformats.org/drawingml/2006/main" xmlns:r="http://schemas.openxmlformats.org/officeDocument/2006/relationships" xmlns:p="http://schemas.openxmlformats.org/presentationml/2006/main">
+  <p:cSld>
+    <p:spTree>
+      <p:nvGrpSpPr>
+        <p:cNvPr id="1" name=""/>
+        <p:cNvGrpSpPr/>
+        <p:nvPr/>
+      </p:nvGrpSpPr>
+      <p:grpSpPr>
+        <a:xfrm>
+          <a:off x="0" y="0"/>
+          <a:ext cx="0" cy="0"/>
+          <a:chOff x="0" y="0"/>
+          <a:chExt cx="0" cy="0"/>
+        </a:xfrm>
+      </p:grpSpPr>
+    </p:spTree>
+    <p:extLst>
+      <p:ext uri="{BB962C8B-B14F-4D97-AF65-F5344CB8AC3E}">
+        <p14:creationId xmlns:p14="http://schemas.microsoft.com/office/powerpoint/2010/main" val="1750125100"/>
+      </p:ext>
+    </p:extLst>
+  </p:cSld>
+  <p:clrMapOvr>
+    <a:masterClrMapping/>
+  </p:clrMapOvr>
+</p:sld>
+</file>
+
+<file path=ppt/slides/slide12.xml><?xml version="1.0" encoding="utf-8"?>
+<p:sld xmlns:a="http://schemas.openxmlformats.org/drawingml/2006/main" xmlns:r="http://schemas.openxmlformats.org/officeDocument/2006/relationships" xmlns:p="http://schemas.openxmlformats.org/presentationml/2006/main">
+  <p:cSld>
+    <p:spTree>
+      <p:nvGrpSpPr>
+        <p:cNvPr id="1" name=""/>
+        <p:cNvGrpSpPr/>
+        <p:nvPr/>
+      </p:nvGrpSpPr>
+      <p:grpSpPr>
+        <a:xfrm>
+          <a:off x="0" y="0"/>
+          <a:ext cx="0" cy="0"/>
+          <a:chOff x="0" y="0"/>
+          <a:chExt cx="0" cy="0"/>
+        </a:xfrm>
+      </p:grpSpPr>
+    </p:spTree>
+    <p:extLst>
+      <p:ext uri="{BB962C8B-B14F-4D97-AF65-F5344CB8AC3E}">
+        <p14:creationId xmlns:p14="http://schemas.microsoft.com/office/powerpoint/2010/main" val="3238872301"/>
+      </p:ext>
+    </p:extLst>
+  </p:cSld>
+  <p:clrMapOvr>
+    <a:masterClrMapping/>
+  </p:clrMapOvr>
+</p:sld>
+</file>
+
+<file path=ppt/slides/slide13.xml><?xml version="1.0" encoding="utf-8"?>
+<p:sld xmlns:a="http://schemas.openxmlformats.org/drawingml/2006/main" xmlns:r="http://schemas.openxmlformats.org/officeDocument/2006/relationships" xmlns:p="http://schemas.openxmlformats.org/presentationml/2006/main">
+  <p:cSld>
+    <p:spTree>
+      <p:nvGrpSpPr>
+        <p:cNvPr id="1" name=""/>
+        <p:cNvGrpSpPr/>
+        <p:nvPr/>
+      </p:nvGrpSpPr>
+      <p:grpSpPr>
+        <a:xfrm>
+          <a:off x="0" y="0"/>
+          <a:ext cx="0" cy="0"/>
+          <a:chOff x="0" y="0"/>
+          <a:chExt cx="0" cy="0"/>
+        </a:xfrm>
+      </p:grpSpPr>
+      <p:graphicFrame>
+        <p:nvGraphicFramePr>
+          <p:cNvPr id="161" name="표"/>
+          <p:cNvGraphicFramePr/>
+          <p:nvPr/>
+        </p:nvGraphicFramePr>
+        <p:xfrm>
+          <a:off x="55037" y="901375"/>
+          <a:ext cx="9033929" cy="5146256"/>
+        </p:xfrm>
+        <a:graphic>
+          <a:graphicData uri="http://schemas.openxmlformats.org/drawingml/2006/table">
+            <a:tbl>
+              <a:tblPr/>
+              <a:tblGrid>
+                <a:gridCol w="1475442">
+                  <a:extLst>
+                    <a:ext uri="{9D8B030D-6E8A-4147-A177-3AD203B41FA5}">
+                      <a16:colId xmlns:a16="http://schemas.microsoft.com/office/drawing/2014/main" val="20000"/>
+                    </a:ext>
+                  </a:extLst>
+                </a:gridCol>
+                <a:gridCol w="4279718">
+                  <a:extLst>
+                    <a:ext uri="{9D8B030D-6E8A-4147-A177-3AD203B41FA5}">
+                      <a16:colId xmlns:a16="http://schemas.microsoft.com/office/drawing/2014/main" val="20001"/>
+                    </a:ext>
+                  </a:extLst>
+                </a:gridCol>
+                <a:gridCol w="3278769">
+                  <a:extLst>
+                    <a:ext uri="{9D8B030D-6E8A-4147-A177-3AD203B41FA5}">
+                      <a16:colId xmlns:a16="http://schemas.microsoft.com/office/drawing/2014/main" val="20002"/>
+                    </a:ext>
+                  </a:extLst>
+                </a:gridCol>
+              </a:tblGrid>
+              <a:tr h="237581">
+                <a:tc>
+                  <a:txBody>
+                    <a:bodyPr/>
+                    <a:lstStyle/>
+                    <a:p>
+                      <a:pPr defTabSz="914400">
+                        <a:tabLst>
+                          <a:tab pos="342900" algn="l"/>
+                        </a:tabLst>
+                        <a:defRPr>
+                          <a:latin typeface="Avenir Next Regular"/>
+                          <a:ea typeface="Avenir Next Regular"/>
+                          <a:cs typeface="Avenir Next Regular"/>
+                          <a:sym typeface="Avenir Next Regular"/>
+                        </a:defRPr>
+                      </a:pPr>
+                      <a:endParaRPr sz="300"/>
+                    </a:p>
+                  </a:txBody>
+                  <a:tcPr marL="19050" marR="19050" marT="19050" marB="19050" horzOverflow="overflow">
+                    <a:lnL w="3175">
+                      <a:solidFill>
+                        <a:srgbClr val="000000"/>
+                      </a:solidFill>
+                      <a:miter lim="400000"/>
+                    </a:lnL>
+                    <a:lnR w="3175">
+                      <a:solidFill>
+                        <a:srgbClr val="000000"/>
+                      </a:solidFill>
+                      <a:miter lim="400000"/>
+                    </a:lnR>
+                    <a:lnT w="3175">
+                      <a:solidFill>
+                        <a:srgbClr val="000000"/>
+                      </a:solidFill>
+                      <a:miter lim="400000"/>
+                    </a:lnT>
+                    <a:lnB w="12700">
+                      <a:miter lim="400000"/>
+                    </a:lnB>
+                    <a:solidFill>
+                      <a:srgbClr val="BEC0BF"/>
+                    </a:solidFill>
+                  </a:tcPr>
+                </a:tc>
+                <a:tc>
+                  <a:txBody>
+                    <a:bodyPr/>
+                    <a:lstStyle/>
+                    <a:p>
+                      <a:pPr algn="l" defTabSz="95250">
+                        <a:tabLst>
+                          <a:tab pos="342900" algn="l"/>
+                        </a:tabLst>
+                      </a:pPr>
+                      <a:r>
+                        <a:rPr sz="800" b="1"/>
+                        <a:t>Photo</a:t>
+                      </a:r>
+                    </a:p>
+                  </a:txBody>
+                  <a:tcPr marL="19050" marR="19050" marT="19050" marB="19050" horzOverflow="overflow">
+                    <a:lnL w="3175">
+                      <a:solidFill>
+                        <a:srgbClr val="000000"/>
+                      </a:solidFill>
+                      <a:miter lim="400000"/>
+                    </a:lnL>
+                    <a:lnR w="0">
+                      <a:miter lim="400000"/>
+                    </a:lnR>
+                    <a:lnT w="3175">
+                      <a:solidFill>
+                        <a:srgbClr val="000000"/>
+                      </a:solidFill>
+                      <a:miter lim="400000"/>
+                    </a:lnT>
+                    <a:lnB w="3175">
+                      <a:solidFill>
+                        <a:srgbClr val="D5D5D5"/>
+                      </a:solidFill>
+                      <a:miter lim="400000"/>
+                    </a:lnB>
+                    <a:solidFill>
+                      <a:srgbClr val="BEC0BF"/>
+                    </a:solidFill>
+                  </a:tcPr>
+                </a:tc>
+                <a:tc>
+                  <a:txBody>
+                    <a:bodyPr/>
+                    <a:lstStyle/>
+                    <a:p>
+                      <a:pPr algn="l" defTabSz="95250">
+                        <a:tabLst>
+                          <a:tab pos="342900" algn="l"/>
+                        </a:tabLst>
+                      </a:pPr>
+                      <a:r>
+                        <a:rPr sz="800" b="1"/>
+                        <a:t>Thermal infrared camera</a:t>
+                      </a:r>
+                    </a:p>
+                  </a:txBody>
+                  <a:tcPr marL="19050" marR="19050" marT="19050" marB="19050" horzOverflow="overflow">
+                    <a:lnL w="0">
+                      <a:miter lim="400000"/>
+                    </a:lnL>
+                    <a:lnR w="0">
+                      <a:miter lim="400000"/>
+                    </a:lnR>
+                    <a:lnT w="0">
+                      <a:miter lim="400000"/>
+                    </a:lnT>
+                    <a:lnB w="0">
+                      <a:miter lim="400000"/>
+                    </a:lnB>
+                    <a:solidFill>
+                      <a:srgbClr val="BEC0BF"/>
+                    </a:solidFill>
+                  </a:tcPr>
+                </a:tc>
+                <a:extLst>
+                  <a:ext uri="{0D108BD9-81ED-4DB2-BD59-A6C34878D82A}">
+                    <a16:rowId xmlns:a16="http://schemas.microsoft.com/office/drawing/2014/main" val="10000"/>
+                  </a:ext>
+                </a:extLst>
+              </a:tr>
+              <a:tr h="224291">
+                <a:tc rowSpan="8">
+                  <a:txBody>
+                    <a:bodyPr/>
+                    <a:lstStyle/>
+                    <a:p>
+                      <a:pPr algn="l" defTabSz="95250">
+                        <a:tabLst>
+                          <a:tab pos="342900" algn="l"/>
+                        </a:tabLst>
+                        <a:defRPr sz="2300" b="1">
+                          <a:latin typeface="Gill Sans"/>
+                          <a:ea typeface="Gill Sans"/>
+                          <a:cs typeface="Gill Sans"/>
+                          <a:sym typeface="Gill Sans"/>
+                        </a:defRPr>
+                      </a:pPr>
+                      <a:r>
+                        <a:rPr sz="900" baseline="0" dirty="0">
+                          <a:solidFill>
+                            <a:schemeClr val="tx1">
+                              <a:lumMod val="50000"/>
+                            </a:schemeClr>
+                          </a:solidFill>
+                        </a:rPr>
+                        <a:t>   </a:t>
+                      </a:r>
+                      <a:r>
+                        <a:rPr sz="800" baseline="0" dirty="0">
+                          <a:solidFill>
+                            <a:schemeClr val="tx1">
+                              <a:lumMod val="50000"/>
+                            </a:schemeClr>
+                          </a:solidFill>
+                        </a:rPr>
+                        <a:t>Standing</a:t>
+                      </a:r>
+                    </a:p>
+                  </a:txBody>
+                  <a:tcPr marL="19050" marR="19050" marT="19050" marB="19050" horzOverflow="overflow">
+                    <a:lnL w="3175">
+                      <a:solidFill>
+                        <a:srgbClr val="000000"/>
+                      </a:solidFill>
+                      <a:miter lim="400000"/>
+                    </a:lnL>
+                    <a:lnR w="3175">
+                      <a:solidFill>
+                        <a:srgbClr val="D5D5D5"/>
+                      </a:solidFill>
+                      <a:miter lim="400000"/>
+                    </a:lnR>
+                    <a:lnT w="12700">
+                      <a:miter lim="400000"/>
+                    </a:lnT>
+                    <a:lnB w="12700">
+                      <a:miter lim="400000"/>
+                    </a:lnB>
+                    <a:solidFill>
+                      <a:schemeClr val="bg1"/>
+                    </a:solidFill>
+                  </a:tcPr>
+                </a:tc>
+                <a:tc gridSpan="2">
+                  <a:txBody>
+                    <a:bodyPr/>
+                    <a:lstStyle/>
+                    <a:p>
+                      <a:pPr algn="l" defTabSz="95250">
+                        <a:tabLst>
+                          <a:tab pos="342900" algn="l"/>
+                        </a:tabLst>
+                      </a:pPr>
+                      <a:r>
+                        <a:rPr sz="800" b="1" i="1" baseline="0">
+                          <a:solidFill>
+                            <a:schemeClr val="tx1">
+                              <a:lumMod val="50000"/>
+                            </a:schemeClr>
+                          </a:solidFill>
+                        </a:rPr>
+                        <a:t>Mirror view.</a:t>
+                      </a:r>
+                    </a:p>
+                  </a:txBody>
+                  <a:tcPr marL="19050" marR="19050" marT="19050" marB="19050" horzOverflow="overflow">
+                    <a:lnL w="3175">
+                      <a:solidFill>
+                        <a:srgbClr val="D5D5D5"/>
+                      </a:solidFill>
+                      <a:miter lim="400000"/>
+                    </a:lnL>
+                    <a:lnR w="3175">
+                      <a:solidFill>
+                        <a:srgbClr val="000000"/>
+                      </a:solidFill>
+                      <a:miter lim="400000"/>
+                    </a:lnR>
+                    <a:lnT w="3175">
+                      <a:solidFill>
+                        <a:srgbClr val="D5D5D5"/>
+                      </a:solidFill>
+                      <a:miter lim="400000"/>
+                    </a:lnT>
+                    <a:lnB w="3175">
+                      <a:solidFill>
+                        <a:srgbClr val="D5D5D5"/>
+                      </a:solidFill>
+                      <a:miter lim="400000"/>
+                    </a:lnB>
+                    <a:solidFill>
+                      <a:schemeClr val="bg1"/>
+                    </a:solidFill>
+                  </a:tcPr>
+                </a:tc>
+                <a:tc hMerge="1">
+                  <a:txBody>
+                    <a:bodyPr/>
+                    <a:lstStyle/>
+                    <a:p>
+                      <a:endParaRPr lang="ko-KR"/>
+                    </a:p>
+                  </a:txBody>
+                  <a:tcPr/>
+                </a:tc>
+                <a:extLst>
+                  <a:ext uri="{0D108BD9-81ED-4DB2-BD59-A6C34878D82A}">
+                    <a16:rowId xmlns:a16="http://schemas.microsoft.com/office/drawing/2014/main" val="10001"/>
+                  </a:ext>
+                </a:extLst>
+              </a:tr>
+              <a:tr h="278130">
+                <a:tc vMerge="1">
+                  <a:txBody>
+                    <a:bodyPr/>
+                    <a:lstStyle/>
+                    <a:p>
+                      <a:endParaRPr lang="ko-KR"/>
+                    </a:p>
+                  </a:txBody>
+                  <a:tcPr/>
+                </a:tc>
+                <a:tc>
+                  <a:txBody>
+                    <a:bodyPr/>
+                    <a:lstStyle/>
+                    <a:p>
+                      <a:pPr algn="l" defTabSz="95250">
+                        <a:tabLst>
+                          <a:tab pos="342900" algn="l"/>
+                        </a:tabLst>
+                      </a:pPr>
+                      <a:r>
+                        <a:rPr sz="800" baseline="0" dirty="0">
+                          <a:solidFill>
+                            <a:schemeClr val="tx1">
+                              <a:lumMod val="50000"/>
+                            </a:schemeClr>
+                          </a:solidFill>
+                        </a:rPr>
+                        <a:t>1.Natural Leg 2.Natural foot 3.Natural one foot stance 
+4.Positional foot 5.positional one foot stance</a:t>
+                      </a:r>
+                    </a:p>
+                  </a:txBody>
+                  <a:tcPr marL="19050" marR="19050" marT="19050" marB="19050" horzOverflow="overflow">
+                    <a:lnL w="3175">
+                      <a:solidFill>
+                        <a:srgbClr val="000000"/>
+                      </a:solidFill>
+                      <a:miter lim="400000"/>
+                    </a:lnL>
+                    <a:lnR w="3175">
+                      <a:solidFill>
+                        <a:srgbClr val="000000"/>
+                      </a:solidFill>
+                      <a:miter lim="400000"/>
+                    </a:lnR>
+                    <a:lnT w="3175">
+                      <a:solidFill>
+                        <a:srgbClr val="D5D5D5"/>
+                      </a:solidFill>
+                      <a:miter lim="400000"/>
+                    </a:lnT>
+                    <a:lnB w="12700">
+                      <a:miter lim="400000"/>
+                    </a:lnB>
+                    <a:solidFill>
+                      <a:schemeClr val="bg1"/>
+                    </a:solidFill>
+                  </a:tcPr>
+                </a:tc>
+                <a:tc>
+                  <a:txBody>
+                    <a:bodyPr/>
+                    <a:lstStyle/>
+                    <a:p>
+                      <a:pPr defTabSz="914400">
+                        <a:tabLst>
+                          <a:tab pos="342900" algn="l"/>
+                        </a:tabLst>
+                        <a:defRPr sz="2200">
+                          <a:latin typeface="Avenir Next Regular"/>
+                          <a:ea typeface="Avenir Next Regular"/>
+                          <a:cs typeface="Avenir Next Regular"/>
+                          <a:sym typeface="Avenir Next Regular"/>
+                        </a:defRPr>
+                      </a:pPr>
+                      <a:endParaRPr sz="800" baseline="0">
+                        <a:solidFill>
+                          <a:schemeClr val="tx1">
+                            <a:lumMod val="50000"/>
+                          </a:schemeClr>
+                        </a:solidFill>
+                      </a:endParaRPr>
+                    </a:p>
+                  </a:txBody>
+                  <a:tcPr marL="19050" marR="19050" marT="19050" marB="19050" horzOverflow="overflow">
+                    <a:lnL w="3175">
+                      <a:solidFill>
+                        <a:srgbClr val="000000"/>
+                      </a:solidFill>
+                      <a:miter lim="400000"/>
+                    </a:lnL>
+                    <a:lnR w="3175">
+                      <a:solidFill>
+                        <a:srgbClr val="000000"/>
+                      </a:solidFill>
+                      <a:miter lim="400000"/>
+                    </a:lnR>
+                    <a:lnT w="12700">
+                      <a:miter lim="400000"/>
+                    </a:lnT>
+                    <a:lnB w="12700">
+                      <a:miter lim="400000"/>
+                    </a:lnB>
+                    <a:solidFill>
+                      <a:schemeClr val="bg1"/>
+                    </a:solidFill>
+                  </a:tcPr>
+                </a:tc>
+                <a:extLst>
+                  <a:ext uri="{0D108BD9-81ED-4DB2-BD59-A6C34878D82A}">
+                    <a16:rowId xmlns:a16="http://schemas.microsoft.com/office/drawing/2014/main" val="10002"/>
+                  </a:ext>
+                </a:extLst>
+              </a:tr>
+              <a:tr h="233123">
+                <a:tc vMerge="1">
+                  <a:txBody>
+                    <a:bodyPr/>
+                    <a:lstStyle/>
+                    <a:p>
+                      <a:endParaRPr lang="ko-KR"/>
+                    </a:p>
+                  </a:txBody>
+                  <a:tcPr/>
+                </a:tc>
+                <a:tc gridSpan="2">
+                  <a:txBody>
+                    <a:bodyPr/>
+                    <a:lstStyle/>
+                    <a:p>
+                      <a:pPr algn="l" defTabSz="95250">
+                        <a:tabLst>
+                          <a:tab pos="342900" algn="l"/>
+                        </a:tabLst>
+                      </a:pPr>
+                      <a:r>
+                        <a:rPr sz="800" b="1" i="1" baseline="0" dirty="0">
+                          <a:solidFill>
+                            <a:schemeClr val="tx1">
+                              <a:lumMod val="50000"/>
+                            </a:schemeClr>
+                          </a:solidFill>
+                        </a:rPr>
+                        <a:t>Posterior view.</a:t>
+                      </a:r>
+                    </a:p>
+                  </a:txBody>
+                  <a:tcPr marL="19050" marR="19050" marT="19050" marB="19050" horzOverflow="overflow">
+                    <a:lnL w="3175">
+                      <a:solidFill>
+                        <a:srgbClr val="000000"/>
+                      </a:solidFill>
+                      <a:miter lim="400000"/>
+                    </a:lnL>
+                    <a:lnR w="3175">
+                      <a:solidFill>
+                        <a:srgbClr val="000000"/>
+                      </a:solidFill>
+                      <a:miter lim="400000"/>
+                    </a:lnR>
+                    <a:lnT w="12700">
+                      <a:miter lim="400000"/>
+                    </a:lnT>
+                    <a:lnB w="12700">
+                      <a:miter lim="400000"/>
+                    </a:lnB>
+                    <a:solidFill>
+                      <a:schemeClr val="bg1"/>
+                    </a:solidFill>
+                  </a:tcPr>
+                </a:tc>
+                <a:tc hMerge="1">
+                  <a:txBody>
+                    <a:bodyPr/>
+                    <a:lstStyle/>
+                    <a:p>
+                      <a:endParaRPr lang="ko-KR"/>
+                    </a:p>
+                  </a:txBody>
+                  <a:tcPr/>
+                </a:tc>
+                <a:extLst>
+                  <a:ext uri="{0D108BD9-81ED-4DB2-BD59-A6C34878D82A}">
+                    <a16:rowId xmlns:a16="http://schemas.microsoft.com/office/drawing/2014/main" val="10003"/>
+                  </a:ext>
+                </a:extLst>
+              </a:tr>
+              <a:tr h="278130">
+                <a:tc vMerge="1">
+                  <a:txBody>
+                    <a:bodyPr/>
+                    <a:lstStyle/>
+                    <a:p>
+                      <a:endParaRPr lang="ko-KR"/>
+                    </a:p>
+                  </a:txBody>
+                  <a:tcPr/>
+                </a:tc>
+                <a:tc>
+                  <a:txBody>
+                    <a:bodyPr/>
+                    <a:lstStyle/>
+                    <a:p>
+                      <a:pPr algn="l" defTabSz="95250">
+                        <a:tabLst>
+                          <a:tab pos="342900" algn="l"/>
+                        </a:tabLst>
+                      </a:pPr>
+                      <a:r>
+                        <a:rPr sz="800" baseline="0" dirty="0">
+                          <a:solidFill>
+                            <a:schemeClr val="tx1">
+                              <a:lumMod val="50000"/>
+                            </a:schemeClr>
+                          </a:solidFill>
+                        </a:rPr>
+                        <a:t>1.Open &amp; Bite 2.Upper body flexion(Holding ankle &amp; Knee) 
+3.Nuchal rotation 4,Head side bending</a:t>
+                      </a:r>
+                    </a:p>
+                  </a:txBody>
+                  <a:tcPr marL="19050" marR="19050" marT="19050" marB="19050" horzOverflow="overflow">
+                    <a:lnL w="3175">
+                      <a:solidFill>
+                        <a:srgbClr val="000000"/>
+                      </a:solidFill>
+                      <a:miter lim="400000"/>
+                    </a:lnL>
+                    <a:lnR w="3175">
+                      <a:solidFill>
+                        <a:srgbClr val="000000"/>
+                      </a:solidFill>
+                      <a:miter lim="400000"/>
+                    </a:lnR>
+                    <a:lnT w="12700">
+                      <a:miter lim="400000"/>
+                    </a:lnT>
+                    <a:lnB w="12700">
+                      <a:miter lim="400000"/>
+                    </a:lnB>
+                    <a:solidFill>
+                      <a:schemeClr val="bg1"/>
+                    </a:solidFill>
+                  </a:tcPr>
+                </a:tc>
+                <a:tc>
+                  <a:txBody>
+                    <a:bodyPr/>
+                    <a:lstStyle/>
+                    <a:p>
+                      <a:pPr algn="l" defTabSz="95250">
+                        <a:tabLst>
+                          <a:tab pos="342900" algn="l"/>
+                        </a:tabLst>
+                      </a:pPr>
+                      <a:r>
+                        <a:rPr sz="800" baseline="0">
+                          <a:solidFill>
+                            <a:schemeClr val="tx1">
+                              <a:lumMod val="50000"/>
+                            </a:schemeClr>
+                          </a:solidFill>
+                        </a:rPr>
+                        <a:t>1.Open </a:t>
+                      </a:r>
+                    </a:p>
+                  </a:txBody>
+                  <a:tcPr marL="19050" marR="19050" marT="19050" marB="19050" horzOverflow="overflow">
+                    <a:lnL w="3175">
+                      <a:solidFill>
+                        <a:srgbClr val="000000"/>
+                      </a:solidFill>
+                      <a:miter lim="400000"/>
+                    </a:lnL>
+                    <a:lnR w="3175">
+                      <a:solidFill>
+                        <a:srgbClr val="000000"/>
+                      </a:solidFill>
+                      <a:miter lim="400000"/>
+                    </a:lnR>
+                    <a:lnT w="12700">
+                      <a:miter lim="400000"/>
+                    </a:lnT>
+                    <a:lnB w="12700">
+                      <a:miter lim="400000"/>
+                    </a:lnB>
+                    <a:solidFill>
+                      <a:schemeClr val="bg1"/>
+                    </a:solidFill>
+                  </a:tcPr>
+                </a:tc>
+                <a:extLst>
+                  <a:ext uri="{0D108BD9-81ED-4DB2-BD59-A6C34878D82A}">
+                    <a16:rowId xmlns:a16="http://schemas.microsoft.com/office/drawing/2014/main" val="10004"/>
+                  </a:ext>
+                </a:extLst>
+              </a:tr>
+              <a:tr h="232156">
+                <a:tc vMerge="1">
+                  <a:txBody>
+                    <a:bodyPr/>
+                    <a:lstStyle/>
+                    <a:p>
+                      <a:endParaRPr lang="ko-KR"/>
+                    </a:p>
+                  </a:txBody>
+                  <a:tcPr/>
+                </a:tc>
+                <a:tc gridSpan="2">
+                  <a:txBody>
+                    <a:bodyPr/>
+                    <a:lstStyle/>
+                    <a:p>
+                      <a:pPr algn="l" defTabSz="95250">
+                        <a:tabLst>
+                          <a:tab pos="342900" algn="l"/>
+                        </a:tabLst>
+                      </a:pPr>
+                      <a:r>
+                        <a:rPr sz="800" b="1" i="1" baseline="0" dirty="0">
+                          <a:solidFill>
+                            <a:schemeClr val="tx1">
+                              <a:lumMod val="50000"/>
+                            </a:schemeClr>
+                          </a:solidFill>
+                        </a:rPr>
+                        <a:t>Anterior view.</a:t>
+                      </a:r>
+                    </a:p>
+                  </a:txBody>
+                  <a:tcPr marL="19050" marR="19050" marT="19050" marB="19050" horzOverflow="overflow">
+                    <a:lnL w="3175">
+                      <a:solidFill>
+                        <a:srgbClr val="000000"/>
+                      </a:solidFill>
+                      <a:miter lim="400000"/>
+                    </a:lnL>
+                    <a:lnR w="3175">
+                      <a:solidFill>
+                        <a:srgbClr val="000000"/>
+                      </a:solidFill>
+                      <a:miter lim="400000"/>
+                    </a:lnR>
+                    <a:lnT w="12700">
+                      <a:miter lim="400000"/>
+                    </a:lnT>
+                    <a:lnB w="3175">
+                      <a:solidFill>
+                        <a:schemeClr val="accent2">
+                          <a:hueOff val="-85258"/>
+                          <a:satOff val="14347"/>
+                          <a:lumOff val="22373"/>
+                        </a:schemeClr>
+                      </a:solidFill>
+                      <a:miter lim="400000"/>
+                    </a:lnB>
+                    <a:solidFill>
+                      <a:schemeClr val="bg1"/>
+                    </a:solidFill>
+                  </a:tcPr>
+                </a:tc>
+                <a:tc hMerge="1">
+                  <a:txBody>
+                    <a:bodyPr/>
+                    <a:lstStyle/>
+                    <a:p>
+                      <a:endParaRPr lang="ko-KR"/>
+                    </a:p>
+                  </a:txBody>
+                  <a:tcPr/>
+                </a:tc>
+                <a:extLst>
+                  <a:ext uri="{0D108BD9-81ED-4DB2-BD59-A6C34878D82A}">
+                    <a16:rowId xmlns:a16="http://schemas.microsoft.com/office/drawing/2014/main" val="10005"/>
+                  </a:ext>
+                </a:extLst>
+              </a:tr>
+              <a:tr h="181268">
+                <a:tc vMerge="1">
+                  <a:txBody>
+                    <a:bodyPr/>
+                    <a:lstStyle/>
+                    <a:p>
+                      <a:endParaRPr lang="ko-KR"/>
+                    </a:p>
+                  </a:txBody>
+                  <a:tcPr/>
+                </a:tc>
+                <a:tc>
+                  <a:txBody>
+                    <a:bodyPr/>
+                    <a:lstStyle/>
+                    <a:p>
+                      <a:pPr algn="l" defTabSz="95250">
+                        <a:tabLst>
+                          <a:tab pos="342900" algn="l"/>
+                        </a:tabLst>
+                        <a:defRPr sz="2100"/>
+                      </a:pPr>
+                      <a:r>
+                        <a:rPr sz="800" baseline="0" dirty="0">
+                          <a:solidFill>
+                            <a:schemeClr val="tx1">
+                              <a:lumMod val="50000"/>
+                            </a:schemeClr>
+                          </a:solidFill>
+                        </a:rPr>
+                        <a:t>1.Open &amp; Bite  </a:t>
+                      </a:r>
+                      <a:r>
+                        <a:rPr sz="800" baseline="0" dirty="0">
+                          <a:solidFill>
+                            <a:schemeClr val="accent1">
+                              <a:lumMod val="75000"/>
+                            </a:schemeClr>
+                          </a:solidFill>
+                        </a:rPr>
+                        <a:t>2.Crossing eye &amp; biting video</a:t>
+                      </a:r>
+                    </a:p>
+                  </a:txBody>
+                  <a:tcPr marL="19050" marR="19050" marT="19050" marB="19050" horzOverflow="overflow">
+                    <a:lnL w="3175">
+                      <a:solidFill>
+                        <a:schemeClr val="accent2">
+                          <a:hueOff val="-85258"/>
+                          <a:satOff val="14347"/>
+                          <a:lumOff val="22373"/>
+                        </a:schemeClr>
+                      </a:solidFill>
+                      <a:miter lim="400000"/>
+                    </a:lnL>
+                    <a:lnR w="3175">
+                      <a:solidFill>
+                        <a:schemeClr val="accent2">
+                          <a:hueOff val="-85258"/>
+                          <a:satOff val="14347"/>
+                          <a:lumOff val="22373"/>
+                        </a:schemeClr>
+                      </a:solidFill>
+                      <a:miter lim="400000"/>
+                    </a:lnR>
+                    <a:lnT w="3175">
+                      <a:solidFill>
+                        <a:schemeClr val="accent2">
+                          <a:hueOff val="-85258"/>
+                          <a:satOff val="14347"/>
+                          <a:lumOff val="22373"/>
+                        </a:schemeClr>
+                      </a:solidFill>
+                      <a:miter lim="400000"/>
+                    </a:lnT>
+                    <a:lnB w="3175">
+                      <a:solidFill>
+                        <a:schemeClr val="accent2">
+                          <a:hueOff val="-85258"/>
+                          <a:satOff val="14347"/>
+                          <a:lumOff val="22373"/>
+                        </a:schemeClr>
+                      </a:solidFill>
+                      <a:miter lim="400000"/>
+                    </a:lnB>
+                    <a:solidFill>
+                      <a:schemeClr val="bg1"/>
+                    </a:solidFill>
+                  </a:tcPr>
+                </a:tc>
+                <a:tc>
+                  <a:txBody>
+                    <a:bodyPr/>
+                    <a:lstStyle/>
+                    <a:p>
+                      <a:pPr algn="l" defTabSz="95250">
+                        <a:tabLst>
+                          <a:tab pos="342900" algn="l"/>
+                        </a:tabLst>
+                      </a:pPr>
+                      <a:r>
+                        <a:rPr sz="800" baseline="0">
+                          <a:solidFill>
+                            <a:schemeClr val="tx1">
+                              <a:lumMod val="50000"/>
+                            </a:schemeClr>
+                          </a:solidFill>
+                        </a:rPr>
+                        <a:t>1.Open</a:t>
+                      </a:r>
+                    </a:p>
+                  </a:txBody>
+                  <a:tcPr marL="19050" marR="19050" marT="19050" marB="19050" horzOverflow="overflow">
+                    <a:lnL w="3175">
+                      <a:solidFill>
+                        <a:schemeClr val="accent2">
+                          <a:hueOff val="-85258"/>
+                          <a:satOff val="14347"/>
+                          <a:lumOff val="22373"/>
+                        </a:schemeClr>
+                      </a:solidFill>
+                      <a:miter lim="400000"/>
+                    </a:lnL>
+                    <a:lnR w="3175">
+                      <a:solidFill>
+                        <a:srgbClr val="000000"/>
+                      </a:solidFill>
+                      <a:miter lim="400000"/>
+                    </a:lnR>
+                    <a:lnT w="12700">
+                      <a:miter lim="400000"/>
+                    </a:lnT>
+                    <a:lnB w="12700">
+                      <a:miter lim="400000"/>
+                    </a:lnB>
+                    <a:solidFill>
+                      <a:schemeClr val="bg1"/>
+                    </a:solidFill>
+                  </a:tcPr>
+                </a:tc>
+                <a:extLst>
+                  <a:ext uri="{0D108BD9-81ED-4DB2-BD59-A6C34878D82A}">
+                    <a16:rowId xmlns:a16="http://schemas.microsoft.com/office/drawing/2014/main" val="10006"/>
+                  </a:ext>
+                </a:extLst>
+              </a:tr>
+              <a:tr h="223750">
+                <a:tc vMerge="1">
+                  <a:txBody>
+                    <a:bodyPr/>
+                    <a:lstStyle/>
+                    <a:p>
+                      <a:endParaRPr lang="ko-KR"/>
+                    </a:p>
+                  </a:txBody>
+                  <a:tcPr/>
+                </a:tc>
+                <a:tc gridSpan="2">
+                  <a:txBody>
+                    <a:bodyPr/>
+                    <a:lstStyle/>
+                    <a:p>
+                      <a:pPr algn="l" defTabSz="95250">
+                        <a:tabLst>
+                          <a:tab pos="342900" algn="l"/>
+                        </a:tabLst>
+                      </a:pPr>
+                      <a:r>
+                        <a:rPr sz="800" b="1" i="1" baseline="0" dirty="0">
+                          <a:solidFill>
+                            <a:schemeClr val="tx1">
+                              <a:lumMod val="50000"/>
+                            </a:schemeClr>
+                          </a:solidFill>
+                        </a:rPr>
+                        <a:t>Lateral view.</a:t>
+                      </a:r>
+                    </a:p>
+                  </a:txBody>
+                  <a:tcPr marL="19050" marR="19050" marT="19050" marB="19050" horzOverflow="overflow">
+                    <a:lnL w="3175">
+                      <a:solidFill>
+                        <a:srgbClr val="000000"/>
+                      </a:solidFill>
+                      <a:miter lim="400000"/>
+                    </a:lnL>
+                    <a:lnR w="3175">
+                      <a:solidFill>
+                        <a:srgbClr val="000000"/>
+                      </a:solidFill>
+                      <a:miter lim="400000"/>
+                    </a:lnR>
+                    <a:lnT w="3175">
+                      <a:solidFill>
+                        <a:schemeClr val="accent2">
+                          <a:hueOff val="-85258"/>
+                          <a:satOff val="14347"/>
+                          <a:lumOff val="22373"/>
+                        </a:schemeClr>
+                      </a:solidFill>
+                      <a:miter lim="400000"/>
+                    </a:lnT>
+                    <a:lnB w="12700">
+                      <a:miter lim="400000"/>
+                    </a:lnB>
+                    <a:solidFill>
+                      <a:schemeClr val="bg1"/>
+                    </a:solidFill>
+                  </a:tcPr>
+                </a:tc>
+                <a:tc hMerge="1">
+                  <a:txBody>
+                    <a:bodyPr/>
+                    <a:lstStyle/>
+                    <a:p>
+                      <a:endParaRPr lang="ko-KR"/>
+                    </a:p>
+                  </a:txBody>
+                  <a:tcPr/>
+                </a:tc>
+                <a:extLst>
+                  <a:ext uri="{0D108BD9-81ED-4DB2-BD59-A6C34878D82A}">
+                    <a16:rowId xmlns:a16="http://schemas.microsoft.com/office/drawing/2014/main" val="10007"/>
+                  </a:ext>
+                </a:extLst>
+              </a:tr>
+              <a:tr h="249605">
+                <a:tc vMerge="1">
+                  <a:txBody>
+                    <a:bodyPr/>
+                    <a:lstStyle/>
+                    <a:p>
+                      <a:endParaRPr lang="ko-KR"/>
+                    </a:p>
+                  </a:txBody>
+                  <a:tcPr/>
+                </a:tc>
+                <a:tc>
+                  <a:txBody>
+                    <a:bodyPr/>
+                    <a:lstStyle/>
+                    <a:p>
+                      <a:pPr algn="l" defTabSz="95250">
+                        <a:tabLst>
+                          <a:tab pos="342900" algn="l"/>
+                        </a:tabLst>
+                        <a:defRPr sz="2100"/>
+                      </a:pPr>
+                      <a:r>
+                        <a:rPr sz="800" baseline="0" dirty="0">
+                          <a:solidFill>
+                            <a:schemeClr val="tx1">
+                              <a:lumMod val="50000"/>
+                            </a:schemeClr>
+                          </a:solidFill>
+                        </a:rPr>
+                        <a:t>1.Open &amp; Bite 2.Upper body flexion(Holding ankle &amp; Knee</a:t>
+                      </a:r>
+                      <a:r>
+                        <a:rPr sz="800" baseline="0" dirty="0">
+                          <a:solidFill>
+                            <a:schemeClr val="accent1">
+                              <a:lumMod val="75000"/>
+                            </a:schemeClr>
+                          </a:solidFill>
+                        </a:rPr>
+                        <a:t>) 3.Crossing eye &amp; biting video</a:t>
+                      </a:r>
+                    </a:p>
+                  </a:txBody>
+                  <a:tcPr marL="19050" marR="19050" marT="19050" marB="19050" horzOverflow="overflow">
+                    <a:lnL w="3175">
+                      <a:solidFill>
+                        <a:srgbClr val="000000"/>
+                      </a:solidFill>
+                      <a:miter lim="400000"/>
+                    </a:lnL>
+                    <a:lnR w="3175">
+                      <a:solidFill>
+                        <a:srgbClr val="000000"/>
+                      </a:solidFill>
+                      <a:miter lim="400000"/>
+                    </a:lnR>
+                    <a:lnT w="12700">
+                      <a:miter lim="400000"/>
+                    </a:lnT>
+                    <a:lnB w="12700">
+                      <a:miter lim="400000"/>
+                    </a:lnB>
+                    <a:solidFill>
+                      <a:schemeClr val="bg1"/>
+                    </a:solidFill>
+                  </a:tcPr>
+                </a:tc>
+                <a:tc>
+                  <a:txBody>
+                    <a:bodyPr/>
+                    <a:lstStyle/>
+                    <a:p>
+                      <a:pPr algn="l" defTabSz="95250">
+                        <a:tabLst>
+                          <a:tab pos="342900" algn="l"/>
+                        </a:tabLst>
+                      </a:pPr>
+                      <a:r>
+                        <a:rPr sz="800" baseline="0">
+                          <a:solidFill>
+                            <a:schemeClr val="tx1">
+                              <a:lumMod val="50000"/>
+                            </a:schemeClr>
+                          </a:solidFill>
+                        </a:rPr>
+                        <a:t>1.Open</a:t>
+                      </a:r>
+                    </a:p>
+                  </a:txBody>
+                  <a:tcPr marL="19050" marR="19050" marT="19050" marB="19050" horzOverflow="overflow">
+                    <a:lnL w="3175">
+                      <a:solidFill>
+                        <a:srgbClr val="000000"/>
+                      </a:solidFill>
+                      <a:miter lim="400000"/>
+                    </a:lnL>
+                    <a:lnR w="3175">
+                      <a:solidFill>
+                        <a:srgbClr val="000000"/>
+                      </a:solidFill>
+                      <a:miter lim="400000"/>
+                    </a:lnR>
+                    <a:lnT w="12700">
+                      <a:miter lim="400000"/>
+                    </a:lnT>
+                    <a:lnB w="12700">
+                      <a:miter lim="400000"/>
+                    </a:lnB>
+                    <a:solidFill>
+                      <a:schemeClr val="bg1"/>
+                    </a:solidFill>
+                  </a:tcPr>
+                </a:tc>
+                <a:extLst>
+                  <a:ext uri="{0D108BD9-81ED-4DB2-BD59-A6C34878D82A}">
+                    <a16:rowId xmlns:a16="http://schemas.microsoft.com/office/drawing/2014/main" val="10008"/>
+                  </a:ext>
+                </a:extLst>
+              </a:tr>
+              <a:tr h="215279">
+                <a:tc rowSpan="4">
+                  <a:txBody>
+                    <a:bodyPr/>
+                    <a:lstStyle/>
+                    <a:p>
+                      <a:pPr algn="l" defTabSz="95250">
+                        <a:tabLst>
+                          <a:tab pos="342900" algn="l"/>
+                        </a:tabLst>
+                      </a:pPr>
+                      <a:r>
+                        <a:rPr sz="800" b="1" baseline="0">
+                          <a:solidFill>
+                            <a:schemeClr val="tx1">
+                              <a:lumMod val="50000"/>
+                            </a:schemeClr>
+                          </a:solidFill>
+                          <a:latin typeface="Gill Sans"/>
+                          <a:ea typeface="Gill Sans"/>
+                          <a:cs typeface="Gill Sans"/>
+                          <a:sym typeface="Gill Sans"/>
+                        </a:rPr>
+                        <a:t>     Foam mat  
+       view</a:t>
+                      </a:r>
+                    </a:p>
+                  </a:txBody>
+                  <a:tcPr marL="19050" marR="19050" marT="19050" marB="19050" horzOverflow="overflow">
+                    <a:lnL w="3175">
+                      <a:solidFill>
+                        <a:srgbClr val="000000"/>
+                      </a:solidFill>
+                      <a:miter lim="400000"/>
+                    </a:lnL>
+                    <a:lnR w="3175">
+                      <a:solidFill>
+                        <a:srgbClr val="000000"/>
+                      </a:solidFill>
+                      <a:miter lim="400000"/>
+                    </a:lnR>
+                    <a:lnT w="12700">
+                      <a:miter lim="400000"/>
+                    </a:lnT>
+                    <a:lnB w="12700">
+                      <a:miter lim="400000"/>
+                    </a:lnB>
+                    <a:solidFill>
+                      <a:schemeClr val="bg1"/>
+                    </a:solidFill>
+                  </a:tcPr>
+                </a:tc>
+                <a:tc gridSpan="2">
+                  <a:txBody>
+                    <a:bodyPr/>
+                    <a:lstStyle/>
+                    <a:p>
+                      <a:pPr algn="l" defTabSz="95250">
+                        <a:tabLst>
+                          <a:tab pos="342900" algn="l"/>
+                        </a:tabLst>
+                      </a:pPr>
+                      <a:r>
+                        <a:rPr sz="800" b="1" i="1" baseline="0" dirty="0">
+                          <a:solidFill>
+                            <a:schemeClr val="tx1">
+                              <a:lumMod val="50000"/>
+                            </a:schemeClr>
+                          </a:solidFill>
+                        </a:rPr>
+                        <a:t>Posterior view.</a:t>
+                      </a:r>
+                    </a:p>
+                  </a:txBody>
+                  <a:tcPr marL="19050" marR="19050" marT="19050" marB="19050" horzOverflow="overflow">
+                    <a:lnL w="3175">
+                      <a:solidFill>
+                        <a:srgbClr val="000000"/>
+                      </a:solidFill>
+                      <a:miter lim="400000"/>
+                    </a:lnL>
+                    <a:lnR w="3175">
+                      <a:solidFill>
+                        <a:srgbClr val="000000"/>
+                      </a:solidFill>
+                      <a:miter lim="400000"/>
+                    </a:lnR>
+                    <a:lnT w="12700">
+                      <a:miter lim="400000"/>
+                    </a:lnT>
+                    <a:lnB w="12700">
+                      <a:miter lim="400000"/>
+                    </a:lnB>
+                    <a:solidFill>
+                      <a:schemeClr val="bg1"/>
+                    </a:solidFill>
+                  </a:tcPr>
+                </a:tc>
+                <a:tc hMerge="1">
+                  <a:txBody>
+                    <a:bodyPr/>
+                    <a:lstStyle/>
+                    <a:p>
+                      <a:endParaRPr lang="ko-KR"/>
+                    </a:p>
+                  </a:txBody>
+                  <a:tcPr/>
+                </a:tc>
+                <a:extLst>
+                  <a:ext uri="{0D108BD9-81ED-4DB2-BD59-A6C34878D82A}">
+                    <a16:rowId xmlns:a16="http://schemas.microsoft.com/office/drawing/2014/main" val="10009"/>
+                  </a:ext>
+                </a:extLst>
+              </a:tr>
+              <a:tr h="278130">
+                <a:tc vMerge="1">
+                  <a:txBody>
+                    <a:bodyPr/>
+                    <a:lstStyle/>
+                    <a:p>
+                      <a:endParaRPr lang="ko-KR"/>
+                    </a:p>
+                  </a:txBody>
+                  <a:tcPr/>
+                </a:tc>
+                <a:tc>
+                  <a:txBody>
+                    <a:bodyPr/>
+                    <a:lstStyle/>
+                    <a:p>
+                      <a:pPr algn="l" defTabSz="95250">
+                        <a:tabLst>
+                          <a:tab pos="342900" algn="l"/>
+                        </a:tabLst>
+                      </a:pPr>
+                      <a:r>
+                        <a:rPr sz="800" baseline="0" dirty="0">
+                          <a:solidFill>
+                            <a:schemeClr val="tx1">
+                              <a:lumMod val="50000"/>
+                            </a:schemeClr>
+                          </a:solidFill>
+                        </a:rPr>
+                        <a:t>1.Open &amp; Bite 2.Upper body flexion(Holding ankle &amp; Knee)</a:t>
+                      </a:r>
+                    </a:p>
+                  </a:txBody>
+                  <a:tcPr marL="19050" marR="19050" marT="19050" marB="19050" horzOverflow="overflow">
+                    <a:lnL w="3175">
+                      <a:solidFill>
+                        <a:srgbClr val="000000"/>
+                      </a:solidFill>
+                      <a:miter lim="400000"/>
+                    </a:lnL>
+                    <a:lnR w="3175">
+                      <a:solidFill>
+                        <a:srgbClr val="000000"/>
+                      </a:solidFill>
+                      <a:miter lim="400000"/>
+                    </a:lnR>
+                    <a:lnT w="12700">
+                      <a:miter lim="400000"/>
+                    </a:lnT>
+                    <a:lnB w="12700">
+                      <a:miter lim="400000"/>
+                    </a:lnB>
+                    <a:solidFill>
+                      <a:schemeClr val="bg1"/>
+                    </a:solidFill>
+                  </a:tcPr>
+                </a:tc>
+                <a:tc>
+                  <a:txBody>
+                    <a:bodyPr/>
+                    <a:lstStyle/>
+                    <a:p>
+                      <a:pPr algn="l" defTabSz="95250">
+                        <a:tabLst>
+                          <a:tab pos="342900" algn="l"/>
+                        </a:tabLst>
+                      </a:pPr>
+                      <a:r>
+                        <a:rPr sz="800" baseline="0">
+                          <a:solidFill>
+                            <a:schemeClr val="tx1">
+                              <a:lumMod val="50000"/>
+                            </a:schemeClr>
+                          </a:solidFill>
+                        </a:rPr>
+                        <a:t>1.Open 
+2.Body side  bend bending</a:t>
+                      </a:r>
+                    </a:p>
+                  </a:txBody>
+                  <a:tcPr marL="19050" marR="19050" marT="19050" marB="19050" horzOverflow="overflow">
+                    <a:lnL w="3175">
+                      <a:solidFill>
+                        <a:srgbClr val="000000"/>
+                      </a:solidFill>
+                      <a:miter lim="400000"/>
+                    </a:lnL>
+                    <a:lnR w="3175">
+                      <a:solidFill>
+                        <a:srgbClr val="000000"/>
+                      </a:solidFill>
+                      <a:miter lim="400000"/>
+                    </a:lnR>
+                    <a:lnT w="12700">
+                      <a:miter lim="400000"/>
+                    </a:lnT>
+                    <a:lnB w="12700">
+                      <a:miter lim="400000"/>
+                    </a:lnB>
+                    <a:solidFill>
+                      <a:schemeClr val="bg1"/>
+                    </a:solidFill>
+                  </a:tcPr>
+                </a:tc>
+                <a:extLst>
+                  <a:ext uri="{0D108BD9-81ED-4DB2-BD59-A6C34878D82A}">
+                    <a16:rowId xmlns:a16="http://schemas.microsoft.com/office/drawing/2014/main" val="10010"/>
+                  </a:ext>
+                </a:extLst>
+              </a:tr>
+              <a:tr h="194039">
+                <a:tc vMerge="1">
+                  <a:txBody>
+                    <a:bodyPr/>
+                    <a:lstStyle/>
+                    <a:p>
+                      <a:endParaRPr lang="ko-KR"/>
+                    </a:p>
+                  </a:txBody>
+                  <a:tcPr/>
+                </a:tc>
+                <a:tc gridSpan="2">
+                  <a:txBody>
+                    <a:bodyPr/>
+                    <a:lstStyle/>
+                    <a:p>
+                      <a:pPr algn="l" defTabSz="95250">
+                        <a:tabLst>
+                          <a:tab pos="342900" algn="l"/>
+                        </a:tabLst>
+                      </a:pPr>
+                      <a:r>
+                        <a:rPr sz="800" b="1" i="1" baseline="0" dirty="0">
+                          <a:solidFill>
+                            <a:schemeClr val="tx1">
+                              <a:lumMod val="50000"/>
+                            </a:schemeClr>
+                          </a:solidFill>
+                        </a:rPr>
+                        <a:t>Anterior view.</a:t>
+                      </a:r>
+                    </a:p>
+                  </a:txBody>
+                  <a:tcPr marL="19050" marR="19050" marT="19050" marB="19050" horzOverflow="overflow">
+                    <a:lnL w="3175">
+                      <a:solidFill>
+                        <a:srgbClr val="000000"/>
+                      </a:solidFill>
+                      <a:miter lim="400000"/>
+                    </a:lnL>
+                    <a:lnR w="3175">
+                      <a:solidFill>
+                        <a:srgbClr val="000000"/>
+                      </a:solidFill>
+                      <a:miter lim="400000"/>
+                    </a:lnR>
+                    <a:lnT w="12700">
+                      <a:miter lim="400000"/>
+                    </a:lnT>
+                    <a:lnB w="12700">
+                      <a:miter lim="400000"/>
+                    </a:lnB>
+                    <a:solidFill>
+                      <a:schemeClr val="bg1"/>
+                    </a:solidFill>
+                  </a:tcPr>
+                </a:tc>
+                <a:tc hMerge="1">
+                  <a:txBody>
+                    <a:bodyPr/>
+                    <a:lstStyle/>
+                    <a:p>
+                      <a:endParaRPr lang="ko-KR"/>
+                    </a:p>
+                  </a:txBody>
+                  <a:tcPr/>
+                </a:tc>
+                <a:extLst>
+                  <a:ext uri="{0D108BD9-81ED-4DB2-BD59-A6C34878D82A}">
+                    <a16:rowId xmlns:a16="http://schemas.microsoft.com/office/drawing/2014/main" val="10011"/>
+                  </a:ext>
+                </a:extLst>
+              </a:tr>
+              <a:tr h="214545">
+                <a:tc vMerge="1">
+                  <a:txBody>
+                    <a:bodyPr/>
+                    <a:lstStyle/>
+                    <a:p>
+                      <a:endParaRPr lang="ko-KR"/>
+                    </a:p>
+                  </a:txBody>
+                  <a:tcPr/>
+                </a:tc>
+                <a:tc>
+                  <a:txBody>
+                    <a:bodyPr/>
+                    <a:lstStyle/>
+                    <a:p>
+                      <a:pPr algn="l" defTabSz="95250">
+                        <a:tabLst>
+                          <a:tab pos="342900" algn="l"/>
+                        </a:tabLst>
+                      </a:pPr>
+                      <a:r>
+                        <a:rPr sz="800" baseline="0" dirty="0">
+                          <a:solidFill>
+                            <a:schemeClr val="tx1">
+                              <a:lumMod val="50000"/>
+                            </a:schemeClr>
+                          </a:solidFill>
+                        </a:rPr>
+                        <a:t>1.Open &amp; Bite</a:t>
+                      </a:r>
+                    </a:p>
+                  </a:txBody>
+                  <a:tcPr marL="19050" marR="19050" marT="19050" marB="19050" horzOverflow="overflow">
+                    <a:lnL w="3175">
+                      <a:solidFill>
+                        <a:srgbClr val="000000"/>
+                      </a:solidFill>
+                      <a:miter lim="400000"/>
+                    </a:lnL>
+                    <a:lnR w="3175">
+                      <a:solidFill>
+                        <a:srgbClr val="000000"/>
+                      </a:solidFill>
+                      <a:miter lim="400000"/>
+                    </a:lnR>
+                    <a:lnT w="12700">
+                      <a:miter lim="400000"/>
+                    </a:lnT>
+                    <a:lnB w="12700">
+                      <a:miter lim="400000"/>
+                    </a:lnB>
+                    <a:solidFill>
+                      <a:schemeClr val="bg1"/>
+                    </a:solidFill>
+                  </a:tcPr>
+                </a:tc>
+                <a:tc>
+                  <a:txBody>
+                    <a:bodyPr/>
+                    <a:lstStyle/>
+                    <a:p>
+                      <a:pPr algn="l" defTabSz="95250">
+                        <a:tabLst>
+                          <a:tab pos="342900" algn="l"/>
+                        </a:tabLst>
+                      </a:pPr>
+                      <a:r>
+                        <a:rPr sz="800" baseline="0">
+                          <a:solidFill>
+                            <a:schemeClr val="tx1">
+                              <a:lumMod val="50000"/>
+                            </a:schemeClr>
+                          </a:solidFill>
+                        </a:rPr>
+                        <a:t>1.Open</a:t>
+                      </a:r>
+                    </a:p>
+                  </a:txBody>
+                  <a:tcPr marL="19050" marR="19050" marT="19050" marB="19050" horzOverflow="overflow">
+                    <a:lnL w="3175">
+                      <a:solidFill>
+                        <a:srgbClr val="000000"/>
+                      </a:solidFill>
+                      <a:miter lim="400000"/>
+                    </a:lnL>
+                    <a:lnR w="3175">
+                      <a:solidFill>
+                        <a:srgbClr val="000000"/>
+                      </a:solidFill>
+                      <a:miter lim="400000"/>
+                    </a:lnR>
+                    <a:lnT w="12700">
+                      <a:miter lim="400000"/>
+                    </a:lnT>
+                    <a:lnB w="12700">
+                      <a:miter lim="400000"/>
+                    </a:lnB>
+                    <a:solidFill>
+                      <a:schemeClr val="bg1"/>
+                    </a:solidFill>
+                  </a:tcPr>
+                </a:tc>
+                <a:extLst>
+                  <a:ext uri="{0D108BD9-81ED-4DB2-BD59-A6C34878D82A}">
+                    <a16:rowId xmlns:a16="http://schemas.microsoft.com/office/drawing/2014/main" val="10012"/>
+                  </a:ext>
+                </a:extLst>
+              </a:tr>
+              <a:tr h="196596">
+                <a:tc rowSpan="6">
+                  <a:txBody>
+                    <a:bodyPr/>
+                    <a:lstStyle/>
+                    <a:p>
+                      <a:pPr algn="l" defTabSz="95250">
+                        <a:tabLst>
+                          <a:tab pos="342900" algn="l"/>
+                        </a:tabLst>
+                      </a:pPr>
+                      <a:r>
+                        <a:rPr sz="800" b="1" baseline="0">
+                          <a:solidFill>
+                            <a:schemeClr val="tx1">
+                              <a:lumMod val="50000"/>
+                            </a:schemeClr>
+                          </a:solidFill>
+                          <a:latin typeface="Gill Sans"/>
+                          <a:ea typeface="Gill Sans"/>
+                          <a:cs typeface="Gill Sans"/>
+                          <a:sym typeface="Gill Sans"/>
+                        </a:rPr>
+                        <a:t>    Seating</a:t>
+                      </a:r>
+                    </a:p>
+                  </a:txBody>
+                  <a:tcPr marL="19050" marR="19050" marT="19050" marB="19050" horzOverflow="overflow">
+                    <a:lnL w="3175">
+                      <a:solidFill>
+                        <a:srgbClr val="000000"/>
+                      </a:solidFill>
+                      <a:miter lim="400000"/>
+                    </a:lnL>
+                    <a:lnR w="3175">
+                      <a:solidFill>
+                        <a:srgbClr val="000000"/>
+                      </a:solidFill>
+                      <a:miter lim="400000"/>
+                    </a:lnR>
+                    <a:lnT w="12700">
+                      <a:miter lim="400000"/>
+                    </a:lnT>
+                    <a:lnB w="12700">
+                      <a:miter lim="400000"/>
+                    </a:lnB>
+                    <a:solidFill>
+                      <a:schemeClr val="bg1"/>
+                    </a:solidFill>
+                  </a:tcPr>
+                </a:tc>
+                <a:tc gridSpan="2">
+                  <a:txBody>
+                    <a:bodyPr/>
+                    <a:lstStyle/>
+                    <a:p>
+                      <a:pPr algn="l" defTabSz="95250">
+                        <a:tabLst>
+                          <a:tab pos="342900" algn="l"/>
+                        </a:tabLst>
+                      </a:pPr>
+                      <a:r>
+                        <a:rPr sz="800" b="1" i="1" baseline="0" dirty="0">
+                          <a:solidFill>
+                            <a:schemeClr val="tx1">
+                              <a:lumMod val="50000"/>
+                            </a:schemeClr>
+                          </a:solidFill>
+                        </a:rPr>
+                        <a:t>Posterior view.</a:t>
+                      </a:r>
+                    </a:p>
+                  </a:txBody>
+                  <a:tcPr marL="19050" marR="19050" marT="19050" marB="19050" horzOverflow="overflow">
+                    <a:lnL w="3175">
+                      <a:solidFill>
+                        <a:srgbClr val="000000"/>
+                      </a:solidFill>
+                      <a:miter lim="400000"/>
+                    </a:lnL>
+                    <a:lnR w="3175">
+                      <a:solidFill>
+                        <a:srgbClr val="000000"/>
+                      </a:solidFill>
+                      <a:miter lim="400000"/>
+                    </a:lnR>
+                    <a:lnT w="12700">
+                      <a:miter lim="400000"/>
+                    </a:lnT>
+                    <a:lnB w="12700">
+                      <a:miter lim="400000"/>
+                    </a:lnB>
+                    <a:solidFill>
+                      <a:schemeClr val="bg1"/>
+                    </a:solidFill>
+                  </a:tcPr>
+                </a:tc>
+                <a:tc hMerge="1">
+                  <a:txBody>
+                    <a:bodyPr/>
+                    <a:lstStyle/>
+                    <a:p>
+                      <a:endParaRPr lang="ko-KR"/>
+                    </a:p>
+                  </a:txBody>
+                  <a:tcPr/>
+                </a:tc>
+                <a:extLst>
+                  <a:ext uri="{0D108BD9-81ED-4DB2-BD59-A6C34878D82A}">
+                    <a16:rowId xmlns:a16="http://schemas.microsoft.com/office/drawing/2014/main" val="10013"/>
+                  </a:ext>
+                </a:extLst>
+              </a:tr>
+              <a:tr h="198128">
+                <a:tc vMerge="1">
+                  <a:txBody>
+                    <a:bodyPr/>
+                    <a:lstStyle/>
+                    <a:p>
+                      <a:endParaRPr lang="ko-KR"/>
+                    </a:p>
+                  </a:txBody>
+                  <a:tcPr/>
+                </a:tc>
+                <a:tc>
+                  <a:txBody>
+                    <a:bodyPr/>
+                    <a:lstStyle/>
+                    <a:p>
+                      <a:pPr algn="l" defTabSz="95250">
+                        <a:tabLst>
+                          <a:tab pos="342900" algn="l"/>
+                        </a:tabLst>
+                      </a:pPr>
+                      <a:r>
+                        <a:rPr sz="800" baseline="0">
+                          <a:solidFill>
+                            <a:schemeClr val="tx1">
+                              <a:lumMod val="50000"/>
+                            </a:schemeClr>
+                          </a:solidFill>
+                        </a:rPr>
+                        <a:t>1.Open &amp; Bite 2.Upper body flexion(Holding ankle)</a:t>
+                      </a:r>
+                    </a:p>
+                  </a:txBody>
+                  <a:tcPr marL="19050" marR="19050" marT="19050" marB="19050" horzOverflow="overflow">
+                    <a:lnL w="3175">
+                      <a:solidFill>
+                        <a:srgbClr val="000000"/>
+                      </a:solidFill>
+                      <a:miter lim="400000"/>
+                    </a:lnL>
+                    <a:lnR w="3175">
+                      <a:solidFill>
+                        <a:srgbClr val="000000"/>
+                      </a:solidFill>
+                      <a:miter lim="400000"/>
+                    </a:lnR>
+                    <a:lnT w="12700">
+                      <a:miter lim="400000"/>
+                    </a:lnT>
+                    <a:lnB w="12700">
+                      <a:miter lim="400000"/>
+                    </a:lnB>
+                    <a:solidFill>
+                      <a:schemeClr val="bg1"/>
+                    </a:solidFill>
+                  </a:tcPr>
+                </a:tc>
+                <a:tc>
+                  <a:txBody>
+                    <a:bodyPr/>
+                    <a:lstStyle/>
+                    <a:p>
+                      <a:pPr algn="l" defTabSz="95250">
+                        <a:tabLst>
+                          <a:tab pos="342900" algn="l"/>
+                        </a:tabLst>
+                      </a:pPr>
+                      <a:r>
+                        <a:rPr sz="800" baseline="0" dirty="0">
+                          <a:solidFill>
+                            <a:schemeClr val="tx1">
+                              <a:lumMod val="50000"/>
+                            </a:schemeClr>
+                          </a:solidFill>
+                        </a:rPr>
+                        <a:t>1.Open</a:t>
+                      </a:r>
+                    </a:p>
+                  </a:txBody>
+                  <a:tcPr marL="19050" marR="19050" marT="19050" marB="19050" horzOverflow="overflow">
+                    <a:lnL w="3175">
+                      <a:solidFill>
+                        <a:srgbClr val="000000"/>
+                      </a:solidFill>
+                      <a:miter lim="400000"/>
+                    </a:lnL>
+                    <a:lnR w="3175">
+                      <a:solidFill>
+                        <a:srgbClr val="000000"/>
+                      </a:solidFill>
+                      <a:miter lim="400000"/>
+                    </a:lnR>
+                    <a:lnT w="12700">
+                      <a:miter lim="400000"/>
+                    </a:lnT>
+                    <a:lnB w="12700">
+                      <a:miter lim="400000"/>
+                    </a:lnB>
+                    <a:solidFill>
+                      <a:schemeClr val="bg1"/>
+                    </a:solidFill>
+                  </a:tcPr>
+                </a:tc>
+                <a:extLst>
+                  <a:ext uri="{0D108BD9-81ED-4DB2-BD59-A6C34878D82A}">
+                    <a16:rowId xmlns:a16="http://schemas.microsoft.com/office/drawing/2014/main" val="10014"/>
+                  </a:ext>
+                </a:extLst>
+              </a:tr>
+              <a:tr h="209810">
+                <a:tc vMerge="1">
+                  <a:txBody>
+                    <a:bodyPr/>
+                    <a:lstStyle/>
+                    <a:p>
+                      <a:endParaRPr lang="ko-KR"/>
+                    </a:p>
+                  </a:txBody>
+                  <a:tcPr/>
+                </a:tc>
+                <a:tc gridSpan="2">
+                  <a:txBody>
+                    <a:bodyPr/>
+                    <a:lstStyle/>
+                    <a:p>
+                      <a:pPr algn="l" defTabSz="95250">
+                        <a:tabLst>
+                          <a:tab pos="342900" algn="l"/>
+                        </a:tabLst>
+                      </a:pPr>
+                      <a:r>
+                        <a:rPr sz="800" b="1" i="1" baseline="0" dirty="0">
+                          <a:solidFill>
+                            <a:schemeClr val="tx1">
+                              <a:lumMod val="50000"/>
+                            </a:schemeClr>
+                          </a:solidFill>
+                        </a:rPr>
+                        <a:t>Anterior view.</a:t>
+                      </a:r>
+                    </a:p>
+                  </a:txBody>
+                  <a:tcPr marL="19050" marR="19050" marT="19050" marB="19050" horzOverflow="overflow">
+                    <a:lnL w="3175">
+                      <a:solidFill>
+                        <a:srgbClr val="000000"/>
+                      </a:solidFill>
+                      <a:miter lim="400000"/>
+                    </a:lnL>
+                    <a:lnR w="3175">
+                      <a:solidFill>
+                        <a:srgbClr val="000000"/>
+                      </a:solidFill>
+                      <a:miter lim="400000"/>
+                    </a:lnR>
+                    <a:lnT w="12700">
+                      <a:miter lim="400000"/>
+                    </a:lnT>
+                    <a:lnB w="12700">
+                      <a:miter lim="400000"/>
+                    </a:lnB>
+                    <a:solidFill>
+                      <a:schemeClr val="bg1"/>
+                    </a:solidFill>
+                  </a:tcPr>
+                </a:tc>
+                <a:tc hMerge="1">
+                  <a:txBody>
+                    <a:bodyPr/>
+                    <a:lstStyle/>
+                    <a:p>
+                      <a:endParaRPr lang="ko-KR"/>
+                    </a:p>
+                  </a:txBody>
+                  <a:tcPr/>
+                </a:tc>
+                <a:extLst>
+                  <a:ext uri="{0D108BD9-81ED-4DB2-BD59-A6C34878D82A}">
+                    <a16:rowId xmlns:a16="http://schemas.microsoft.com/office/drawing/2014/main" val="10015"/>
+                  </a:ext>
+                </a:extLst>
+              </a:tr>
+              <a:tr h="194727">
+                <a:tc vMerge="1">
+                  <a:txBody>
+                    <a:bodyPr/>
+                    <a:lstStyle/>
+                    <a:p>
+                      <a:endParaRPr lang="ko-KR"/>
+                    </a:p>
+                  </a:txBody>
+                  <a:tcPr/>
+                </a:tc>
+                <a:tc>
+                  <a:txBody>
+                    <a:bodyPr/>
+                    <a:lstStyle/>
+                    <a:p>
+                      <a:pPr algn="l" defTabSz="95250">
+                        <a:tabLst>
+                          <a:tab pos="342900" algn="l"/>
+                        </a:tabLst>
+                      </a:pPr>
+                      <a:r>
+                        <a:rPr sz="800" baseline="0">
+                          <a:solidFill>
+                            <a:schemeClr val="tx1">
+                              <a:lumMod val="50000"/>
+                            </a:schemeClr>
+                          </a:solidFill>
+                        </a:rPr>
+                        <a:t>1.Open &amp; Bite</a:t>
+                      </a:r>
+                    </a:p>
+                  </a:txBody>
+                  <a:tcPr marL="19050" marR="19050" marT="19050" marB="19050" horzOverflow="overflow">
+                    <a:lnL w="3175">
+                      <a:solidFill>
+                        <a:srgbClr val="000000"/>
+                      </a:solidFill>
+                      <a:miter lim="400000"/>
+                    </a:lnL>
+                    <a:lnR w="3175">
+                      <a:solidFill>
+                        <a:srgbClr val="000000"/>
+                      </a:solidFill>
+                      <a:miter lim="400000"/>
+                    </a:lnR>
+                    <a:lnT w="12700">
+                      <a:miter lim="400000"/>
+                    </a:lnT>
+                    <a:lnB w="12700">
+                      <a:miter lim="400000"/>
+                    </a:lnB>
+                    <a:solidFill>
+                      <a:schemeClr val="bg1"/>
+                    </a:solidFill>
+                  </a:tcPr>
+                </a:tc>
+                <a:tc>
+                  <a:txBody>
+                    <a:bodyPr/>
+                    <a:lstStyle/>
+                    <a:p>
+                      <a:pPr algn="l" defTabSz="95250">
+                        <a:tabLst>
+                          <a:tab pos="342900" algn="l"/>
+                        </a:tabLst>
+                      </a:pPr>
+                      <a:r>
+                        <a:rPr sz="800" baseline="0" dirty="0">
+                          <a:solidFill>
+                            <a:schemeClr val="tx1">
+                              <a:lumMod val="50000"/>
+                            </a:schemeClr>
+                          </a:solidFill>
+                        </a:rPr>
+                        <a:t>1.Open</a:t>
+                      </a:r>
+                    </a:p>
+                  </a:txBody>
+                  <a:tcPr marL="19050" marR="19050" marT="19050" marB="19050" horzOverflow="overflow">
+                    <a:lnL w="3175">
+                      <a:solidFill>
+                        <a:srgbClr val="000000"/>
+                      </a:solidFill>
+                      <a:miter lim="400000"/>
+                    </a:lnL>
+                    <a:lnR w="3175">
+                      <a:solidFill>
+                        <a:srgbClr val="000000"/>
+                      </a:solidFill>
+                      <a:miter lim="400000"/>
+                    </a:lnR>
+                    <a:lnT w="12700">
+                      <a:miter lim="400000"/>
+                    </a:lnT>
+                    <a:lnB w="12700">
+                      <a:miter lim="400000"/>
+                    </a:lnB>
+                    <a:solidFill>
+                      <a:schemeClr val="bg1"/>
+                    </a:solidFill>
+                  </a:tcPr>
+                </a:tc>
+                <a:extLst>
+                  <a:ext uri="{0D108BD9-81ED-4DB2-BD59-A6C34878D82A}">
+                    <a16:rowId xmlns:a16="http://schemas.microsoft.com/office/drawing/2014/main" val="10016"/>
+                  </a:ext>
+                </a:extLst>
+              </a:tr>
+              <a:tr h="212808">
+                <a:tc vMerge="1">
+                  <a:txBody>
+                    <a:bodyPr/>
+                    <a:lstStyle/>
+                    <a:p>
+                      <a:endParaRPr lang="ko-KR"/>
+                    </a:p>
+                  </a:txBody>
+                  <a:tcPr/>
+                </a:tc>
+                <a:tc gridSpan="2">
+                  <a:txBody>
+                    <a:bodyPr/>
+                    <a:lstStyle/>
+                    <a:p>
+                      <a:pPr algn="l" defTabSz="95250">
+                        <a:tabLst>
+                          <a:tab pos="342900" algn="l"/>
+                        </a:tabLst>
+                      </a:pPr>
+                      <a:r>
+                        <a:rPr sz="800" b="1" i="1" baseline="0" dirty="0">
+                          <a:solidFill>
+                            <a:schemeClr val="tx1">
+                              <a:lumMod val="50000"/>
+                            </a:schemeClr>
+                          </a:solidFill>
+                        </a:rPr>
+                        <a:t>Vertical view.</a:t>
+                      </a:r>
+                    </a:p>
+                  </a:txBody>
+                  <a:tcPr marL="19050" marR="19050" marT="19050" marB="19050" horzOverflow="overflow">
+                    <a:lnL w="3175">
+                      <a:solidFill>
+                        <a:srgbClr val="000000"/>
+                      </a:solidFill>
+                      <a:miter lim="400000"/>
+                    </a:lnL>
+                    <a:lnR w="3175">
+                      <a:solidFill>
+                        <a:srgbClr val="000000"/>
+                      </a:solidFill>
+                      <a:miter lim="400000"/>
+                    </a:lnR>
+                    <a:lnT w="12700">
+                      <a:miter lim="400000"/>
+                    </a:lnT>
+                    <a:lnB w="12700">
+                      <a:miter lim="400000"/>
+                    </a:lnB>
+                    <a:solidFill>
+                      <a:schemeClr val="bg1"/>
+                    </a:solidFill>
+                  </a:tcPr>
+                </a:tc>
+                <a:tc hMerge="1">
+                  <a:txBody>
+                    <a:bodyPr/>
+                    <a:lstStyle/>
+                    <a:p>
+                      <a:endParaRPr lang="ko-KR"/>
+                    </a:p>
+                  </a:txBody>
+                  <a:tcPr/>
+                </a:tc>
+                <a:extLst>
+                  <a:ext uri="{0D108BD9-81ED-4DB2-BD59-A6C34878D82A}">
+                    <a16:rowId xmlns:a16="http://schemas.microsoft.com/office/drawing/2014/main" val="10017"/>
+                  </a:ext>
+                </a:extLst>
+              </a:tr>
+              <a:tr h="180364">
+                <a:tc vMerge="1">
+                  <a:txBody>
+                    <a:bodyPr/>
+                    <a:lstStyle/>
+                    <a:p>
+                      <a:endParaRPr lang="ko-KR"/>
+                    </a:p>
+                  </a:txBody>
+                  <a:tcPr/>
+                </a:tc>
+                <a:tc>
+                  <a:txBody>
+                    <a:bodyPr/>
+                    <a:lstStyle/>
+                    <a:p>
+                      <a:pPr algn="l" defTabSz="95250">
+                        <a:tabLst>
+                          <a:tab pos="342900" algn="l"/>
+                        </a:tabLst>
+                      </a:pPr>
+                      <a:r>
+                        <a:rPr sz="800" baseline="0">
+                          <a:solidFill>
+                            <a:schemeClr val="tx1">
+                              <a:lumMod val="50000"/>
+                            </a:schemeClr>
+                          </a:solidFill>
+                        </a:rPr>
+                        <a:t>1.Scapular girdle rotation</a:t>
+                      </a:r>
+                    </a:p>
+                  </a:txBody>
+                  <a:tcPr marL="19050" marR="19050" marT="19050" marB="19050" horzOverflow="overflow">
+                    <a:lnL w="3175">
+                      <a:solidFill>
+                        <a:srgbClr val="000000"/>
+                      </a:solidFill>
+                      <a:miter lim="400000"/>
+                    </a:lnL>
+                    <a:lnR w="3175">
+                      <a:solidFill>
+                        <a:srgbClr val="000000"/>
+                      </a:solidFill>
+                      <a:miter lim="400000"/>
+                    </a:lnR>
+                    <a:lnT w="12700">
+                      <a:miter lim="400000"/>
+                    </a:lnT>
+                    <a:lnB w="12700">
+                      <a:miter lim="400000"/>
+                    </a:lnB>
+                    <a:solidFill>
+                      <a:schemeClr val="bg1"/>
+                    </a:solidFill>
+                  </a:tcPr>
+                </a:tc>
+                <a:tc>
+                  <a:txBody>
+                    <a:bodyPr/>
+                    <a:lstStyle/>
+                    <a:p>
+                      <a:pPr defTabSz="914400">
+                        <a:tabLst>
+                          <a:tab pos="342900" algn="l"/>
+                        </a:tabLst>
+                        <a:defRPr sz="2200">
+                          <a:latin typeface="Avenir Next Regular"/>
+                          <a:ea typeface="Avenir Next Regular"/>
+                          <a:cs typeface="Avenir Next Regular"/>
+                          <a:sym typeface="Avenir Next Regular"/>
+                        </a:defRPr>
+                      </a:pPr>
+                      <a:endParaRPr sz="800" baseline="0">
+                        <a:solidFill>
+                          <a:schemeClr val="tx1">
+                            <a:lumMod val="50000"/>
+                          </a:schemeClr>
+                        </a:solidFill>
+                      </a:endParaRPr>
+                    </a:p>
+                  </a:txBody>
+                  <a:tcPr marL="19050" marR="19050" marT="19050" marB="19050" horzOverflow="overflow">
+                    <a:lnL w="3175">
+                      <a:solidFill>
+                        <a:srgbClr val="000000"/>
+                      </a:solidFill>
+                      <a:miter lim="400000"/>
+                    </a:lnL>
+                    <a:lnR w="3175">
+                      <a:solidFill>
+                        <a:srgbClr val="000000"/>
+                      </a:solidFill>
+                      <a:miter lim="400000"/>
+                    </a:lnR>
+                    <a:lnT w="12700">
+                      <a:miter lim="400000"/>
+                    </a:lnT>
+                    <a:lnB w="12700">
+                      <a:miter lim="400000"/>
+                    </a:lnB>
+                    <a:solidFill>
+                      <a:schemeClr val="bg1"/>
+                    </a:solidFill>
+                  </a:tcPr>
+                </a:tc>
+                <a:extLst>
+                  <a:ext uri="{0D108BD9-81ED-4DB2-BD59-A6C34878D82A}">
+                    <a16:rowId xmlns:a16="http://schemas.microsoft.com/office/drawing/2014/main" val="10018"/>
+                  </a:ext>
+                </a:extLst>
+              </a:tr>
+              <a:tr h="237261">
+                <a:tc rowSpan="4">
+                  <a:txBody>
+                    <a:bodyPr/>
+                    <a:lstStyle/>
+                    <a:p>
+                      <a:pPr algn="l" defTabSz="95250">
+                        <a:tabLst>
+                          <a:tab pos="342900" algn="l"/>
+                        </a:tabLst>
+                      </a:pPr>
+                      <a:r>
+                        <a:rPr sz="800" b="1" baseline="0">
+                          <a:solidFill>
+                            <a:schemeClr val="tx1">
+                              <a:lumMod val="50000"/>
+                            </a:schemeClr>
+                          </a:solidFill>
+                          <a:latin typeface="Gill Sans"/>
+                          <a:ea typeface="Gill Sans"/>
+                          <a:cs typeface="Gill Sans"/>
+                          <a:sym typeface="Gill Sans"/>
+                        </a:rPr>
+                        <a:t>    On bed</a:t>
+                      </a:r>
+                    </a:p>
+                  </a:txBody>
+                  <a:tcPr marL="19050" marR="19050" marT="19050" marB="19050" horzOverflow="overflow">
+                    <a:lnL w="3175">
+                      <a:solidFill>
+                        <a:srgbClr val="000000"/>
+                      </a:solidFill>
+                      <a:miter lim="400000"/>
+                    </a:lnL>
+                    <a:lnR w="3175">
+                      <a:solidFill>
+                        <a:srgbClr val="000000"/>
+                      </a:solidFill>
+                      <a:miter lim="400000"/>
+                    </a:lnR>
+                    <a:lnT w="12700">
+                      <a:miter lim="400000"/>
+                    </a:lnT>
+                    <a:lnB w="3175">
+                      <a:solidFill>
+                        <a:srgbClr val="000000"/>
+                      </a:solidFill>
+                      <a:miter lim="400000"/>
+                    </a:lnB>
+                    <a:solidFill>
+                      <a:schemeClr val="bg1"/>
+                    </a:solidFill>
+                  </a:tcPr>
+                </a:tc>
+                <a:tc gridSpan="2">
+                  <a:txBody>
+                    <a:bodyPr/>
+                    <a:lstStyle/>
+                    <a:p>
+                      <a:pPr algn="l" defTabSz="95250">
+                        <a:tabLst>
+                          <a:tab pos="342900" algn="l"/>
+                        </a:tabLst>
+                      </a:pPr>
+                      <a:r>
+                        <a:rPr sz="800" b="1" i="1" baseline="0" dirty="0">
+                          <a:solidFill>
+                            <a:schemeClr val="tx1">
+                              <a:lumMod val="50000"/>
+                            </a:schemeClr>
+                          </a:solidFill>
+                        </a:rPr>
+                        <a:t>Posterior view.</a:t>
+                      </a:r>
+                    </a:p>
+                  </a:txBody>
+                  <a:tcPr marL="19050" marR="19050" marT="19050" marB="19050" horzOverflow="overflow">
+                    <a:lnL w="3175">
+                      <a:solidFill>
+                        <a:srgbClr val="000000"/>
+                      </a:solidFill>
+                      <a:miter lim="400000"/>
+                    </a:lnL>
+                    <a:lnR w="3175">
+                      <a:solidFill>
+                        <a:srgbClr val="000000"/>
+                      </a:solidFill>
+                      <a:miter lim="400000"/>
+                    </a:lnR>
+                    <a:lnT w="12700">
+                      <a:miter lim="400000"/>
+                    </a:lnT>
+                    <a:lnB w="12700">
+                      <a:miter lim="400000"/>
+                    </a:lnB>
+                    <a:solidFill>
+                      <a:schemeClr val="bg1"/>
+                    </a:solidFill>
+                  </a:tcPr>
+                </a:tc>
+                <a:tc hMerge="1">
+                  <a:txBody>
+                    <a:bodyPr/>
+                    <a:lstStyle/>
+                    <a:p>
+                      <a:endParaRPr lang="ko-KR"/>
+                    </a:p>
+                  </a:txBody>
+                  <a:tcPr/>
+                </a:tc>
+                <a:extLst>
+                  <a:ext uri="{0D108BD9-81ED-4DB2-BD59-A6C34878D82A}">
+                    <a16:rowId xmlns:a16="http://schemas.microsoft.com/office/drawing/2014/main" val="10019"/>
+                  </a:ext>
+                </a:extLst>
+              </a:tr>
+              <a:tr h="216867">
+                <a:tc vMerge="1">
+                  <a:txBody>
+                    <a:bodyPr/>
+                    <a:lstStyle/>
+                    <a:p>
+                      <a:endParaRPr lang="ko-KR"/>
+                    </a:p>
+                  </a:txBody>
+                  <a:tcPr/>
+                </a:tc>
+                <a:tc>
+                  <a:txBody>
+                    <a:bodyPr/>
+                    <a:lstStyle/>
+                    <a:p>
+                      <a:pPr algn="l" defTabSz="95250">
+                        <a:tabLst>
+                          <a:tab pos="342900" algn="l"/>
+                        </a:tabLst>
+                      </a:pPr>
+                      <a:r>
+                        <a:rPr sz="800" baseline="0">
+                          <a:solidFill>
+                            <a:schemeClr val="tx1">
+                              <a:lumMod val="50000"/>
+                            </a:schemeClr>
+                          </a:solidFill>
+                        </a:rPr>
+                        <a:t>1.Full body 2.Leg length 3.Leg ad &amp; abduction</a:t>
+                      </a:r>
+                    </a:p>
+                  </a:txBody>
+                  <a:tcPr marL="19050" marR="19050" marT="19050" marB="19050" horzOverflow="overflow">
+                    <a:lnL w="3175">
+                      <a:solidFill>
+                        <a:srgbClr val="000000"/>
+                      </a:solidFill>
+                      <a:miter lim="400000"/>
+                    </a:lnL>
+                    <a:lnR w="3175">
+                      <a:solidFill>
+                        <a:srgbClr val="000000"/>
+                      </a:solidFill>
+                      <a:miter lim="400000"/>
+                    </a:lnR>
+                    <a:lnT w="12700">
+                      <a:miter lim="400000"/>
+                    </a:lnT>
+                    <a:lnB w="12700">
+                      <a:miter lim="400000"/>
+                    </a:lnB>
+                    <a:solidFill>
+                      <a:schemeClr val="bg1"/>
+                    </a:solidFill>
+                  </a:tcPr>
+                </a:tc>
+                <a:tc>
+                  <a:txBody>
+                    <a:bodyPr/>
+                    <a:lstStyle/>
+                    <a:p>
+                      <a:pPr defTabSz="914400">
+                        <a:tabLst>
+                          <a:tab pos="342900" algn="l"/>
+                        </a:tabLst>
+                        <a:defRPr sz="2200">
+                          <a:latin typeface="Avenir Next Regular"/>
+                          <a:ea typeface="Avenir Next Regular"/>
+                          <a:cs typeface="Avenir Next Regular"/>
+                          <a:sym typeface="Avenir Next Regular"/>
+                        </a:defRPr>
+                      </a:pPr>
+                      <a:endParaRPr sz="800" baseline="0" dirty="0">
+                        <a:solidFill>
+                          <a:schemeClr val="tx1">
+                            <a:lumMod val="50000"/>
+                          </a:schemeClr>
+                        </a:solidFill>
+                      </a:endParaRPr>
+                    </a:p>
+                  </a:txBody>
+                  <a:tcPr marL="19050" marR="19050" marT="19050" marB="19050" horzOverflow="overflow">
+                    <a:lnL w="3175">
+                      <a:solidFill>
+                        <a:srgbClr val="000000"/>
+                      </a:solidFill>
+                      <a:miter lim="400000"/>
+                    </a:lnL>
+                    <a:lnR w="3175">
+                      <a:solidFill>
+                        <a:srgbClr val="000000"/>
+                      </a:solidFill>
+                      <a:miter lim="400000"/>
+                    </a:lnR>
+                    <a:lnT w="12700">
+                      <a:miter lim="400000"/>
+                    </a:lnT>
+                    <a:lnB w="12700">
+                      <a:miter lim="400000"/>
+                    </a:lnB>
+                    <a:solidFill>
+                      <a:schemeClr val="bg1"/>
+                    </a:solidFill>
+                  </a:tcPr>
+                </a:tc>
+                <a:extLst>
+                  <a:ext uri="{0D108BD9-81ED-4DB2-BD59-A6C34878D82A}">
+                    <a16:rowId xmlns:a16="http://schemas.microsoft.com/office/drawing/2014/main" val="10020"/>
+                  </a:ext>
+                </a:extLst>
+              </a:tr>
+              <a:tr h="229616">
+                <a:tc vMerge="1">
+                  <a:txBody>
+                    <a:bodyPr/>
+                    <a:lstStyle/>
+                    <a:p>
+                      <a:endParaRPr lang="ko-KR"/>
+                    </a:p>
+                  </a:txBody>
+                  <a:tcPr/>
+                </a:tc>
+                <a:tc gridSpan="2">
+                  <a:txBody>
+                    <a:bodyPr/>
+                    <a:lstStyle/>
+                    <a:p>
+                      <a:pPr algn="l" defTabSz="95250">
+                        <a:tabLst>
+                          <a:tab pos="342900" algn="l"/>
+                        </a:tabLst>
+                      </a:pPr>
+                      <a:r>
+                        <a:rPr sz="800" b="1" i="1" baseline="0" dirty="0">
+                          <a:solidFill>
+                            <a:schemeClr val="tx1">
+                              <a:lumMod val="50000"/>
+                            </a:schemeClr>
+                          </a:solidFill>
+                        </a:rPr>
+                        <a:t>Anterior view.</a:t>
+                      </a:r>
+                    </a:p>
+                  </a:txBody>
+                  <a:tcPr marL="19050" marR="19050" marT="19050" marB="19050" horzOverflow="overflow">
+                    <a:lnL w="3175">
+                      <a:solidFill>
+                        <a:srgbClr val="000000"/>
+                      </a:solidFill>
+                      <a:miter lim="400000"/>
+                    </a:lnL>
+                    <a:lnR w="3175">
+                      <a:solidFill>
+                        <a:srgbClr val="000000"/>
+                      </a:solidFill>
+                      <a:miter lim="400000"/>
+                    </a:lnR>
+                    <a:lnT w="12700">
+                      <a:miter lim="400000"/>
+                    </a:lnT>
+                    <a:lnB w="12700">
+                      <a:miter lim="400000"/>
+                    </a:lnB>
+                    <a:solidFill>
+                      <a:schemeClr val="bg1"/>
+                    </a:solidFill>
+                  </a:tcPr>
+                </a:tc>
+                <a:tc hMerge="1">
+                  <a:txBody>
+                    <a:bodyPr/>
+                    <a:lstStyle/>
+                    <a:p>
+                      <a:endParaRPr lang="ko-KR"/>
+                    </a:p>
+                  </a:txBody>
+                  <a:tcPr/>
+                </a:tc>
+                <a:extLst>
+                  <a:ext uri="{0D108BD9-81ED-4DB2-BD59-A6C34878D82A}">
+                    <a16:rowId xmlns:a16="http://schemas.microsoft.com/office/drawing/2014/main" val="10021"/>
+                  </a:ext>
+                </a:extLst>
+              </a:tr>
+              <a:tr h="218622">
+                <a:tc vMerge="1">
+                  <a:txBody>
+                    <a:bodyPr/>
+                    <a:lstStyle/>
+                    <a:p>
+                      <a:endParaRPr lang="ko-KR"/>
+                    </a:p>
+                  </a:txBody>
+                  <a:tcPr/>
+                </a:tc>
+                <a:tc>
+                  <a:txBody>
+                    <a:bodyPr/>
+                    <a:lstStyle/>
+                    <a:p>
+                      <a:pPr algn="l" defTabSz="95250">
+                        <a:tabLst>
+                          <a:tab pos="342900" algn="l"/>
+                        </a:tabLst>
+                      </a:pPr>
+                      <a:r>
+                        <a:rPr sz="800" baseline="0">
+                          <a:solidFill>
+                            <a:schemeClr val="tx1">
+                              <a:lumMod val="50000"/>
+                            </a:schemeClr>
+                          </a:solidFill>
+                        </a:rPr>
+                        <a:t>1.Full body 2.Planta extension 3..Pelvic flare</a:t>
+                      </a:r>
+                    </a:p>
+                  </a:txBody>
+                  <a:tcPr marL="19050" marR="19050" marT="19050" marB="19050" horzOverflow="overflow">
+                    <a:lnL w="3175">
+                      <a:solidFill>
+                        <a:srgbClr val="000000"/>
+                      </a:solidFill>
+                      <a:miter lim="400000"/>
+                    </a:lnL>
+                    <a:lnR w="3175">
+                      <a:solidFill>
+                        <a:srgbClr val="000000"/>
+                      </a:solidFill>
+                      <a:miter lim="400000"/>
+                    </a:lnR>
+                    <a:lnT w="12700">
+                      <a:miter lim="400000"/>
+                    </a:lnT>
+                    <a:lnB w="3175">
+                      <a:solidFill>
+                        <a:srgbClr val="000000"/>
+                      </a:solidFill>
+                      <a:miter lim="400000"/>
+                    </a:lnB>
+                    <a:solidFill>
+                      <a:schemeClr val="bg1"/>
+                    </a:solidFill>
+                  </a:tcPr>
+                </a:tc>
+                <a:tc>
+                  <a:txBody>
+                    <a:bodyPr/>
+                    <a:lstStyle/>
+                    <a:p>
+                      <a:pPr defTabSz="914400">
+                        <a:tabLst>
+                          <a:tab pos="342900" algn="l"/>
+                        </a:tabLst>
+                        <a:defRPr sz="2200">
+                          <a:latin typeface="Avenir Next Regular"/>
+                          <a:ea typeface="Avenir Next Regular"/>
+                          <a:cs typeface="Avenir Next Regular"/>
+                          <a:sym typeface="Avenir Next Regular"/>
+                        </a:defRPr>
+                      </a:pPr>
+                      <a:endParaRPr sz="800" baseline="0" dirty="0">
+                        <a:solidFill>
+                          <a:schemeClr val="tx1">
+                            <a:lumMod val="50000"/>
+                          </a:schemeClr>
+                        </a:solidFill>
+                      </a:endParaRPr>
+                    </a:p>
+                  </a:txBody>
+                  <a:tcPr marL="19050" marR="19050" marT="19050" marB="19050" horzOverflow="overflow">
+                    <a:lnL w="3175">
+                      <a:solidFill>
+                        <a:srgbClr val="000000"/>
+                      </a:solidFill>
+                      <a:miter lim="400000"/>
+                    </a:lnL>
+                    <a:lnR w="3175">
+                      <a:solidFill>
+                        <a:srgbClr val="000000"/>
+                      </a:solidFill>
+                      <a:miter lim="400000"/>
+                    </a:lnR>
+                    <a:lnT w="12700">
+                      <a:miter lim="400000"/>
+                    </a:lnT>
+                    <a:lnB w="3175">
+                      <a:solidFill>
+                        <a:srgbClr val="000000"/>
+                      </a:solidFill>
+                      <a:miter lim="400000"/>
+                    </a:lnB>
+                    <a:solidFill>
+                      <a:schemeClr val="bg1"/>
+                    </a:solidFill>
+                  </a:tcPr>
+                </a:tc>
+                <a:extLst>
+                  <a:ext uri="{0D108BD9-81ED-4DB2-BD59-A6C34878D82A}">
+                    <a16:rowId xmlns:a16="http://schemas.microsoft.com/office/drawing/2014/main" val="10022"/>
+                  </a:ext>
+                </a:extLst>
+              </a:tr>
+            </a:tbl>
+          </a:graphicData>
+        </a:graphic>
+      </p:graphicFrame>
+    </p:spTree>
+  </p:cSld>
+  <p:clrMapOvr>
+    <a:masterClrMapping/>
+  </p:clrMapOvr>
+  <p:transition spd="med"/>
+</p:sld>
+</file>
+
+<file path=ppt/slides/slide14.xml><?xml version="1.0" encoding="utf-8"?>
+<p:sld xmlns:a="http://schemas.openxmlformats.org/drawingml/2006/main" xmlns:r="http://schemas.openxmlformats.org/officeDocument/2006/relationships" xmlns:p="http://schemas.openxmlformats.org/presentationml/2006/main">
+  <p:cSld>
+    <p:spTree>
+      <p:nvGrpSpPr>
+        <p:cNvPr id="1" name=""/>
+        <p:cNvGrpSpPr/>
+        <p:nvPr/>
+      </p:nvGrpSpPr>
+      <p:grpSpPr>
+        <a:xfrm>
+          <a:off x="0" y="0"/>
+          <a:ext cx="0" cy="0"/>
+          <a:chOff x="0" y="0"/>
+          <a:chExt cx="0" cy="0"/>
+        </a:xfrm>
+      </p:grpSpPr>
       <p:sp>
         <p:nvSpPr>
           <p:cNvPr id="151" name="텍스트"/>
@@ -19667,7 +22228,7 @@
           </a:ln>
           <a:extLst>
             <a:ext uri="{C572A759-6A51-4108-AA02-DFA0A04FC94B}">
-              <ma14:wrappingTextBoxFlag xmlns="" xmlns:m="http://schemas.openxmlformats.org/officeDocument/2006/math" xmlns:a14="http://schemas.microsoft.com/office/drawing/2010/main" xmlns:ma14="http://schemas.microsoft.com/office/mac/drawingml/2011/main" val="1"/>
+              <ma14:wrappingTextBoxFlag xmlns:ma14="http://schemas.microsoft.com/office/mac/drawingml/2011/main" xmlns:a14="http://schemas.microsoft.com/office/drawing/2010/main" xmlns:m="http://schemas.openxmlformats.org/officeDocument/2006/math" xmlns="" val="1"/>
             </a:ext>
           </a:extLst>
         </p:spPr>
@@ -20415,7 +22976,7 @@
 </p:sld>
 </file>
 
-<file path=ppt/slides/slide11.xml><?xml version="1.0" encoding="utf-8"?>
+<file path=ppt/slides/slide15.xml><?xml version="1.0" encoding="utf-8"?>
 <p:sld xmlns:a="http://schemas.openxmlformats.org/drawingml/2006/main" xmlns:r="http://schemas.openxmlformats.org/officeDocument/2006/relationships" xmlns:p="http://schemas.openxmlformats.org/presentationml/2006/main">
   <p:cSld>
     <p:spTree>
@@ -20451,7 +23012,7 @@
           </a:ln>
           <a:extLst>
             <a:ext uri="{C572A759-6A51-4108-AA02-DFA0A04FC94B}">
-              <ma14:wrappingTextBoxFlag xmlns:ma14="http://schemas.microsoft.com/office/mac/drawingml/2011/main" xmlns:a14="http://schemas.microsoft.com/office/drawing/2010/main" xmlns:m="http://schemas.openxmlformats.org/officeDocument/2006/math" xmlns="" val="1"/>
+              <ma14:wrappingTextBoxFlag xmlns="" xmlns:m="http://schemas.openxmlformats.org/officeDocument/2006/math" xmlns:a14="http://schemas.microsoft.com/office/drawing/2010/main" xmlns:ma14="http://schemas.microsoft.com/office/mac/drawingml/2011/main" val="1"/>
             </a:ext>
           </a:extLst>
         </p:spPr>
@@ -20501,7 +23062,7 @@
           </a:ln>
           <a:extLst>
             <a:ext uri="{C572A759-6A51-4108-AA02-DFA0A04FC94B}">
-              <ma14:wrappingTextBoxFlag xmlns:ma14="http://schemas.microsoft.com/office/mac/drawingml/2011/main" xmlns:a14="http://schemas.microsoft.com/office/drawing/2010/main" xmlns:m="http://schemas.openxmlformats.org/officeDocument/2006/math" xmlns="" val="1"/>
+              <ma14:wrappingTextBoxFlag xmlns="" xmlns:m="http://schemas.openxmlformats.org/officeDocument/2006/math" xmlns:a14="http://schemas.microsoft.com/office/drawing/2010/main" xmlns:ma14="http://schemas.microsoft.com/office/mac/drawingml/2011/main" val="1"/>
             </a:ext>
           </a:extLst>
         </p:spPr>
@@ -20571,7 +23132,7 @@
           </a:ln>
           <a:extLst>
             <a:ext uri="{C572A759-6A51-4108-AA02-DFA0A04FC94B}">
-              <ma14:wrappingTextBoxFlag xmlns:ma14="http://schemas.microsoft.com/office/mac/drawingml/2011/main" xmlns:a14="http://schemas.microsoft.com/office/drawing/2010/main" xmlns:m="http://schemas.openxmlformats.org/officeDocument/2006/math" xmlns="" val="1"/>
+              <ma14:wrappingTextBoxFlag xmlns="" xmlns:m="http://schemas.openxmlformats.org/officeDocument/2006/math" xmlns:a14="http://schemas.microsoft.com/office/drawing/2010/main" xmlns:ma14="http://schemas.microsoft.com/office/mac/drawingml/2011/main" val="1"/>
             </a:ext>
           </a:extLst>
         </p:spPr>
@@ -20641,7 +23202,7 @@
           </a:ln>
           <a:extLst>
             <a:ext uri="{C572A759-6A51-4108-AA02-DFA0A04FC94B}">
-              <ma14:wrappingTextBoxFlag xmlns:ma14="http://schemas.microsoft.com/office/mac/drawingml/2011/main" xmlns:a14="http://schemas.microsoft.com/office/drawing/2010/main" xmlns:m="http://schemas.openxmlformats.org/officeDocument/2006/math" xmlns="" val="1"/>
+              <ma14:wrappingTextBoxFlag xmlns="" xmlns:m="http://schemas.openxmlformats.org/officeDocument/2006/math" xmlns:a14="http://schemas.microsoft.com/office/drawing/2010/main" xmlns:ma14="http://schemas.microsoft.com/office/mac/drawingml/2011/main" val="1"/>
             </a:ext>
           </a:extLst>
         </p:spPr>
@@ -20781,7 +23342,7 @@
 </p:sld>
 </file>
 
-<file path=ppt/slides/slide12.xml><?xml version="1.0" encoding="utf-8"?>
+<file path=ppt/slides/slide16.xml><?xml version="1.0" encoding="utf-8"?>
 <p:sld xmlns:a="http://schemas.openxmlformats.org/drawingml/2006/main" xmlns:r="http://schemas.openxmlformats.org/officeDocument/2006/relationships" xmlns:p="http://schemas.openxmlformats.org/presentationml/2006/main">
   <p:cSld>
     <p:spTree>
@@ -21176,7 +23737,7 @@
           </a:ln>
           <a:extLst>
             <a:ext uri="{C572A759-6A51-4108-AA02-DFA0A04FC94B}">
-              <ma14:wrappingTextBoxFlag xmlns:ma14="http://schemas.microsoft.com/office/mac/drawingml/2011/main" xmlns:p14="http://schemas.microsoft.com/office/powerpoint/2010/main" xmlns:a14="http://schemas.microsoft.com/office/drawing/2010/main" xmlns:m="http://schemas.openxmlformats.org/officeDocument/2006/math" xmlns="" val="1"/>
+              <ma14:wrappingTextBoxFlag xmlns="" xmlns:m="http://schemas.openxmlformats.org/officeDocument/2006/math" xmlns:a14="http://schemas.microsoft.com/office/drawing/2010/main" xmlns:p14="http://schemas.microsoft.com/office/powerpoint/2010/main" xmlns:ma14="http://schemas.microsoft.com/office/mac/drawingml/2011/main" val="1"/>
             </a:ext>
           </a:extLst>
         </p:spPr>
@@ -21344,7 +23905,7 @@
           </a:ln>
           <a:extLst>
             <a:ext uri="{C572A759-6A51-4108-AA02-DFA0A04FC94B}">
-              <ma14:wrappingTextBoxFlag xmlns:ma14="http://schemas.microsoft.com/office/mac/drawingml/2011/main" xmlns:p14="http://schemas.microsoft.com/office/powerpoint/2010/main" xmlns:a14="http://schemas.microsoft.com/office/drawing/2010/main" xmlns:m="http://schemas.openxmlformats.org/officeDocument/2006/math" xmlns="" val="1"/>
+              <ma14:wrappingTextBoxFlag xmlns="" xmlns:m="http://schemas.openxmlformats.org/officeDocument/2006/math" xmlns:a14="http://schemas.microsoft.com/office/drawing/2010/main" xmlns:p14="http://schemas.microsoft.com/office/powerpoint/2010/main" xmlns:ma14="http://schemas.microsoft.com/office/mac/drawingml/2011/main" val="1"/>
             </a:ext>
           </a:extLst>
         </p:spPr>
@@ -21855,7 +24416,7 @@
           </a:ln>
           <a:extLst>
             <a:ext uri="{C572A759-6A51-4108-AA02-DFA0A04FC94B}">
-              <ma14:wrappingTextBoxFlag xmlns:ma14="http://schemas.microsoft.com/office/mac/drawingml/2011/main" xmlns:p14="http://schemas.microsoft.com/office/powerpoint/2010/main" xmlns:a14="http://schemas.microsoft.com/office/drawing/2010/main" xmlns:m="http://schemas.openxmlformats.org/officeDocument/2006/math" xmlns="" val="1"/>
+              <ma14:wrappingTextBoxFlag xmlns="" xmlns:m="http://schemas.openxmlformats.org/officeDocument/2006/math" xmlns:a14="http://schemas.microsoft.com/office/drawing/2010/main" xmlns:p14="http://schemas.microsoft.com/office/powerpoint/2010/main" xmlns:ma14="http://schemas.microsoft.com/office/mac/drawingml/2011/main" val="1"/>
             </a:ext>
           </a:extLst>
         </p:spPr>
@@ -22190,14 +24751,14 @@
     <mc:Choice Requires="p14">
       <p:transition spd="med"/>
     </mc:Choice>
-    <mc:Fallback xmlns:a14="http://schemas.microsoft.com/office/drawing/2010/main" xmlns:m="http://schemas.openxmlformats.org/officeDocument/2006/math" xmlns="">
+    <mc:Fallback xmlns="" xmlns:m="http://schemas.openxmlformats.org/officeDocument/2006/math" xmlns:a14="http://schemas.microsoft.com/office/drawing/2010/main">
       <p:transition spd="slow"/>
     </mc:Fallback>
   </mc:AlternateContent>
 </p:sld>
 </file>
 
-<file path=ppt/slides/slide13.xml><?xml version="1.0" encoding="utf-8"?>
+<file path=ppt/slides/slide17.xml><?xml version="1.0" encoding="utf-8"?>
 <p:sld xmlns:a="http://schemas.openxmlformats.org/drawingml/2006/main" xmlns:r="http://schemas.openxmlformats.org/officeDocument/2006/relationships" xmlns:p="http://schemas.openxmlformats.org/presentationml/2006/main">
   <p:cSld>
     <p:spTree>
@@ -22233,7 +24794,7 @@
           </a:ln>
           <a:extLst>
             <a:ext uri="{C572A759-6A51-4108-AA02-DFA0A04FC94B}">
-              <ma14:wrappingTextBoxFlag xmlns:ma14="http://schemas.microsoft.com/office/mac/drawingml/2011/main" xmlns:a14="http://schemas.microsoft.com/office/drawing/2010/main" xmlns:m="http://schemas.openxmlformats.org/officeDocument/2006/math" xmlns="" val="1"/>
+              <ma14:wrappingTextBoxFlag xmlns="" xmlns:m="http://schemas.openxmlformats.org/officeDocument/2006/math" xmlns:a14="http://schemas.microsoft.com/office/drawing/2010/main" xmlns:ma14="http://schemas.microsoft.com/office/mac/drawingml/2011/main" val="1"/>
             </a:ext>
           </a:extLst>
         </p:spPr>
@@ -22359,7 +24920,7 @@
           </a:ln>
           <a:extLst>
             <a:ext uri="{C572A759-6A51-4108-AA02-DFA0A04FC94B}">
-              <ma14:wrappingTextBoxFlag xmlns:ma14="http://schemas.microsoft.com/office/mac/drawingml/2011/main" xmlns:a14="http://schemas.microsoft.com/office/drawing/2010/main" xmlns:m="http://schemas.openxmlformats.org/officeDocument/2006/math" xmlns="" val="1"/>
+              <ma14:wrappingTextBoxFlag xmlns="" xmlns:m="http://schemas.openxmlformats.org/officeDocument/2006/math" xmlns:a14="http://schemas.microsoft.com/office/drawing/2010/main" xmlns:ma14="http://schemas.microsoft.com/office/mac/drawingml/2011/main" val="1"/>
             </a:ext>
           </a:extLst>
         </p:spPr>
@@ -25755,7 +28316,7 @@
           </a:ln>
           <a:extLst>
             <a:ext uri="{C572A759-6A51-4108-AA02-DFA0A04FC94B}">
-              <ma14:wrappingTextBoxFlag xmlns:ma14="http://schemas.microsoft.com/office/mac/drawingml/2011/main" xmlns:a14="http://schemas.microsoft.com/office/drawing/2010/main" xmlns:m="http://schemas.openxmlformats.org/officeDocument/2006/math" xmlns="" val="1"/>
+              <ma14:wrappingTextBoxFlag xmlns="" xmlns:m="http://schemas.openxmlformats.org/officeDocument/2006/math" xmlns:a14="http://schemas.microsoft.com/office/drawing/2010/main" xmlns:ma14="http://schemas.microsoft.com/office/mac/drawingml/2011/main" val="1"/>
             </a:ext>
           </a:extLst>
         </p:spPr>
@@ -25852,7 +28413,7 @@
 </p:sld>
 </file>
 
-<file path=ppt/slides/slide14.xml><?xml version="1.0" encoding="utf-8"?>
+<file path=ppt/slides/slide18.xml><?xml version="1.0" encoding="utf-8"?>
 <p:sld xmlns:a="http://schemas.openxmlformats.org/drawingml/2006/main" xmlns:r="http://schemas.openxmlformats.org/officeDocument/2006/relationships" xmlns:p="http://schemas.openxmlformats.org/presentationml/2006/main">
   <p:cSld>
     <p:spTree>
@@ -25888,7 +28449,7 @@
           </a:ln>
           <a:extLst>
             <a:ext uri="{C572A759-6A51-4108-AA02-DFA0A04FC94B}">
-              <ma14:wrappingTextBoxFlag xmlns:ma14="http://schemas.microsoft.com/office/mac/drawingml/2011/main" xmlns:a14="http://schemas.microsoft.com/office/drawing/2010/main" xmlns:m="http://schemas.openxmlformats.org/officeDocument/2006/math" xmlns="" val="1"/>
+              <ma14:wrappingTextBoxFlag xmlns="" xmlns:m="http://schemas.openxmlformats.org/officeDocument/2006/math" xmlns:a14="http://schemas.microsoft.com/office/drawing/2010/main" xmlns:ma14="http://schemas.microsoft.com/office/mac/drawingml/2011/main" val="1"/>
             </a:ext>
           </a:extLst>
         </p:spPr>
@@ -26014,7 +28575,7 @@
           </a:ln>
           <a:extLst>
             <a:ext uri="{C572A759-6A51-4108-AA02-DFA0A04FC94B}">
-              <ma14:wrappingTextBoxFlag xmlns:ma14="http://schemas.microsoft.com/office/mac/drawingml/2011/main" xmlns:a14="http://schemas.microsoft.com/office/drawing/2010/main" xmlns:m="http://schemas.openxmlformats.org/officeDocument/2006/math" xmlns="" val="1"/>
+              <ma14:wrappingTextBoxFlag xmlns="" xmlns:m="http://schemas.openxmlformats.org/officeDocument/2006/math" xmlns:a14="http://schemas.microsoft.com/office/drawing/2010/main" xmlns:ma14="http://schemas.microsoft.com/office/mac/drawingml/2011/main" val="1"/>
             </a:ext>
           </a:extLst>
         </p:spPr>
@@ -26484,7 +29045,7 @@
           </a:ln>
           <a:extLst>
             <a:ext uri="{C572A759-6A51-4108-AA02-DFA0A04FC94B}">
-              <ma14:wrappingTextBoxFlag xmlns:ma14="http://schemas.microsoft.com/office/mac/drawingml/2011/main" xmlns:a14="http://schemas.microsoft.com/office/drawing/2010/main" xmlns:m="http://schemas.openxmlformats.org/officeDocument/2006/math" xmlns="" val="1"/>
+              <ma14:wrappingTextBoxFlag xmlns="" xmlns:m="http://schemas.openxmlformats.org/officeDocument/2006/math" xmlns:a14="http://schemas.microsoft.com/office/drawing/2010/main" xmlns:ma14="http://schemas.microsoft.com/office/mac/drawingml/2011/main" val="1"/>
             </a:ext>
           </a:extLst>
         </p:spPr>
@@ -26831,7 +29392,7 @@
     </p:spTree>
     <p:extLst>
       <p:ext uri="{BB962C8B-B14F-4D97-AF65-F5344CB8AC3E}">
-        <p14:creationId xmlns:p14="http://schemas.microsoft.com/office/powerpoint/2010/main" val="3238872301"/>
+        <p14:creationId xmlns:p14="http://schemas.microsoft.com/office/powerpoint/2010/main" val="31630151"/>
       </p:ext>
     </p:extLst>
   </p:cSld>
@@ -26858,2453 +29419,16 @@
           <a:chExt cx="0" cy="0"/>
         </a:xfrm>
       </p:grpSpPr>
-      <p:graphicFrame>
-        <p:nvGraphicFramePr>
-          <p:cNvPr id="161" name="표"/>
-          <p:cNvGraphicFramePr/>
-          <p:nvPr/>
-        </p:nvGraphicFramePr>
-        <p:xfrm>
-          <a:off x="55037" y="901375"/>
-          <a:ext cx="9033929" cy="5146256"/>
-        </p:xfrm>
-        <a:graphic>
-          <a:graphicData uri="http://schemas.openxmlformats.org/drawingml/2006/table">
-            <a:tbl>
-              <a:tblPr/>
-              <a:tblGrid>
-                <a:gridCol w="1475442">
-                  <a:extLst>
-                    <a:ext uri="{9D8B030D-6E8A-4147-A177-3AD203B41FA5}">
-                      <a16:colId xmlns:a16="http://schemas.microsoft.com/office/drawing/2014/main" val="20000"/>
-                    </a:ext>
-                  </a:extLst>
-                </a:gridCol>
-                <a:gridCol w="4279718">
-                  <a:extLst>
-                    <a:ext uri="{9D8B030D-6E8A-4147-A177-3AD203B41FA5}">
-                      <a16:colId xmlns:a16="http://schemas.microsoft.com/office/drawing/2014/main" val="20001"/>
-                    </a:ext>
-                  </a:extLst>
-                </a:gridCol>
-                <a:gridCol w="3278769">
-                  <a:extLst>
-                    <a:ext uri="{9D8B030D-6E8A-4147-A177-3AD203B41FA5}">
-                      <a16:colId xmlns:a16="http://schemas.microsoft.com/office/drawing/2014/main" val="20002"/>
-                    </a:ext>
-                  </a:extLst>
-                </a:gridCol>
-              </a:tblGrid>
-              <a:tr h="237581">
-                <a:tc>
-                  <a:txBody>
-                    <a:bodyPr/>
-                    <a:lstStyle/>
-                    <a:p>
-                      <a:pPr defTabSz="914400">
-                        <a:tabLst>
-                          <a:tab pos="342900" algn="l"/>
-                        </a:tabLst>
-                        <a:defRPr>
-                          <a:latin typeface="Avenir Next Regular"/>
-                          <a:ea typeface="Avenir Next Regular"/>
-                          <a:cs typeface="Avenir Next Regular"/>
-                          <a:sym typeface="Avenir Next Regular"/>
-                        </a:defRPr>
-                      </a:pPr>
-                      <a:endParaRPr sz="300"/>
-                    </a:p>
-                  </a:txBody>
-                  <a:tcPr marL="19050" marR="19050" marT="19050" marB="19050" horzOverflow="overflow">
-                    <a:lnL w="3175">
-                      <a:solidFill>
-                        <a:srgbClr val="000000"/>
-                      </a:solidFill>
-                      <a:miter lim="400000"/>
-                    </a:lnL>
-                    <a:lnR w="3175">
-                      <a:solidFill>
-                        <a:srgbClr val="000000"/>
-                      </a:solidFill>
-                      <a:miter lim="400000"/>
-                    </a:lnR>
-                    <a:lnT w="3175">
-                      <a:solidFill>
-                        <a:srgbClr val="000000"/>
-                      </a:solidFill>
-                      <a:miter lim="400000"/>
-                    </a:lnT>
-                    <a:lnB w="12700">
-                      <a:miter lim="400000"/>
-                    </a:lnB>
-                    <a:solidFill>
-                      <a:srgbClr val="BEC0BF"/>
-                    </a:solidFill>
-                  </a:tcPr>
-                </a:tc>
-                <a:tc>
-                  <a:txBody>
-                    <a:bodyPr/>
-                    <a:lstStyle/>
-                    <a:p>
-                      <a:pPr algn="l" defTabSz="95250">
-                        <a:tabLst>
-                          <a:tab pos="342900" algn="l"/>
-                        </a:tabLst>
-                      </a:pPr>
-                      <a:r>
-                        <a:rPr sz="800" b="1"/>
-                        <a:t>Photo</a:t>
-                      </a:r>
-                    </a:p>
-                  </a:txBody>
-                  <a:tcPr marL="19050" marR="19050" marT="19050" marB="19050" horzOverflow="overflow">
-                    <a:lnL w="3175">
-                      <a:solidFill>
-                        <a:srgbClr val="000000"/>
-                      </a:solidFill>
-                      <a:miter lim="400000"/>
-                    </a:lnL>
-                    <a:lnR w="0">
-                      <a:miter lim="400000"/>
-                    </a:lnR>
-                    <a:lnT w="3175">
-                      <a:solidFill>
-                        <a:srgbClr val="000000"/>
-                      </a:solidFill>
-                      <a:miter lim="400000"/>
-                    </a:lnT>
-                    <a:lnB w="3175">
-                      <a:solidFill>
-                        <a:srgbClr val="D5D5D5"/>
-                      </a:solidFill>
-                      <a:miter lim="400000"/>
-                    </a:lnB>
-                    <a:solidFill>
-                      <a:srgbClr val="BEC0BF"/>
-                    </a:solidFill>
-                  </a:tcPr>
-                </a:tc>
-                <a:tc>
-                  <a:txBody>
-                    <a:bodyPr/>
-                    <a:lstStyle/>
-                    <a:p>
-                      <a:pPr algn="l" defTabSz="95250">
-                        <a:tabLst>
-                          <a:tab pos="342900" algn="l"/>
-                        </a:tabLst>
-                      </a:pPr>
-                      <a:r>
-                        <a:rPr sz="800" b="1"/>
-                        <a:t>Thermal infrared camera</a:t>
-                      </a:r>
-                    </a:p>
-                  </a:txBody>
-                  <a:tcPr marL="19050" marR="19050" marT="19050" marB="19050" horzOverflow="overflow">
-                    <a:lnL w="0">
-                      <a:miter lim="400000"/>
-                    </a:lnL>
-                    <a:lnR w="0">
-                      <a:miter lim="400000"/>
-                    </a:lnR>
-                    <a:lnT w="0">
-                      <a:miter lim="400000"/>
-                    </a:lnT>
-                    <a:lnB w="0">
-                      <a:miter lim="400000"/>
-                    </a:lnB>
-                    <a:solidFill>
-                      <a:srgbClr val="BEC0BF"/>
-                    </a:solidFill>
-                  </a:tcPr>
-                </a:tc>
-                <a:extLst>
-                  <a:ext uri="{0D108BD9-81ED-4DB2-BD59-A6C34878D82A}">
-                    <a16:rowId xmlns:a16="http://schemas.microsoft.com/office/drawing/2014/main" val="10000"/>
-                  </a:ext>
-                </a:extLst>
-              </a:tr>
-              <a:tr h="224291">
-                <a:tc rowSpan="8">
-                  <a:txBody>
-                    <a:bodyPr/>
-                    <a:lstStyle/>
-                    <a:p>
-                      <a:pPr algn="l" defTabSz="95250">
-                        <a:tabLst>
-                          <a:tab pos="342900" algn="l"/>
-                        </a:tabLst>
-                        <a:defRPr sz="2300" b="1">
-                          <a:latin typeface="Gill Sans"/>
-                          <a:ea typeface="Gill Sans"/>
-                          <a:cs typeface="Gill Sans"/>
-                          <a:sym typeface="Gill Sans"/>
-                        </a:defRPr>
-                      </a:pPr>
-                      <a:r>
-                        <a:rPr sz="900" baseline="0" dirty="0">
-                          <a:solidFill>
-                            <a:schemeClr val="tx1">
-                              <a:lumMod val="50000"/>
-                            </a:schemeClr>
-                          </a:solidFill>
-                        </a:rPr>
-                        <a:t>   </a:t>
-                      </a:r>
-                      <a:r>
-                        <a:rPr sz="800" baseline="0" dirty="0">
-                          <a:solidFill>
-                            <a:schemeClr val="tx1">
-                              <a:lumMod val="50000"/>
-                            </a:schemeClr>
-                          </a:solidFill>
-                        </a:rPr>
-                        <a:t>Standing</a:t>
-                      </a:r>
-                    </a:p>
-                  </a:txBody>
-                  <a:tcPr marL="19050" marR="19050" marT="19050" marB="19050" horzOverflow="overflow">
-                    <a:lnL w="3175">
-                      <a:solidFill>
-                        <a:srgbClr val="000000"/>
-                      </a:solidFill>
-                      <a:miter lim="400000"/>
-                    </a:lnL>
-                    <a:lnR w="3175">
-                      <a:solidFill>
-                        <a:srgbClr val="D5D5D5"/>
-                      </a:solidFill>
-                      <a:miter lim="400000"/>
-                    </a:lnR>
-                    <a:lnT w="12700">
-                      <a:miter lim="400000"/>
-                    </a:lnT>
-                    <a:lnB w="12700">
-                      <a:miter lim="400000"/>
-                    </a:lnB>
-                    <a:solidFill>
-                      <a:schemeClr val="bg1"/>
-                    </a:solidFill>
-                  </a:tcPr>
-                </a:tc>
-                <a:tc gridSpan="2">
-                  <a:txBody>
-                    <a:bodyPr/>
-                    <a:lstStyle/>
-                    <a:p>
-                      <a:pPr algn="l" defTabSz="95250">
-                        <a:tabLst>
-                          <a:tab pos="342900" algn="l"/>
-                        </a:tabLst>
-                      </a:pPr>
-                      <a:r>
-                        <a:rPr sz="800" b="1" i="1" baseline="0">
-                          <a:solidFill>
-                            <a:schemeClr val="tx1">
-                              <a:lumMod val="50000"/>
-                            </a:schemeClr>
-                          </a:solidFill>
-                        </a:rPr>
-                        <a:t>Mirror view.</a:t>
-                      </a:r>
-                    </a:p>
-                  </a:txBody>
-                  <a:tcPr marL="19050" marR="19050" marT="19050" marB="19050" horzOverflow="overflow">
-                    <a:lnL w="3175">
-                      <a:solidFill>
-                        <a:srgbClr val="D5D5D5"/>
-                      </a:solidFill>
-                      <a:miter lim="400000"/>
-                    </a:lnL>
-                    <a:lnR w="3175">
-                      <a:solidFill>
-                        <a:srgbClr val="000000"/>
-                      </a:solidFill>
-                      <a:miter lim="400000"/>
-                    </a:lnR>
-                    <a:lnT w="3175">
-                      <a:solidFill>
-                        <a:srgbClr val="D5D5D5"/>
-                      </a:solidFill>
-                      <a:miter lim="400000"/>
-                    </a:lnT>
-                    <a:lnB w="3175">
-                      <a:solidFill>
-                        <a:srgbClr val="D5D5D5"/>
-                      </a:solidFill>
-                      <a:miter lim="400000"/>
-                    </a:lnB>
-                    <a:solidFill>
-                      <a:schemeClr val="bg1"/>
-                    </a:solidFill>
-                  </a:tcPr>
-                </a:tc>
-                <a:tc hMerge="1">
-                  <a:txBody>
-                    <a:bodyPr/>
-                    <a:lstStyle/>
-                    <a:p>
-                      <a:endParaRPr lang="ko-KR"/>
-                    </a:p>
-                  </a:txBody>
-                  <a:tcPr/>
-                </a:tc>
-                <a:extLst>
-                  <a:ext uri="{0D108BD9-81ED-4DB2-BD59-A6C34878D82A}">
-                    <a16:rowId xmlns:a16="http://schemas.microsoft.com/office/drawing/2014/main" val="10001"/>
-                  </a:ext>
-                </a:extLst>
-              </a:tr>
-              <a:tr h="278130">
-                <a:tc vMerge="1">
-                  <a:txBody>
-                    <a:bodyPr/>
-                    <a:lstStyle/>
-                    <a:p>
-                      <a:endParaRPr lang="ko-KR"/>
-                    </a:p>
-                  </a:txBody>
-                  <a:tcPr/>
-                </a:tc>
-                <a:tc>
-                  <a:txBody>
-                    <a:bodyPr/>
-                    <a:lstStyle/>
-                    <a:p>
-                      <a:pPr algn="l" defTabSz="95250">
-                        <a:tabLst>
-                          <a:tab pos="342900" algn="l"/>
-                        </a:tabLst>
-                      </a:pPr>
-                      <a:r>
-                        <a:rPr sz="800" baseline="0" dirty="0">
-                          <a:solidFill>
-                            <a:schemeClr val="tx1">
-                              <a:lumMod val="50000"/>
-                            </a:schemeClr>
-                          </a:solidFill>
-                        </a:rPr>
-                        <a:t>1.Natural Leg 2.Natural foot 3.Natural one foot stance 
-4.Positional foot 5.positional one foot stance</a:t>
-                      </a:r>
-                    </a:p>
-                  </a:txBody>
-                  <a:tcPr marL="19050" marR="19050" marT="19050" marB="19050" horzOverflow="overflow">
-                    <a:lnL w="3175">
-                      <a:solidFill>
-                        <a:srgbClr val="000000"/>
-                      </a:solidFill>
-                      <a:miter lim="400000"/>
-                    </a:lnL>
-                    <a:lnR w="3175">
-                      <a:solidFill>
-                        <a:srgbClr val="000000"/>
-                      </a:solidFill>
-                      <a:miter lim="400000"/>
-                    </a:lnR>
-                    <a:lnT w="3175">
-                      <a:solidFill>
-                        <a:srgbClr val="D5D5D5"/>
-                      </a:solidFill>
-                      <a:miter lim="400000"/>
-                    </a:lnT>
-                    <a:lnB w="12700">
-                      <a:miter lim="400000"/>
-                    </a:lnB>
-                    <a:solidFill>
-                      <a:schemeClr val="bg1"/>
-                    </a:solidFill>
-                  </a:tcPr>
-                </a:tc>
-                <a:tc>
-                  <a:txBody>
-                    <a:bodyPr/>
-                    <a:lstStyle/>
-                    <a:p>
-                      <a:pPr defTabSz="914400">
-                        <a:tabLst>
-                          <a:tab pos="342900" algn="l"/>
-                        </a:tabLst>
-                        <a:defRPr sz="2200">
-                          <a:latin typeface="Avenir Next Regular"/>
-                          <a:ea typeface="Avenir Next Regular"/>
-                          <a:cs typeface="Avenir Next Regular"/>
-                          <a:sym typeface="Avenir Next Regular"/>
-                        </a:defRPr>
-                      </a:pPr>
-                      <a:endParaRPr sz="800" baseline="0">
-                        <a:solidFill>
-                          <a:schemeClr val="tx1">
-                            <a:lumMod val="50000"/>
-                          </a:schemeClr>
-                        </a:solidFill>
-                      </a:endParaRPr>
-                    </a:p>
-                  </a:txBody>
-                  <a:tcPr marL="19050" marR="19050" marT="19050" marB="19050" horzOverflow="overflow">
-                    <a:lnL w="3175">
-                      <a:solidFill>
-                        <a:srgbClr val="000000"/>
-                      </a:solidFill>
-                      <a:miter lim="400000"/>
-                    </a:lnL>
-                    <a:lnR w="3175">
-                      <a:solidFill>
-                        <a:srgbClr val="000000"/>
-                      </a:solidFill>
-                      <a:miter lim="400000"/>
-                    </a:lnR>
-                    <a:lnT w="12700">
-                      <a:miter lim="400000"/>
-                    </a:lnT>
-                    <a:lnB w="12700">
-                      <a:miter lim="400000"/>
-                    </a:lnB>
-                    <a:solidFill>
-                      <a:schemeClr val="bg1"/>
-                    </a:solidFill>
-                  </a:tcPr>
-                </a:tc>
-                <a:extLst>
-                  <a:ext uri="{0D108BD9-81ED-4DB2-BD59-A6C34878D82A}">
-                    <a16:rowId xmlns:a16="http://schemas.microsoft.com/office/drawing/2014/main" val="10002"/>
-                  </a:ext>
-                </a:extLst>
-              </a:tr>
-              <a:tr h="233123">
-                <a:tc vMerge="1">
-                  <a:txBody>
-                    <a:bodyPr/>
-                    <a:lstStyle/>
-                    <a:p>
-                      <a:endParaRPr lang="ko-KR"/>
-                    </a:p>
-                  </a:txBody>
-                  <a:tcPr/>
-                </a:tc>
-                <a:tc gridSpan="2">
-                  <a:txBody>
-                    <a:bodyPr/>
-                    <a:lstStyle/>
-                    <a:p>
-                      <a:pPr algn="l" defTabSz="95250">
-                        <a:tabLst>
-                          <a:tab pos="342900" algn="l"/>
-                        </a:tabLst>
-                      </a:pPr>
-                      <a:r>
-                        <a:rPr sz="800" b="1" i="1" baseline="0" dirty="0">
-                          <a:solidFill>
-                            <a:schemeClr val="tx1">
-                              <a:lumMod val="50000"/>
-                            </a:schemeClr>
-                          </a:solidFill>
-                        </a:rPr>
-                        <a:t>Posterior view.</a:t>
-                      </a:r>
-                    </a:p>
-                  </a:txBody>
-                  <a:tcPr marL="19050" marR="19050" marT="19050" marB="19050" horzOverflow="overflow">
-                    <a:lnL w="3175">
-                      <a:solidFill>
-                        <a:srgbClr val="000000"/>
-                      </a:solidFill>
-                      <a:miter lim="400000"/>
-                    </a:lnL>
-                    <a:lnR w="3175">
-                      <a:solidFill>
-                        <a:srgbClr val="000000"/>
-                      </a:solidFill>
-                      <a:miter lim="400000"/>
-                    </a:lnR>
-                    <a:lnT w="12700">
-                      <a:miter lim="400000"/>
-                    </a:lnT>
-                    <a:lnB w="12700">
-                      <a:miter lim="400000"/>
-                    </a:lnB>
-                    <a:solidFill>
-                      <a:schemeClr val="bg1"/>
-                    </a:solidFill>
-                  </a:tcPr>
-                </a:tc>
-                <a:tc hMerge="1">
-                  <a:txBody>
-                    <a:bodyPr/>
-                    <a:lstStyle/>
-                    <a:p>
-                      <a:endParaRPr lang="ko-KR"/>
-                    </a:p>
-                  </a:txBody>
-                  <a:tcPr/>
-                </a:tc>
-                <a:extLst>
-                  <a:ext uri="{0D108BD9-81ED-4DB2-BD59-A6C34878D82A}">
-                    <a16:rowId xmlns:a16="http://schemas.microsoft.com/office/drawing/2014/main" val="10003"/>
-                  </a:ext>
-                </a:extLst>
-              </a:tr>
-              <a:tr h="278130">
-                <a:tc vMerge="1">
-                  <a:txBody>
-                    <a:bodyPr/>
-                    <a:lstStyle/>
-                    <a:p>
-                      <a:endParaRPr lang="ko-KR"/>
-                    </a:p>
-                  </a:txBody>
-                  <a:tcPr/>
-                </a:tc>
-                <a:tc>
-                  <a:txBody>
-                    <a:bodyPr/>
-                    <a:lstStyle/>
-                    <a:p>
-                      <a:pPr algn="l" defTabSz="95250">
-                        <a:tabLst>
-                          <a:tab pos="342900" algn="l"/>
-                        </a:tabLst>
-                      </a:pPr>
-                      <a:r>
-                        <a:rPr sz="800" baseline="0" dirty="0">
-                          <a:solidFill>
-                            <a:schemeClr val="tx1">
-                              <a:lumMod val="50000"/>
-                            </a:schemeClr>
-                          </a:solidFill>
-                        </a:rPr>
-                        <a:t>1.Open &amp; Bite 2.Upper body flexion(Holding ankle &amp; Knee) 
-3.Nuchal rotation 4,Head side bending</a:t>
-                      </a:r>
-                    </a:p>
-                  </a:txBody>
-                  <a:tcPr marL="19050" marR="19050" marT="19050" marB="19050" horzOverflow="overflow">
-                    <a:lnL w="3175">
-                      <a:solidFill>
-                        <a:srgbClr val="000000"/>
-                      </a:solidFill>
-                      <a:miter lim="400000"/>
-                    </a:lnL>
-                    <a:lnR w="3175">
-                      <a:solidFill>
-                        <a:srgbClr val="000000"/>
-                      </a:solidFill>
-                      <a:miter lim="400000"/>
-                    </a:lnR>
-                    <a:lnT w="12700">
-                      <a:miter lim="400000"/>
-                    </a:lnT>
-                    <a:lnB w="12700">
-                      <a:miter lim="400000"/>
-                    </a:lnB>
-                    <a:solidFill>
-                      <a:schemeClr val="bg1"/>
-                    </a:solidFill>
-                  </a:tcPr>
-                </a:tc>
-                <a:tc>
-                  <a:txBody>
-                    <a:bodyPr/>
-                    <a:lstStyle/>
-                    <a:p>
-                      <a:pPr algn="l" defTabSz="95250">
-                        <a:tabLst>
-                          <a:tab pos="342900" algn="l"/>
-                        </a:tabLst>
-                      </a:pPr>
-                      <a:r>
-                        <a:rPr sz="800" baseline="0">
-                          <a:solidFill>
-                            <a:schemeClr val="tx1">
-                              <a:lumMod val="50000"/>
-                            </a:schemeClr>
-                          </a:solidFill>
-                        </a:rPr>
-                        <a:t>1.Open </a:t>
-                      </a:r>
-                    </a:p>
-                  </a:txBody>
-                  <a:tcPr marL="19050" marR="19050" marT="19050" marB="19050" horzOverflow="overflow">
-                    <a:lnL w="3175">
-                      <a:solidFill>
-                        <a:srgbClr val="000000"/>
-                      </a:solidFill>
-                      <a:miter lim="400000"/>
-                    </a:lnL>
-                    <a:lnR w="3175">
-                      <a:solidFill>
-                        <a:srgbClr val="000000"/>
-                      </a:solidFill>
-                      <a:miter lim="400000"/>
-                    </a:lnR>
-                    <a:lnT w="12700">
-                      <a:miter lim="400000"/>
-                    </a:lnT>
-                    <a:lnB w="12700">
-                      <a:miter lim="400000"/>
-                    </a:lnB>
-                    <a:solidFill>
-                      <a:schemeClr val="bg1"/>
-                    </a:solidFill>
-                  </a:tcPr>
-                </a:tc>
-                <a:extLst>
-                  <a:ext uri="{0D108BD9-81ED-4DB2-BD59-A6C34878D82A}">
-                    <a16:rowId xmlns:a16="http://schemas.microsoft.com/office/drawing/2014/main" val="10004"/>
-                  </a:ext>
-                </a:extLst>
-              </a:tr>
-              <a:tr h="232156">
-                <a:tc vMerge="1">
-                  <a:txBody>
-                    <a:bodyPr/>
-                    <a:lstStyle/>
-                    <a:p>
-                      <a:endParaRPr lang="ko-KR"/>
-                    </a:p>
-                  </a:txBody>
-                  <a:tcPr/>
-                </a:tc>
-                <a:tc gridSpan="2">
-                  <a:txBody>
-                    <a:bodyPr/>
-                    <a:lstStyle/>
-                    <a:p>
-                      <a:pPr algn="l" defTabSz="95250">
-                        <a:tabLst>
-                          <a:tab pos="342900" algn="l"/>
-                        </a:tabLst>
-                      </a:pPr>
-                      <a:r>
-                        <a:rPr sz="800" b="1" i="1" baseline="0" dirty="0">
-                          <a:solidFill>
-                            <a:schemeClr val="tx1">
-                              <a:lumMod val="50000"/>
-                            </a:schemeClr>
-                          </a:solidFill>
-                        </a:rPr>
-                        <a:t>Anterior view.</a:t>
-                      </a:r>
-                    </a:p>
-                  </a:txBody>
-                  <a:tcPr marL="19050" marR="19050" marT="19050" marB="19050" horzOverflow="overflow">
-                    <a:lnL w="3175">
-                      <a:solidFill>
-                        <a:srgbClr val="000000"/>
-                      </a:solidFill>
-                      <a:miter lim="400000"/>
-                    </a:lnL>
-                    <a:lnR w="3175">
-                      <a:solidFill>
-                        <a:srgbClr val="000000"/>
-                      </a:solidFill>
-                      <a:miter lim="400000"/>
-                    </a:lnR>
-                    <a:lnT w="12700">
-                      <a:miter lim="400000"/>
-                    </a:lnT>
-                    <a:lnB w="3175">
-                      <a:solidFill>
-                        <a:schemeClr val="accent2">
-                          <a:hueOff val="-85258"/>
-                          <a:satOff val="14347"/>
-                          <a:lumOff val="22373"/>
-                        </a:schemeClr>
-                      </a:solidFill>
-                      <a:miter lim="400000"/>
-                    </a:lnB>
-                    <a:solidFill>
-                      <a:schemeClr val="bg1"/>
-                    </a:solidFill>
-                  </a:tcPr>
-                </a:tc>
-                <a:tc hMerge="1">
-                  <a:txBody>
-                    <a:bodyPr/>
-                    <a:lstStyle/>
-                    <a:p>
-                      <a:endParaRPr lang="ko-KR"/>
-                    </a:p>
-                  </a:txBody>
-                  <a:tcPr/>
-                </a:tc>
-                <a:extLst>
-                  <a:ext uri="{0D108BD9-81ED-4DB2-BD59-A6C34878D82A}">
-                    <a16:rowId xmlns:a16="http://schemas.microsoft.com/office/drawing/2014/main" val="10005"/>
-                  </a:ext>
-                </a:extLst>
-              </a:tr>
-              <a:tr h="181268">
-                <a:tc vMerge="1">
-                  <a:txBody>
-                    <a:bodyPr/>
-                    <a:lstStyle/>
-                    <a:p>
-                      <a:endParaRPr lang="ko-KR"/>
-                    </a:p>
-                  </a:txBody>
-                  <a:tcPr/>
-                </a:tc>
-                <a:tc>
-                  <a:txBody>
-                    <a:bodyPr/>
-                    <a:lstStyle/>
-                    <a:p>
-                      <a:pPr algn="l" defTabSz="95250">
-                        <a:tabLst>
-                          <a:tab pos="342900" algn="l"/>
-                        </a:tabLst>
-                        <a:defRPr sz="2100"/>
-                      </a:pPr>
-                      <a:r>
-                        <a:rPr sz="800" baseline="0" dirty="0">
-                          <a:solidFill>
-                            <a:schemeClr val="tx1">
-                              <a:lumMod val="50000"/>
-                            </a:schemeClr>
-                          </a:solidFill>
-                        </a:rPr>
-                        <a:t>1.Open &amp; Bite  </a:t>
-                      </a:r>
-                      <a:r>
-                        <a:rPr sz="800" baseline="0" dirty="0">
-                          <a:solidFill>
-                            <a:schemeClr val="accent1">
-                              <a:lumMod val="75000"/>
-                            </a:schemeClr>
-                          </a:solidFill>
-                        </a:rPr>
-                        <a:t>2.Crossing eye &amp; biting video</a:t>
-                      </a:r>
-                    </a:p>
-                  </a:txBody>
-                  <a:tcPr marL="19050" marR="19050" marT="19050" marB="19050" horzOverflow="overflow">
-                    <a:lnL w="3175">
-                      <a:solidFill>
-                        <a:schemeClr val="accent2">
-                          <a:hueOff val="-85258"/>
-                          <a:satOff val="14347"/>
-                          <a:lumOff val="22373"/>
-                        </a:schemeClr>
-                      </a:solidFill>
-                      <a:miter lim="400000"/>
-                    </a:lnL>
-                    <a:lnR w="3175">
-                      <a:solidFill>
-                        <a:schemeClr val="accent2">
-                          <a:hueOff val="-85258"/>
-                          <a:satOff val="14347"/>
-                          <a:lumOff val="22373"/>
-                        </a:schemeClr>
-                      </a:solidFill>
-                      <a:miter lim="400000"/>
-                    </a:lnR>
-                    <a:lnT w="3175">
-                      <a:solidFill>
-                        <a:schemeClr val="accent2">
-                          <a:hueOff val="-85258"/>
-                          <a:satOff val="14347"/>
-                          <a:lumOff val="22373"/>
-                        </a:schemeClr>
-                      </a:solidFill>
-                      <a:miter lim="400000"/>
-                    </a:lnT>
-                    <a:lnB w="3175">
-                      <a:solidFill>
-                        <a:schemeClr val="accent2">
-                          <a:hueOff val="-85258"/>
-                          <a:satOff val="14347"/>
-                          <a:lumOff val="22373"/>
-                        </a:schemeClr>
-                      </a:solidFill>
-                      <a:miter lim="400000"/>
-                    </a:lnB>
-                    <a:solidFill>
-                      <a:schemeClr val="bg1"/>
-                    </a:solidFill>
-                  </a:tcPr>
-                </a:tc>
-                <a:tc>
-                  <a:txBody>
-                    <a:bodyPr/>
-                    <a:lstStyle/>
-                    <a:p>
-                      <a:pPr algn="l" defTabSz="95250">
-                        <a:tabLst>
-                          <a:tab pos="342900" algn="l"/>
-                        </a:tabLst>
-                      </a:pPr>
-                      <a:r>
-                        <a:rPr sz="800" baseline="0">
-                          <a:solidFill>
-                            <a:schemeClr val="tx1">
-                              <a:lumMod val="50000"/>
-                            </a:schemeClr>
-                          </a:solidFill>
-                        </a:rPr>
-                        <a:t>1.Open</a:t>
-                      </a:r>
-                    </a:p>
-                  </a:txBody>
-                  <a:tcPr marL="19050" marR="19050" marT="19050" marB="19050" horzOverflow="overflow">
-                    <a:lnL w="3175">
-                      <a:solidFill>
-                        <a:schemeClr val="accent2">
-                          <a:hueOff val="-85258"/>
-                          <a:satOff val="14347"/>
-                          <a:lumOff val="22373"/>
-                        </a:schemeClr>
-                      </a:solidFill>
-                      <a:miter lim="400000"/>
-                    </a:lnL>
-                    <a:lnR w="3175">
-                      <a:solidFill>
-                        <a:srgbClr val="000000"/>
-                      </a:solidFill>
-                      <a:miter lim="400000"/>
-                    </a:lnR>
-                    <a:lnT w="12700">
-                      <a:miter lim="400000"/>
-                    </a:lnT>
-                    <a:lnB w="12700">
-                      <a:miter lim="400000"/>
-                    </a:lnB>
-                    <a:solidFill>
-                      <a:schemeClr val="bg1"/>
-                    </a:solidFill>
-                  </a:tcPr>
-                </a:tc>
-                <a:extLst>
-                  <a:ext uri="{0D108BD9-81ED-4DB2-BD59-A6C34878D82A}">
-                    <a16:rowId xmlns:a16="http://schemas.microsoft.com/office/drawing/2014/main" val="10006"/>
-                  </a:ext>
-                </a:extLst>
-              </a:tr>
-              <a:tr h="223750">
-                <a:tc vMerge="1">
-                  <a:txBody>
-                    <a:bodyPr/>
-                    <a:lstStyle/>
-                    <a:p>
-                      <a:endParaRPr lang="ko-KR"/>
-                    </a:p>
-                  </a:txBody>
-                  <a:tcPr/>
-                </a:tc>
-                <a:tc gridSpan="2">
-                  <a:txBody>
-                    <a:bodyPr/>
-                    <a:lstStyle/>
-                    <a:p>
-                      <a:pPr algn="l" defTabSz="95250">
-                        <a:tabLst>
-                          <a:tab pos="342900" algn="l"/>
-                        </a:tabLst>
-                      </a:pPr>
-                      <a:r>
-                        <a:rPr sz="800" b="1" i="1" baseline="0" dirty="0">
-                          <a:solidFill>
-                            <a:schemeClr val="tx1">
-                              <a:lumMod val="50000"/>
-                            </a:schemeClr>
-                          </a:solidFill>
-                        </a:rPr>
-                        <a:t>Lateral view.</a:t>
-                      </a:r>
-                    </a:p>
-                  </a:txBody>
-                  <a:tcPr marL="19050" marR="19050" marT="19050" marB="19050" horzOverflow="overflow">
-                    <a:lnL w="3175">
-                      <a:solidFill>
-                        <a:srgbClr val="000000"/>
-                      </a:solidFill>
-                      <a:miter lim="400000"/>
-                    </a:lnL>
-                    <a:lnR w="3175">
-                      <a:solidFill>
-                        <a:srgbClr val="000000"/>
-                      </a:solidFill>
-                      <a:miter lim="400000"/>
-                    </a:lnR>
-                    <a:lnT w="3175">
-                      <a:solidFill>
-                        <a:schemeClr val="accent2">
-                          <a:hueOff val="-85258"/>
-                          <a:satOff val="14347"/>
-                          <a:lumOff val="22373"/>
-                        </a:schemeClr>
-                      </a:solidFill>
-                      <a:miter lim="400000"/>
-                    </a:lnT>
-                    <a:lnB w="12700">
-                      <a:miter lim="400000"/>
-                    </a:lnB>
-                    <a:solidFill>
-                      <a:schemeClr val="bg1"/>
-                    </a:solidFill>
-                  </a:tcPr>
-                </a:tc>
-                <a:tc hMerge="1">
-                  <a:txBody>
-                    <a:bodyPr/>
-                    <a:lstStyle/>
-                    <a:p>
-                      <a:endParaRPr lang="ko-KR"/>
-                    </a:p>
-                  </a:txBody>
-                  <a:tcPr/>
-                </a:tc>
-                <a:extLst>
-                  <a:ext uri="{0D108BD9-81ED-4DB2-BD59-A6C34878D82A}">
-                    <a16:rowId xmlns:a16="http://schemas.microsoft.com/office/drawing/2014/main" val="10007"/>
-                  </a:ext>
-                </a:extLst>
-              </a:tr>
-              <a:tr h="249605">
-                <a:tc vMerge="1">
-                  <a:txBody>
-                    <a:bodyPr/>
-                    <a:lstStyle/>
-                    <a:p>
-                      <a:endParaRPr lang="ko-KR"/>
-                    </a:p>
-                  </a:txBody>
-                  <a:tcPr/>
-                </a:tc>
-                <a:tc>
-                  <a:txBody>
-                    <a:bodyPr/>
-                    <a:lstStyle/>
-                    <a:p>
-                      <a:pPr algn="l" defTabSz="95250">
-                        <a:tabLst>
-                          <a:tab pos="342900" algn="l"/>
-                        </a:tabLst>
-                        <a:defRPr sz="2100"/>
-                      </a:pPr>
-                      <a:r>
-                        <a:rPr sz="800" baseline="0" dirty="0">
-                          <a:solidFill>
-                            <a:schemeClr val="tx1">
-                              <a:lumMod val="50000"/>
-                            </a:schemeClr>
-                          </a:solidFill>
-                        </a:rPr>
-                        <a:t>1.Open &amp; Bite 2.Upper body flexion(Holding ankle &amp; Knee</a:t>
-                      </a:r>
-                      <a:r>
-                        <a:rPr sz="800" baseline="0" dirty="0">
-                          <a:solidFill>
-                            <a:schemeClr val="accent1">
-                              <a:lumMod val="75000"/>
-                            </a:schemeClr>
-                          </a:solidFill>
-                        </a:rPr>
-                        <a:t>) 3.Crossing eye &amp; biting video</a:t>
-                      </a:r>
-                    </a:p>
-                  </a:txBody>
-                  <a:tcPr marL="19050" marR="19050" marT="19050" marB="19050" horzOverflow="overflow">
-                    <a:lnL w="3175">
-                      <a:solidFill>
-                        <a:srgbClr val="000000"/>
-                      </a:solidFill>
-                      <a:miter lim="400000"/>
-                    </a:lnL>
-                    <a:lnR w="3175">
-                      <a:solidFill>
-                        <a:srgbClr val="000000"/>
-                      </a:solidFill>
-                      <a:miter lim="400000"/>
-                    </a:lnR>
-                    <a:lnT w="12700">
-                      <a:miter lim="400000"/>
-                    </a:lnT>
-                    <a:lnB w="12700">
-                      <a:miter lim="400000"/>
-                    </a:lnB>
-                    <a:solidFill>
-                      <a:schemeClr val="bg1"/>
-                    </a:solidFill>
-                  </a:tcPr>
-                </a:tc>
-                <a:tc>
-                  <a:txBody>
-                    <a:bodyPr/>
-                    <a:lstStyle/>
-                    <a:p>
-                      <a:pPr algn="l" defTabSz="95250">
-                        <a:tabLst>
-                          <a:tab pos="342900" algn="l"/>
-                        </a:tabLst>
-                      </a:pPr>
-                      <a:r>
-                        <a:rPr sz="800" baseline="0">
-                          <a:solidFill>
-                            <a:schemeClr val="tx1">
-                              <a:lumMod val="50000"/>
-                            </a:schemeClr>
-                          </a:solidFill>
-                        </a:rPr>
-                        <a:t>1.Open</a:t>
-                      </a:r>
-                    </a:p>
-                  </a:txBody>
-                  <a:tcPr marL="19050" marR="19050" marT="19050" marB="19050" horzOverflow="overflow">
-                    <a:lnL w="3175">
-                      <a:solidFill>
-                        <a:srgbClr val="000000"/>
-                      </a:solidFill>
-                      <a:miter lim="400000"/>
-                    </a:lnL>
-                    <a:lnR w="3175">
-                      <a:solidFill>
-                        <a:srgbClr val="000000"/>
-                      </a:solidFill>
-                      <a:miter lim="400000"/>
-                    </a:lnR>
-                    <a:lnT w="12700">
-                      <a:miter lim="400000"/>
-                    </a:lnT>
-                    <a:lnB w="12700">
-                      <a:miter lim="400000"/>
-                    </a:lnB>
-                    <a:solidFill>
-                      <a:schemeClr val="bg1"/>
-                    </a:solidFill>
-                  </a:tcPr>
-                </a:tc>
-                <a:extLst>
-                  <a:ext uri="{0D108BD9-81ED-4DB2-BD59-A6C34878D82A}">
-                    <a16:rowId xmlns:a16="http://schemas.microsoft.com/office/drawing/2014/main" val="10008"/>
-                  </a:ext>
-                </a:extLst>
-              </a:tr>
-              <a:tr h="215279">
-                <a:tc rowSpan="4">
-                  <a:txBody>
-                    <a:bodyPr/>
-                    <a:lstStyle/>
-                    <a:p>
-                      <a:pPr algn="l" defTabSz="95250">
-                        <a:tabLst>
-                          <a:tab pos="342900" algn="l"/>
-                        </a:tabLst>
-                      </a:pPr>
-                      <a:r>
-                        <a:rPr sz="800" b="1" baseline="0">
-                          <a:solidFill>
-                            <a:schemeClr val="tx1">
-                              <a:lumMod val="50000"/>
-                            </a:schemeClr>
-                          </a:solidFill>
-                          <a:latin typeface="Gill Sans"/>
-                          <a:ea typeface="Gill Sans"/>
-                          <a:cs typeface="Gill Sans"/>
-                          <a:sym typeface="Gill Sans"/>
-                        </a:rPr>
-                        <a:t>     Foam mat  
-       view</a:t>
-                      </a:r>
-                    </a:p>
-                  </a:txBody>
-                  <a:tcPr marL="19050" marR="19050" marT="19050" marB="19050" horzOverflow="overflow">
-                    <a:lnL w="3175">
-                      <a:solidFill>
-                        <a:srgbClr val="000000"/>
-                      </a:solidFill>
-                      <a:miter lim="400000"/>
-                    </a:lnL>
-                    <a:lnR w="3175">
-                      <a:solidFill>
-                        <a:srgbClr val="000000"/>
-                      </a:solidFill>
-                      <a:miter lim="400000"/>
-                    </a:lnR>
-                    <a:lnT w="12700">
-                      <a:miter lim="400000"/>
-                    </a:lnT>
-                    <a:lnB w="12700">
-                      <a:miter lim="400000"/>
-                    </a:lnB>
-                    <a:solidFill>
-                      <a:schemeClr val="bg1"/>
-                    </a:solidFill>
-                  </a:tcPr>
-                </a:tc>
-                <a:tc gridSpan="2">
-                  <a:txBody>
-                    <a:bodyPr/>
-                    <a:lstStyle/>
-                    <a:p>
-                      <a:pPr algn="l" defTabSz="95250">
-                        <a:tabLst>
-                          <a:tab pos="342900" algn="l"/>
-                        </a:tabLst>
-                      </a:pPr>
-                      <a:r>
-                        <a:rPr sz="800" b="1" i="1" baseline="0" dirty="0">
-                          <a:solidFill>
-                            <a:schemeClr val="tx1">
-                              <a:lumMod val="50000"/>
-                            </a:schemeClr>
-                          </a:solidFill>
-                        </a:rPr>
-                        <a:t>Posterior view.</a:t>
-                      </a:r>
-                    </a:p>
-                  </a:txBody>
-                  <a:tcPr marL="19050" marR="19050" marT="19050" marB="19050" horzOverflow="overflow">
-                    <a:lnL w="3175">
-                      <a:solidFill>
-                        <a:srgbClr val="000000"/>
-                      </a:solidFill>
-                      <a:miter lim="400000"/>
-                    </a:lnL>
-                    <a:lnR w="3175">
-                      <a:solidFill>
-                        <a:srgbClr val="000000"/>
-                      </a:solidFill>
-                      <a:miter lim="400000"/>
-                    </a:lnR>
-                    <a:lnT w="12700">
-                      <a:miter lim="400000"/>
-                    </a:lnT>
-                    <a:lnB w="12700">
-                      <a:miter lim="400000"/>
-                    </a:lnB>
-                    <a:solidFill>
-                      <a:schemeClr val="bg1"/>
-                    </a:solidFill>
-                  </a:tcPr>
-                </a:tc>
-                <a:tc hMerge="1">
-                  <a:txBody>
-                    <a:bodyPr/>
-                    <a:lstStyle/>
-                    <a:p>
-                      <a:endParaRPr lang="ko-KR"/>
-                    </a:p>
-                  </a:txBody>
-                  <a:tcPr/>
-                </a:tc>
-                <a:extLst>
-                  <a:ext uri="{0D108BD9-81ED-4DB2-BD59-A6C34878D82A}">
-                    <a16:rowId xmlns:a16="http://schemas.microsoft.com/office/drawing/2014/main" val="10009"/>
-                  </a:ext>
-                </a:extLst>
-              </a:tr>
-              <a:tr h="278130">
-                <a:tc vMerge="1">
-                  <a:txBody>
-                    <a:bodyPr/>
-                    <a:lstStyle/>
-                    <a:p>
-                      <a:endParaRPr lang="ko-KR"/>
-                    </a:p>
-                  </a:txBody>
-                  <a:tcPr/>
-                </a:tc>
-                <a:tc>
-                  <a:txBody>
-                    <a:bodyPr/>
-                    <a:lstStyle/>
-                    <a:p>
-                      <a:pPr algn="l" defTabSz="95250">
-                        <a:tabLst>
-                          <a:tab pos="342900" algn="l"/>
-                        </a:tabLst>
-                      </a:pPr>
-                      <a:r>
-                        <a:rPr sz="800" baseline="0" dirty="0">
-                          <a:solidFill>
-                            <a:schemeClr val="tx1">
-                              <a:lumMod val="50000"/>
-                            </a:schemeClr>
-                          </a:solidFill>
-                        </a:rPr>
-                        <a:t>1.Open &amp; Bite 2.Upper body flexion(Holding ankle &amp; Knee)</a:t>
-                      </a:r>
-                    </a:p>
-                  </a:txBody>
-                  <a:tcPr marL="19050" marR="19050" marT="19050" marB="19050" horzOverflow="overflow">
-                    <a:lnL w="3175">
-                      <a:solidFill>
-                        <a:srgbClr val="000000"/>
-                      </a:solidFill>
-                      <a:miter lim="400000"/>
-                    </a:lnL>
-                    <a:lnR w="3175">
-                      <a:solidFill>
-                        <a:srgbClr val="000000"/>
-                      </a:solidFill>
-                      <a:miter lim="400000"/>
-                    </a:lnR>
-                    <a:lnT w="12700">
-                      <a:miter lim="400000"/>
-                    </a:lnT>
-                    <a:lnB w="12700">
-                      <a:miter lim="400000"/>
-                    </a:lnB>
-                    <a:solidFill>
-                      <a:schemeClr val="bg1"/>
-                    </a:solidFill>
-                  </a:tcPr>
-                </a:tc>
-                <a:tc>
-                  <a:txBody>
-                    <a:bodyPr/>
-                    <a:lstStyle/>
-                    <a:p>
-                      <a:pPr algn="l" defTabSz="95250">
-                        <a:tabLst>
-                          <a:tab pos="342900" algn="l"/>
-                        </a:tabLst>
-                      </a:pPr>
-                      <a:r>
-                        <a:rPr sz="800" baseline="0">
-                          <a:solidFill>
-                            <a:schemeClr val="tx1">
-                              <a:lumMod val="50000"/>
-                            </a:schemeClr>
-                          </a:solidFill>
-                        </a:rPr>
-                        <a:t>1.Open 
-2.Body side  bend bending</a:t>
-                      </a:r>
-                    </a:p>
-                  </a:txBody>
-                  <a:tcPr marL="19050" marR="19050" marT="19050" marB="19050" horzOverflow="overflow">
-                    <a:lnL w="3175">
-                      <a:solidFill>
-                        <a:srgbClr val="000000"/>
-                      </a:solidFill>
-                      <a:miter lim="400000"/>
-                    </a:lnL>
-                    <a:lnR w="3175">
-                      <a:solidFill>
-                        <a:srgbClr val="000000"/>
-                      </a:solidFill>
-                      <a:miter lim="400000"/>
-                    </a:lnR>
-                    <a:lnT w="12700">
-                      <a:miter lim="400000"/>
-                    </a:lnT>
-                    <a:lnB w="12700">
-                      <a:miter lim="400000"/>
-                    </a:lnB>
-                    <a:solidFill>
-                      <a:schemeClr val="bg1"/>
-                    </a:solidFill>
-                  </a:tcPr>
-                </a:tc>
-                <a:extLst>
-                  <a:ext uri="{0D108BD9-81ED-4DB2-BD59-A6C34878D82A}">
-                    <a16:rowId xmlns:a16="http://schemas.microsoft.com/office/drawing/2014/main" val="10010"/>
-                  </a:ext>
-                </a:extLst>
-              </a:tr>
-              <a:tr h="194039">
-                <a:tc vMerge="1">
-                  <a:txBody>
-                    <a:bodyPr/>
-                    <a:lstStyle/>
-                    <a:p>
-                      <a:endParaRPr lang="ko-KR"/>
-                    </a:p>
-                  </a:txBody>
-                  <a:tcPr/>
-                </a:tc>
-                <a:tc gridSpan="2">
-                  <a:txBody>
-                    <a:bodyPr/>
-                    <a:lstStyle/>
-                    <a:p>
-                      <a:pPr algn="l" defTabSz="95250">
-                        <a:tabLst>
-                          <a:tab pos="342900" algn="l"/>
-                        </a:tabLst>
-                      </a:pPr>
-                      <a:r>
-                        <a:rPr sz="800" b="1" i="1" baseline="0" dirty="0">
-                          <a:solidFill>
-                            <a:schemeClr val="tx1">
-                              <a:lumMod val="50000"/>
-                            </a:schemeClr>
-                          </a:solidFill>
-                        </a:rPr>
-                        <a:t>Anterior view.</a:t>
-                      </a:r>
-                    </a:p>
-                  </a:txBody>
-                  <a:tcPr marL="19050" marR="19050" marT="19050" marB="19050" horzOverflow="overflow">
-                    <a:lnL w="3175">
-                      <a:solidFill>
-                        <a:srgbClr val="000000"/>
-                      </a:solidFill>
-                      <a:miter lim="400000"/>
-                    </a:lnL>
-                    <a:lnR w="3175">
-                      <a:solidFill>
-                        <a:srgbClr val="000000"/>
-                      </a:solidFill>
-                      <a:miter lim="400000"/>
-                    </a:lnR>
-                    <a:lnT w="12700">
-                      <a:miter lim="400000"/>
-                    </a:lnT>
-                    <a:lnB w="12700">
-                      <a:miter lim="400000"/>
-                    </a:lnB>
-                    <a:solidFill>
-                      <a:schemeClr val="bg1"/>
-                    </a:solidFill>
-                  </a:tcPr>
-                </a:tc>
-                <a:tc hMerge="1">
-                  <a:txBody>
-                    <a:bodyPr/>
-                    <a:lstStyle/>
-                    <a:p>
-                      <a:endParaRPr lang="ko-KR"/>
-                    </a:p>
-                  </a:txBody>
-                  <a:tcPr/>
-                </a:tc>
-                <a:extLst>
-                  <a:ext uri="{0D108BD9-81ED-4DB2-BD59-A6C34878D82A}">
-                    <a16:rowId xmlns:a16="http://schemas.microsoft.com/office/drawing/2014/main" val="10011"/>
-                  </a:ext>
-                </a:extLst>
-              </a:tr>
-              <a:tr h="214545">
-                <a:tc vMerge="1">
-                  <a:txBody>
-                    <a:bodyPr/>
-                    <a:lstStyle/>
-                    <a:p>
-                      <a:endParaRPr lang="ko-KR"/>
-                    </a:p>
-                  </a:txBody>
-                  <a:tcPr/>
-                </a:tc>
-                <a:tc>
-                  <a:txBody>
-                    <a:bodyPr/>
-                    <a:lstStyle/>
-                    <a:p>
-                      <a:pPr algn="l" defTabSz="95250">
-                        <a:tabLst>
-                          <a:tab pos="342900" algn="l"/>
-                        </a:tabLst>
-                      </a:pPr>
-                      <a:r>
-                        <a:rPr sz="800" baseline="0" dirty="0">
-                          <a:solidFill>
-                            <a:schemeClr val="tx1">
-                              <a:lumMod val="50000"/>
-                            </a:schemeClr>
-                          </a:solidFill>
-                        </a:rPr>
-                        <a:t>1.Open &amp; Bite</a:t>
-                      </a:r>
-                    </a:p>
-                  </a:txBody>
-                  <a:tcPr marL="19050" marR="19050" marT="19050" marB="19050" horzOverflow="overflow">
-                    <a:lnL w="3175">
-                      <a:solidFill>
-                        <a:srgbClr val="000000"/>
-                      </a:solidFill>
-                      <a:miter lim="400000"/>
-                    </a:lnL>
-                    <a:lnR w="3175">
-                      <a:solidFill>
-                        <a:srgbClr val="000000"/>
-                      </a:solidFill>
-                      <a:miter lim="400000"/>
-                    </a:lnR>
-                    <a:lnT w="12700">
-                      <a:miter lim="400000"/>
-                    </a:lnT>
-                    <a:lnB w="12700">
-                      <a:miter lim="400000"/>
-                    </a:lnB>
-                    <a:solidFill>
-                      <a:schemeClr val="bg1"/>
-                    </a:solidFill>
-                  </a:tcPr>
-                </a:tc>
-                <a:tc>
-                  <a:txBody>
-                    <a:bodyPr/>
-                    <a:lstStyle/>
-                    <a:p>
-                      <a:pPr algn="l" defTabSz="95250">
-                        <a:tabLst>
-                          <a:tab pos="342900" algn="l"/>
-                        </a:tabLst>
-                      </a:pPr>
-                      <a:r>
-                        <a:rPr sz="800" baseline="0">
-                          <a:solidFill>
-                            <a:schemeClr val="tx1">
-                              <a:lumMod val="50000"/>
-                            </a:schemeClr>
-                          </a:solidFill>
-                        </a:rPr>
-                        <a:t>1.Open</a:t>
-                      </a:r>
-                    </a:p>
-                  </a:txBody>
-                  <a:tcPr marL="19050" marR="19050" marT="19050" marB="19050" horzOverflow="overflow">
-                    <a:lnL w="3175">
-                      <a:solidFill>
-                        <a:srgbClr val="000000"/>
-                      </a:solidFill>
-                      <a:miter lim="400000"/>
-                    </a:lnL>
-                    <a:lnR w="3175">
-                      <a:solidFill>
-                        <a:srgbClr val="000000"/>
-                      </a:solidFill>
-                      <a:miter lim="400000"/>
-                    </a:lnR>
-                    <a:lnT w="12700">
-                      <a:miter lim="400000"/>
-                    </a:lnT>
-                    <a:lnB w="12700">
-                      <a:miter lim="400000"/>
-                    </a:lnB>
-                    <a:solidFill>
-                      <a:schemeClr val="bg1"/>
-                    </a:solidFill>
-                  </a:tcPr>
-                </a:tc>
-                <a:extLst>
-                  <a:ext uri="{0D108BD9-81ED-4DB2-BD59-A6C34878D82A}">
-                    <a16:rowId xmlns:a16="http://schemas.microsoft.com/office/drawing/2014/main" val="10012"/>
-                  </a:ext>
-                </a:extLst>
-              </a:tr>
-              <a:tr h="196596">
-                <a:tc rowSpan="6">
-                  <a:txBody>
-                    <a:bodyPr/>
-                    <a:lstStyle/>
-                    <a:p>
-                      <a:pPr algn="l" defTabSz="95250">
-                        <a:tabLst>
-                          <a:tab pos="342900" algn="l"/>
-                        </a:tabLst>
-                      </a:pPr>
-                      <a:r>
-                        <a:rPr sz="800" b="1" baseline="0">
-                          <a:solidFill>
-                            <a:schemeClr val="tx1">
-                              <a:lumMod val="50000"/>
-                            </a:schemeClr>
-                          </a:solidFill>
-                          <a:latin typeface="Gill Sans"/>
-                          <a:ea typeface="Gill Sans"/>
-                          <a:cs typeface="Gill Sans"/>
-                          <a:sym typeface="Gill Sans"/>
-                        </a:rPr>
-                        <a:t>    Seating</a:t>
-                      </a:r>
-                    </a:p>
-                  </a:txBody>
-                  <a:tcPr marL="19050" marR="19050" marT="19050" marB="19050" horzOverflow="overflow">
-                    <a:lnL w="3175">
-                      <a:solidFill>
-                        <a:srgbClr val="000000"/>
-                      </a:solidFill>
-                      <a:miter lim="400000"/>
-                    </a:lnL>
-                    <a:lnR w="3175">
-                      <a:solidFill>
-                        <a:srgbClr val="000000"/>
-                      </a:solidFill>
-                      <a:miter lim="400000"/>
-                    </a:lnR>
-                    <a:lnT w="12700">
-                      <a:miter lim="400000"/>
-                    </a:lnT>
-                    <a:lnB w="12700">
-                      <a:miter lim="400000"/>
-                    </a:lnB>
-                    <a:solidFill>
-                      <a:schemeClr val="bg1"/>
-                    </a:solidFill>
-                  </a:tcPr>
-                </a:tc>
-                <a:tc gridSpan="2">
-                  <a:txBody>
-                    <a:bodyPr/>
-                    <a:lstStyle/>
-                    <a:p>
-                      <a:pPr algn="l" defTabSz="95250">
-                        <a:tabLst>
-                          <a:tab pos="342900" algn="l"/>
-                        </a:tabLst>
-                      </a:pPr>
-                      <a:r>
-                        <a:rPr sz="800" b="1" i="1" baseline="0" dirty="0">
-                          <a:solidFill>
-                            <a:schemeClr val="tx1">
-                              <a:lumMod val="50000"/>
-                            </a:schemeClr>
-                          </a:solidFill>
-                        </a:rPr>
-                        <a:t>Posterior view.</a:t>
-                      </a:r>
-                    </a:p>
-                  </a:txBody>
-                  <a:tcPr marL="19050" marR="19050" marT="19050" marB="19050" horzOverflow="overflow">
-                    <a:lnL w="3175">
-                      <a:solidFill>
-                        <a:srgbClr val="000000"/>
-                      </a:solidFill>
-                      <a:miter lim="400000"/>
-                    </a:lnL>
-                    <a:lnR w="3175">
-                      <a:solidFill>
-                        <a:srgbClr val="000000"/>
-                      </a:solidFill>
-                      <a:miter lim="400000"/>
-                    </a:lnR>
-                    <a:lnT w="12700">
-                      <a:miter lim="400000"/>
-                    </a:lnT>
-                    <a:lnB w="12700">
-                      <a:miter lim="400000"/>
-                    </a:lnB>
-                    <a:solidFill>
-                      <a:schemeClr val="bg1"/>
-                    </a:solidFill>
-                  </a:tcPr>
-                </a:tc>
-                <a:tc hMerge="1">
-                  <a:txBody>
-                    <a:bodyPr/>
-                    <a:lstStyle/>
-                    <a:p>
-                      <a:endParaRPr lang="ko-KR"/>
-                    </a:p>
-                  </a:txBody>
-                  <a:tcPr/>
-                </a:tc>
-                <a:extLst>
-                  <a:ext uri="{0D108BD9-81ED-4DB2-BD59-A6C34878D82A}">
-                    <a16:rowId xmlns:a16="http://schemas.microsoft.com/office/drawing/2014/main" val="10013"/>
-                  </a:ext>
-                </a:extLst>
-              </a:tr>
-              <a:tr h="198128">
-                <a:tc vMerge="1">
-                  <a:txBody>
-                    <a:bodyPr/>
-                    <a:lstStyle/>
-                    <a:p>
-                      <a:endParaRPr lang="ko-KR"/>
-                    </a:p>
-                  </a:txBody>
-                  <a:tcPr/>
-                </a:tc>
-                <a:tc>
-                  <a:txBody>
-                    <a:bodyPr/>
-                    <a:lstStyle/>
-                    <a:p>
-                      <a:pPr algn="l" defTabSz="95250">
-                        <a:tabLst>
-                          <a:tab pos="342900" algn="l"/>
-                        </a:tabLst>
-                      </a:pPr>
-                      <a:r>
-                        <a:rPr sz="800" baseline="0">
-                          <a:solidFill>
-                            <a:schemeClr val="tx1">
-                              <a:lumMod val="50000"/>
-                            </a:schemeClr>
-                          </a:solidFill>
-                        </a:rPr>
-                        <a:t>1.Open &amp; Bite 2.Upper body flexion(Holding ankle)</a:t>
-                      </a:r>
-                    </a:p>
-                  </a:txBody>
-                  <a:tcPr marL="19050" marR="19050" marT="19050" marB="19050" horzOverflow="overflow">
-                    <a:lnL w="3175">
-                      <a:solidFill>
-                        <a:srgbClr val="000000"/>
-                      </a:solidFill>
-                      <a:miter lim="400000"/>
-                    </a:lnL>
-                    <a:lnR w="3175">
-                      <a:solidFill>
-                        <a:srgbClr val="000000"/>
-                      </a:solidFill>
-                      <a:miter lim="400000"/>
-                    </a:lnR>
-                    <a:lnT w="12700">
-                      <a:miter lim="400000"/>
-                    </a:lnT>
-                    <a:lnB w="12700">
-                      <a:miter lim="400000"/>
-                    </a:lnB>
-                    <a:solidFill>
-                      <a:schemeClr val="bg1"/>
-                    </a:solidFill>
-                  </a:tcPr>
-                </a:tc>
-                <a:tc>
-                  <a:txBody>
-                    <a:bodyPr/>
-                    <a:lstStyle/>
-                    <a:p>
-                      <a:pPr algn="l" defTabSz="95250">
-                        <a:tabLst>
-                          <a:tab pos="342900" algn="l"/>
-                        </a:tabLst>
-                      </a:pPr>
-                      <a:r>
-                        <a:rPr sz="800" baseline="0" dirty="0">
-                          <a:solidFill>
-                            <a:schemeClr val="tx1">
-                              <a:lumMod val="50000"/>
-                            </a:schemeClr>
-                          </a:solidFill>
-                        </a:rPr>
-                        <a:t>1.Open</a:t>
-                      </a:r>
-                    </a:p>
-                  </a:txBody>
-                  <a:tcPr marL="19050" marR="19050" marT="19050" marB="19050" horzOverflow="overflow">
-                    <a:lnL w="3175">
-                      <a:solidFill>
-                        <a:srgbClr val="000000"/>
-                      </a:solidFill>
-                      <a:miter lim="400000"/>
-                    </a:lnL>
-                    <a:lnR w="3175">
-                      <a:solidFill>
-                        <a:srgbClr val="000000"/>
-                      </a:solidFill>
-                      <a:miter lim="400000"/>
-                    </a:lnR>
-                    <a:lnT w="12700">
-                      <a:miter lim="400000"/>
-                    </a:lnT>
-                    <a:lnB w="12700">
-                      <a:miter lim="400000"/>
-                    </a:lnB>
-                    <a:solidFill>
-                      <a:schemeClr val="bg1"/>
-                    </a:solidFill>
-                  </a:tcPr>
-                </a:tc>
-                <a:extLst>
-                  <a:ext uri="{0D108BD9-81ED-4DB2-BD59-A6C34878D82A}">
-                    <a16:rowId xmlns:a16="http://schemas.microsoft.com/office/drawing/2014/main" val="10014"/>
-                  </a:ext>
-                </a:extLst>
-              </a:tr>
-              <a:tr h="209810">
-                <a:tc vMerge="1">
-                  <a:txBody>
-                    <a:bodyPr/>
-                    <a:lstStyle/>
-                    <a:p>
-                      <a:endParaRPr lang="ko-KR"/>
-                    </a:p>
-                  </a:txBody>
-                  <a:tcPr/>
-                </a:tc>
-                <a:tc gridSpan="2">
-                  <a:txBody>
-                    <a:bodyPr/>
-                    <a:lstStyle/>
-                    <a:p>
-                      <a:pPr algn="l" defTabSz="95250">
-                        <a:tabLst>
-                          <a:tab pos="342900" algn="l"/>
-                        </a:tabLst>
-                      </a:pPr>
-                      <a:r>
-                        <a:rPr sz="800" b="1" i="1" baseline="0" dirty="0">
-                          <a:solidFill>
-                            <a:schemeClr val="tx1">
-                              <a:lumMod val="50000"/>
-                            </a:schemeClr>
-                          </a:solidFill>
-                        </a:rPr>
-                        <a:t>Anterior view.</a:t>
-                      </a:r>
-                    </a:p>
-                  </a:txBody>
-                  <a:tcPr marL="19050" marR="19050" marT="19050" marB="19050" horzOverflow="overflow">
-                    <a:lnL w="3175">
-                      <a:solidFill>
-                        <a:srgbClr val="000000"/>
-                      </a:solidFill>
-                      <a:miter lim="400000"/>
-                    </a:lnL>
-                    <a:lnR w="3175">
-                      <a:solidFill>
-                        <a:srgbClr val="000000"/>
-                      </a:solidFill>
-                      <a:miter lim="400000"/>
-                    </a:lnR>
-                    <a:lnT w="12700">
-                      <a:miter lim="400000"/>
-                    </a:lnT>
-                    <a:lnB w="12700">
-                      <a:miter lim="400000"/>
-                    </a:lnB>
-                    <a:solidFill>
-                      <a:schemeClr val="bg1"/>
-                    </a:solidFill>
-                  </a:tcPr>
-                </a:tc>
-                <a:tc hMerge="1">
-                  <a:txBody>
-                    <a:bodyPr/>
-                    <a:lstStyle/>
-                    <a:p>
-                      <a:endParaRPr lang="ko-KR"/>
-                    </a:p>
-                  </a:txBody>
-                  <a:tcPr/>
-                </a:tc>
-                <a:extLst>
-                  <a:ext uri="{0D108BD9-81ED-4DB2-BD59-A6C34878D82A}">
-                    <a16:rowId xmlns:a16="http://schemas.microsoft.com/office/drawing/2014/main" val="10015"/>
-                  </a:ext>
-                </a:extLst>
-              </a:tr>
-              <a:tr h="194727">
-                <a:tc vMerge="1">
-                  <a:txBody>
-                    <a:bodyPr/>
-                    <a:lstStyle/>
-                    <a:p>
-                      <a:endParaRPr lang="ko-KR"/>
-                    </a:p>
-                  </a:txBody>
-                  <a:tcPr/>
-                </a:tc>
-                <a:tc>
-                  <a:txBody>
-                    <a:bodyPr/>
-                    <a:lstStyle/>
-                    <a:p>
-                      <a:pPr algn="l" defTabSz="95250">
-                        <a:tabLst>
-                          <a:tab pos="342900" algn="l"/>
-                        </a:tabLst>
-                      </a:pPr>
-                      <a:r>
-                        <a:rPr sz="800" baseline="0">
-                          <a:solidFill>
-                            <a:schemeClr val="tx1">
-                              <a:lumMod val="50000"/>
-                            </a:schemeClr>
-                          </a:solidFill>
-                        </a:rPr>
-                        <a:t>1.Open &amp; Bite</a:t>
-                      </a:r>
-                    </a:p>
-                  </a:txBody>
-                  <a:tcPr marL="19050" marR="19050" marT="19050" marB="19050" horzOverflow="overflow">
-                    <a:lnL w="3175">
-                      <a:solidFill>
-                        <a:srgbClr val="000000"/>
-                      </a:solidFill>
-                      <a:miter lim="400000"/>
-                    </a:lnL>
-                    <a:lnR w="3175">
-                      <a:solidFill>
-                        <a:srgbClr val="000000"/>
-                      </a:solidFill>
-                      <a:miter lim="400000"/>
-                    </a:lnR>
-                    <a:lnT w="12700">
-                      <a:miter lim="400000"/>
-                    </a:lnT>
-                    <a:lnB w="12700">
-                      <a:miter lim="400000"/>
-                    </a:lnB>
-                    <a:solidFill>
-                      <a:schemeClr val="bg1"/>
-                    </a:solidFill>
-                  </a:tcPr>
-                </a:tc>
-                <a:tc>
-                  <a:txBody>
-                    <a:bodyPr/>
-                    <a:lstStyle/>
-                    <a:p>
-                      <a:pPr algn="l" defTabSz="95250">
-                        <a:tabLst>
-                          <a:tab pos="342900" algn="l"/>
-                        </a:tabLst>
-                      </a:pPr>
-                      <a:r>
-                        <a:rPr sz="800" baseline="0" dirty="0">
-                          <a:solidFill>
-                            <a:schemeClr val="tx1">
-                              <a:lumMod val="50000"/>
-                            </a:schemeClr>
-                          </a:solidFill>
-                        </a:rPr>
-                        <a:t>1.Open</a:t>
-                      </a:r>
-                    </a:p>
-                  </a:txBody>
-                  <a:tcPr marL="19050" marR="19050" marT="19050" marB="19050" horzOverflow="overflow">
-                    <a:lnL w="3175">
-                      <a:solidFill>
-                        <a:srgbClr val="000000"/>
-                      </a:solidFill>
-                      <a:miter lim="400000"/>
-                    </a:lnL>
-                    <a:lnR w="3175">
-                      <a:solidFill>
-                        <a:srgbClr val="000000"/>
-                      </a:solidFill>
-                      <a:miter lim="400000"/>
-                    </a:lnR>
-                    <a:lnT w="12700">
-                      <a:miter lim="400000"/>
-                    </a:lnT>
-                    <a:lnB w="12700">
-                      <a:miter lim="400000"/>
-                    </a:lnB>
-                    <a:solidFill>
-                      <a:schemeClr val="bg1"/>
-                    </a:solidFill>
-                  </a:tcPr>
-                </a:tc>
-                <a:extLst>
-                  <a:ext uri="{0D108BD9-81ED-4DB2-BD59-A6C34878D82A}">
-                    <a16:rowId xmlns:a16="http://schemas.microsoft.com/office/drawing/2014/main" val="10016"/>
-                  </a:ext>
-                </a:extLst>
-              </a:tr>
-              <a:tr h="212808">
-                <a:tc vMerge="1">
-                  <a:txBody>
-                    <a:bodyPr/>
-                    <a:lstStyle/>
-                    <a:p>
-                      <a:endParaRPr lang="ko-KR"/>
-                    </a:p>
-                  </a:txBody>
-                  <a:tcPr/>
-                </a:tc>
-                <a:tc gridSpan="2">
-                  <a:txBody>
-                    <a:bodyPr/>
-                    <a:lstStyle/>
-                    <a:p>
-                      <a:pPr algn="l" defTabSz="95250">
-                        <a:tabLst>
-                          <a:tab pos="342900" algn="l"/>
-                        </a:tabLst>
-                      </a:pPr>
-                      <a:r>
-                        <a:rPr sz="800" b="1" i="1" baseline="0" dirty="0">
-                          <a:solidFill>
-                            <a:schemeClr val="tx1">
-                              <a:lumMod val="50000"/>
-                            </a:schemeClr>
-                          </a:solidFill>
-                        </a:rPr>
-                        <a:t>Vertical view.</a:t>
-                      </a:r>
-                    </a:p>
-                  </a:txBody>
-                  <a:tcPr marL="19050" marR="19050" marT="19050" marB="19050" horzOverflow="overflow">
-                    <a:lnL w="3175">
-                      <a:solidFill>
-                        <a:srgbClr val="000000"/>
-                      </a:solidFill>
-                      <a:miter lim="400000"/>
-                    </a:lnL>
-                    <a:lnR w="3175">
-                      <a:solidFill>
-                        <a:srgbClr val="000000"/>
-                      </a:solidFill>
-                      <a:miter lim="400000"/>
-                    </a:lnR>
-                    <a:lnT w="12700">
-                      <a:miter lim="400000"/>
-                    </a:lnT>
-                    <a:lnB w="12700">
-                      <a:miter lim="400000"/>
-                    </a:lnB>
-                    <a:solidFill>
-                      <a:schemeClr val="bg1"/>
-                    </a:solidFill>
-                  </a:tcPr>
-                </a:tc>
-                <a:tc hMerge="1">
-                  <a:txBody>
-                    <a:bodyPr/>
-                    <a:lstStyle/>
-                    <a:p>
-                      <a:endParaRPr lang="ko-KR"/>
-                    </a:p>
-                  </a:txBody>
-                  <a:tcPr/>
-                </a:tc>
-                <a:extLst>
-                  <a:ext uri="{0D108BD9-81ED-4DB2-BD59-A6C34878D82A}">
-                    <a16:rowId xmlns:a16="http://schemas.microsoft.com/office/drawing/2014/main" val="10017"/>
-                  </a:ext>
-                </a:extLst>
-              </a:tr>
-              <a:tr h="180364">
-                <a:tc vMerge="1">
-                  <a:txBody>
-                    <a:bodyPr/>
-                    <a:lstStyle/>
-                    <a:p>
-                      <a:endParaRPr lang="ko-KR"/>
-                    </a:p>
-                  </a:txBody>
-                  <a:tcPr/>
-                </a:tc>
-                <a:tc>
-                  <a:txBody>
-                    <a:bodyPr/>
-                    <a:lstStyle/>
-                    <a:p>
-                      <a:pPr algn="l" defTabSz="95250">
-                        <a:tabLst>
-                          <a:tab pos="342900" algn="l"/>
-                        </a:tabLst>
-                      </a:pPr>
-                      <a:r>
-                        <a:rPr sz="800" baseline="0">
-                          <a:solidFill>
-                            <a:schemeClr val="tx1">
-                              <a:lumMod val="50000"/>
-                            </a:schemeClr>
-                          </a:solidFill>
-                        </a:rPr>
-                        <a:t>1.Scapular girdle rotation</a:t>
-                      </a:r>
-                    </a:p>
-                  </a:txBody>
-                  <a:tcPr marL="19050" marR="19050" marT="19050" marB="19050" horzOverflow="overflow">
-                    <a:lnL w="3175">
-                      <a:solidFill>
-                        <a:srgbClr val="000000"/>
-                      </a:solidFill>
-                      <a:miter lim="400000"/>
-                    </a:lnL>
-                    <a:lnR w="3175">
-                      <a:solidFill>
-                        <a:srgbClr val="000000"/>
-                      </a:solidFill>
-                      <a:miter lim="400000"/>
-                    </a:lnR>
-                    <a:lnT w="12700">
-                      <a:miter lim="400000"/>
-                    </a:lnT>
-                    <a:lnB w="12700">
-                      <a:miter lim="400000"/>
-                    </a:lnB>
-                    <a:solidFill>
-                      <a:schemeClr val="bg1"/>
-                    </a:solidFill>
-                  </a:tcPr>
-                </a:tc>
-                <a:tc>
-                  <a:txBody>
-                    <a:bodyPr/>
-                    <a:lstStyle/>
-                    <a:p>
-                      <a:pPr defTabSz="914400">
-                        <a:tabLst>
-                          <a:tab pos="342900" algn="l"/>
-                        </a:tabLst>
-                        <a:defRPr sz="2200">
-                          <a:latin typeface="Avenir Next Regular"/>
-                          <a:ea typeface="Avenir Next Regular"/>
-                          <a:cs typeface="Avenir Next Regular"/>
-                          <a:sym typeface="Avenir Next Regular"/>
-                        </a:defRPr>
-                      </a:pPr>
-                      <a:endParaRPr sz="800" baseline="0">
-                        <a:solidFill>
-                          <a:schemeClr val="tx1">
-                            <a:lumMod val="50000"/>
-                          </a:schemeClr>
-                        </a:solidFill>
-                      </a:endParaRPr>
-                    </a:p>
-                  </a:txBody>
-                  <a:tcPr marL="19050" marR="19050" marT="19050" marB="19050" horzOverflow="overflow">
-                    <a:lnL w="3175">
-                      <a:solidFill>
-                        <a:srgbClr val="000000"/>
-                      </a:solidFill>
-                      <a:miter lim="400000"/>
-                    </a:lnL>
-                    <a:lnR w="3175">
-                      <a:solidFill>
-                        <a:srgbClr val="000000"/>
-                      </a:solidFill>
-                      <a:miter lim="400000"/>
-                    </a:lnR>
-                    <a:lnT w="12700">
-                      <a:miter lim="400000"/>
-                    </a:lnT>
-                    <a:lnB w="12700">
-                      <a:miter lim="400000"/>
-                    </a:lnB>
-                    <a:solidFill>
-                      <a:schemeClr val="bg1"/>
-                    </a:solidFill>
-                  </a:tcPr>
-                </a:tc>
-                <a:extLst>
-                  <a:ext uri="{0D108BD9-81ED-4DB2-BD59-A6C34878D82A}">
-                    <a16:rowId xmlns:a16="http://schemas.microsoft.com/office/drawing/2014/main" val="10018"/>
-                  </a:ext>
-                </a:extLst>
-              </a:tr>
-              <a:tr h="237261">
-                <a:tc rowSpan="4">
-                  <a:txBody>
-                    <a:bodyPr/>
-                    <a:lstStyle/>
-                    <a:p>
-                      <a:pPr algn="l" defTabSz="95250">
-                        <a:tabLst>
-                          <a:tab pos="342900" algn="l"/>
-                        </a:tabLst>
-                      </a:pPr>
-                      <a:r>
-                        <a:rPr sz="800" b="1" baseline="0">
-                          <a:solidFill>
-                            <a:schemeClr val="tx1">
-                              <a:lumMod val="50000"/>
-                            </a:schemeClr>
-                          </a:solidFill>
-                          <a:latin typeface="Gill Sans"/>
-                          <a:ea typeface="Gill Sans"/>
-                          <a:cs typeface="Gill Sans"/>
-                          <a:sym typeface="Gill Sans"/>
-                        </a:rPr>
-                        <a:t>    On bed</a:t>
-                      </a:r>
-                    </a:p>
-                  </a:txBody>
-                  <a:tcPr marL="19050" marR="19050" marT="19050" marB="19050" horzOverflow="overflow">
-                    <a:lnL w="3175">
-                      <a:solidFill>
-                        <a:srgbClr val="000000"/>
-                      </a:solidFill>
-                      <a:miter lim="400000"/>
-                    </a:lnL>
-                    <a:lnR w="3175">
-                      <a:solidFill>
-                        <a:srgbClr val="000000"/>
-                      </a:solidFill>
-                      <a:miter lim="400000"/>
-                    </a:lnR>
-                    <a:lnT w="12700">
-                      <a:miter lim="400000"/>
-                    </a:lnT>
-                    <a:lnB w="3175">
-                      <a:solidFill>
-                        <a:srgbClr val="000000"/>
-                      </a:solidFill>
-                      <a:miter lim="400000"/>
-                    </a:lnB>
-                    <a:solidFill>
-                      <a:schemeClr val="bg1"/>
-                    </a:solidFill>
-                  </a:tcPr>
-                </a:tc>
-                <a:tc gridSpan="2">
-                  <a:txBody>
-                    <a:bodyPr/>
-                    <a:lstStyle/>
-                    <a:p>
-                      <a:pPr algn="l" defTabSz="95250">
-                        <a:tabLst>
-                          <a:tab pos="342900" algn="l"/>
-                        </a:tabLst>
-                      </a:pPr>
-                      <a:r>
-                        <a:rPr sz="800" b="1" i="1" baseline="0" dirty="0">
-                          <a:solidFill>
-                            <a:schemeClr val="tx1">
-                              <a:lumMod val="50000"/>
-                            </a:schemeClr>
-                          </a:solidFill>
-                        </a:rPr>
-                        <a:t>Posterior view.</a:t>
-                      </a:r>
-                    </a:p>
-                  </a:txBody>
-                  <a:tcPr marL="19050" marR="19050" marT="19050" marB="19050" horzOverflow="overflow">
-                    <a:lnL w="3175">
-                      <a:solidFill>
-                        <a:srgbClr val="000000"/>
-                      </a:solidFill>
-                      <a:miter lim="400000"/>
-                    </a:lnL>
-                    <a:lnR w="3175">
-                      <a:solidFill>
-                        <a:srgbClr val="000000"/>
-                      </a:solidFill>
-                      <a:miter lim="400000"/>
-                    </a:lnR>
-                    <a:lnT w="12700">
-                      <a:miter lim="400000"/>
-                    </a:lnT>
-                    <a:lnB w="12700">
-                      <a:miter lim="400000"/>
-                    </a:lnB>
-                    <a:solidFill>
-                      <a:schemeClr val="bg1"/>
-                    </a:solidFill>
-                  </a:tcPr>
-                </a:tc>
-                <a:tc hMerge="1">
-                  <a:txBody>
-                    <a:bodyPr/>
-                    <a:lstStyle/>
-                    <a:p>
-                      <a:endParaRPr lang="ko-KR"/>
-                    </a:p>
-                  </a:txBody>
-                  <a:tcPr/>
-                </a:tc>
-                <a:extLst>
-                  <a:ext uri="{0D108BD9-81ED-4DB2-BD59-A6C34878D82A}">
-                    <a16:rowId xmlns:a16="http://schemas.microsoft.com/office/drawing/2014/main" val="10019"/>
-                  </a:ext>
-                </a:extLst>
-              </a:tr>
-              <a:tr h="216867">
-                <a:tc vMerge="1">
-                  <a:txBody>
-                    <a:bodyPr/>
-                    <a:lstStyle/>
-                    <a:p>
-                      <a:endParaRPr lang="ko-KR"/>
-                    </a:p>
-                  </a:txBody>
-                  <a:tcPr/>
-                </a:tc>
-                <a:tc>
-                  <a:txBody>
-                    <a:bodyPr/>
-                    <a:lstStyle/>
-                    <a:p>
-                      <a:pPr algn="l" defTabSz="95250">
-                        <a:tabLst>
-                          <a:tab pos="342900" algn="l"/>
-                        </a:tabLst>
-                      </a:pPr>
-                      <a:r>
-                        <a:rPr sz="800" baseline="0">
-                          <a:solidFill>
-                            <a:schemeClr val="tx1">
-                              <a:lumMod val="50000"/>
-                            </a:schemeClr>
-                          </a:solidFill>
-                        </a:rPr>
-                        <a:t>1.Full body 2.Leg length 3.Leg ad &amp; abduction</a:t>
-                      </a:r>
-                    </a:p>
-                  </a:txBody>
-                  <a:tcPr marL="19050" marR="19050" marT="19050" marB="19050" horzOverflow="overflow">
-                    <a:lnL w="3175">
-                      <a:solidFill>
-                        <a:srgbClr val="000000"/>
-                      </a:solidFill>
-                      <a:miter lim="400000"/>
-                    </a:lnL>
-                    <a:lnR w="3175">
-                      <a:solidFill>
-                        <a:srgbClr val="000000"/>
-                      </a:solidFill>
-                      <a:miter lim="400000"/>
-                    </a:lnR>
-                    <a:lnT w="12700">
-                      <a:miter lim="400000"/>
-                    </a:lnT>
-                    <a:lnB w="12700">
-                      <a:miter lim="400000"/>
-                    </a:lnB>
-                    <a:solidFill>
-                      <a:schemeClr val="bg1"/>
-                    </a:solidFill>
-                  </a:tcPr>
-                </a:tc>
-                <a:tc>
-                  <a:txBody>
-                    <a:bodyPr/>
-                    <a:lstStyle/>
-                    <a:p>
-                      <a:pPr defTabSz="914400">
-                        <a:tabLst>
-                          <a:tab pos="342900" algn="l"/>
-                        </a:tabLst>
-                        <a:defRPr sz="2200">
-                          <a:latin typeface="Avenir Next Regular"/>
-                          <a:ea typeface="Avenir Next Regular"/>
-                          <a:cs typeface="Avenir Next Regular"/>
-                          <a:sym typeface="Avenir Next Regular"/>
-                        </a:defRPr>
-                      </a:pPr>
-                      <a:endParaRPr sz="800" baseline="0" dirty="0">
-                        <a:solidFill>
-                          <a:schemeClr val="tx1">
-                            <a:lumMod val="50000"/>
-                          </a:schemeClr>
-                        </a:solidFill>
-                      </a:endParaRPr>
-                    </a:p>
-                  </a:txBody>
-                  <a:tcPr marL="19050" marR="19050" marT="19050" marB="19050" horzOverflow="overflow">
-                    <a:lnL w="3175">
-                      <a:solidFill>
-                        <a:srgbClr val="000000"/>
-                      </a:solidFill>
-                      <a:miter lim="400000"/>
-                    </a:lnL>
-                    <a:lnR w="3175">
-                      <a:solidFill>
-                        <a:srgbClr val="000000"/>
-                      </a:solidFill>
-                      <a:miter lim="400000"/>
-                    </a:lnR>
-                    <a:lnT w="12700">
-                      <a:miter lim="400000"/>
-                    </a:lnT>
-                    <a:lnB w="12700">
-                      <a:miter lim="400000"/>
-                    </a:lnB>
-                    <a:solidFill>
-                      <a:schemeClr val="bg1"/>
-                    </a:solidFill>
-                  </a:tcPr>
-                </a:tc>
-                <a:extLst>
-                  <a:ext uri="{0D108BD9-81ED-4DB2-BD59-A6C34878D82A}">
-                    <a16:rowId xmlns:a16="http://schemas.microsoft.com/office/drawing/2014/main" val="10020"/>
-                  </a:ext>
-                </a:extLst>
-              </a:tr>
-              <a:tr h="229616">
-                <a:tc vMerge="1">
-                  <a:txBody>
-                    <a:bodyPr/>
-                    <a:lstStyle/>
-                    <a:p>
-                      <a:endParaRPr lang="ko-KR"/>
-                    </a:p>
-                  </a:txBody>
-                  <a:tcPr/>
-                </a:tc>
-                <a:tc gridSpan="2">
-                  <a:txBody>
-                    <a:bodyPr/>
-                    <a:lstStyle/>
-                    <a:p>
-                      <a:pPr algn="l" defTabSz="95250">
-                        <a:tabLst>
-                          <a:tab pos="342900" algn="l"/>
-                        </a:tabLst>
-                      </a:pPr>
-                      <a:r>
-                        <a:rPr sz="800" b="1" i="1" baseline="0" dirty="0">
-                          <a:solidFill>
-                            <a:schemeClr val="tx1">
-                              <a:lumMod val="50000"/>
-                            </a:schemeClr>
-                          </a:solidFill>
-                        </a:rPr>
-                        <a:t>Anterior view.</a:t>
-                      </a:r>
-                    </a:p>
-                  </a:txBody>
-                  <a:tcPr marL="19050" marR="19050" marT="19050" marB="19050" horzOverflow="overflow">
-                    <a:lnL w="3175">
-                      <a:solidFill>
-                        <a:srgbClr val="000000"/>
-                      </a:solidFill>
-                      <a:miter lim="400000"/>
-                    </a:lnL>
-                    <a:lnR w="3175">
-                      <a:solidFill>
-                        <a:srgbClr val="000000"/>
-                      </a:solidFill>
-                      <a:miter lim="400000"/>
-                    </a:lnR>
-                    <a:lnT w="12700">
-                      <a:miter lim="400000"/>
-                    </a:lnT>
-                    <a:lnB w="12700">
-                      <a:miter lim="400000"/>
-                    </a:lnB>
-                    <a:solidFill>
-                      <a:schemeClr val="bg1"/>
-                    </a:solidFill>
-                  </a:tcPr>
-                </a:tc>
-                <a:tc hMerge="1">
-                  <a:txBody>
-                    <a:bodyPr/>
-                    <a:lstStyle/>
-                    <a:p>
-                      <a:endParaRPr lang="ko-KR"/>
-                    </a:p>
-                  </a:txBody>
-                  <a:tcPr/>
-                </a:tc>
-                <a:extLst>
-                  <a:ext uri="{0D108BD9-81ED-4DB2-BD59-A6C34878D82A}">
-                    <a16:rowId xmlns:a16="http://schemas.microsoft.com/office/drawing/2014/main" val="10021"/>
-                  </a:ext>
-                </a:extLst>
-              </a:tr>
-              <a:tr h="218622">
-                <a:tc vMerge="1">
-                  <a:txBody>
-                    <a:bodyPr/>
-                    <a:lstStyle/>
-                    <a:p>
-                      <a:endParaRPr lang="ko-KR"/>
-                    </a:p>
-                  </a:txBody>
-                  <a:tcPr/>
-                </a:tc>
-                <a:tc>
-                  <a:txBody>
-                    <a:bodyPr/>
-                    <a:lstStyle/>
-                    <a:p>
-                      <a:pPr algn="l" defTabSz="95250">
-                        <a:tabLst>
-                          <a:tab pos="342900" algn="l"/>
-                        </a:tabLst>
-                      </a:pPr>
-                      <a:r>
-                        <a:rPr sz="800" baseline="0">
-                          <a:solidFill>
-                            <a:schemeClr val="tx1">
-                              <a:lumMod val="50000"/>
-                            </a:schemeClr>
-                          </a:solidFill>
-                        </a:rPr>
-                        <a:t>1.Full body 2.Planta extension 3..Pelvic flare</a:t>
-                      </a:r>
-                    </a:p>
-                  </a:txBody>
-                  <a:tcPr marL="19050" marR="19050" marT="19050" marB="19050" horzOverflow="overflow">
-                    <a:lnL w="3175">
-                      <a:solidFill>
-                        <a:srgbClr val="000000"/>
-                      </a:solidFill>
-                      <a:miter lim="400000"/>
-                    </a:lnL>
-                    <a:lnR w="3175">
-                      <a:solidFill>
-                        <a:srgbClr val="000000"/>
-                      </a:solidFill>
-                      <a:miter lim="400000"/>
-                    </a:lnR>
-                    <a:lnT w="12700">
-                      <a:miter lim="400000"/>
-                    </a:lnT>
-                    <a:lnB w="3175">
-                      <a:solidFill>
-                        <a:srgbClr val="000000"/>
-                      </a:solidFill>
-                      <a:miter lim="400000"/>
-                    </a:lnB>
-                    <a:solidFill>
-                      <a:schemeClr val="bg1"/>
-                    </a:solidFill>
-                  </a:tcPr>
-                </a:tc>
-                <a:tc>
-                  <a:txBody>
-                    <a:bodyPr/>
-                    <a:lstStyle/>
-                    <a:p>
-                      <a:pPr defTabSz="914400">
-                        <a:tabLst>
-                          <a:tab pos="342900" algn="l"/>
-                        </a:tabLst>
-                        <a:defRPr sz="2200">
-                          <a:latin typeface="Avenir Next Regular"/>
-                          <a:ea typeface="Avenir Next Regular"/>
-                          <a:cs typeface="Avenir Next Regular"/>
-                          <a:sym typeface="Avenir Next Regular"/>
-                        </a:defRPr>
-                      </a:pPr>
-                      <a:endParaRPr sz="800" baseline="0" dirty="0">
-                        <a:solidFill>
-                          <a:schemeClr val="tx1">
-                            <a:lumMod val="50000"/>
-                          </a:schemeClr>
-                        </a:solidFill>
-                      </a:endParaRPr>
-                    </a:p>
-                  </a:txBody>
-                  <a:tcPr marL="19050" marR="19050" marT="19050" marB="19050" horzOverflow="overflow">
-                    <a:lnL w="3175">
-                      <a:solidFill>
-                        <a:srgbClr val="000000"/>
-                      </a:solidFill>
-                      <a:miter lim="400000"/>
-                    </a:lnL>
-                    <a:lnR w="3175">
-                      <a:solidFill>
-                        <a:srgbClr val="000000"/>
-                      </a:solidFill>
-                      <a:miter lim="400000"/>
-                    </a:lnR>
-                    <a:lnT w="12700">
-                      <a:miter lim="400000"/>
-                    </a:lnT>
-                    <a:lnB w="3175">
-                      <a:solidFill>
-                        <a:srgbClr val="000000"/>
-                      </a:solidFill>
-                      <a:miter lim="400000"/>
-                    </a:lnB>
-                    <a:solidFill>
-                      <a:schemeClr val="bg1"/>
-                    </a:solidFill>
-                  </a:tcPr>
-                </a:tc>
-                <a:extLst>
-                  <a:ext uri="{0D108BD9-81ED-4DB2-BD59-A6C34878D82A}">
-                    <a16:rowId xmlns:a16="http://schemas.microsoft.com/office/drawing/2014/main" val="10022"/>
-                  </a:ext>
-                </a:extLst>
-              </a:tr>
-            </a:tbl>
-          </a:graphicData>
-        </a:graphic>
-      </p:graphicFrame>
     </p:spTree>
+    <p:extLst>
+      <p:ext uri="{BB962C8B-B14F-4D97-AF65-F5344CB8AC3E}">
+        <p14:creationId xmlns:p14="http://schemas.microsoft.com/office/powerpoint/2010/main" val="479323280"/>
+      </p:ext>
+    </p:extLst>
   </p:cSld>
   <p:clrMapOvr>
     <a:masterClrMapping/>
   </p:clrMapOvr>
-  <p:transition spd="med"/>
 </p:sld>
 </file>
 

--- a/koco_frame.pptx
+++ b/koco_frame.pptx
@@ -499,7 +499,7 @@
           <a:p>
             <a:fld id="{B00729D7-BDA7-41E1-AD79-DC61E6DD2EC2}" type="datetimeFigureOut">
               <a:rPr lang="ko-KR" altLang="en-US" smtClean="0"/>
-              <a:t>2025-02-17</a:t>
+              <a:t>2025-03-19</a:t>
             </a:fld>
             <a:endParaRPr lang="ko-KR" altLang="en-US"/>
           </a:p>
@@ -669,7 +669,7 @@
           <a:p>
             <a:fld id="{B00729D7-BDA7-41E1-AD79-DC61E6DD2EC2}" type="datetimeFigureOut">
               <a:rPr lang="ko-KR" altLang="en-US" smtClean="0"/>
-              <a:t>2025-02-17</a:t>
+              <a:t>2025-03-19</a:t>
             </a:fld>
             <a:endParaRPr lang="ko-KR" altLang="en-US"/>
           </a:p>
@@ -849,7 +849,7 @@
           <a:p>
             <a:fld id="{B00729D7-BDA7-41E1-AD79-DC61E6DD2EC2}" type="datetimeFigureOut">
               <a:rPr lang="ko-KR" altLang="en-US" smtClean="0"/>
-              <a:t>2025-02-17</a:t>
+              <a:t>2025-03-19</a:t>
             </a:fld>
             <a:endParaRPr lang="ko-KR" altLang="en-US"/>
           </a:p>
@@ -1525,7 +1525,7 @@
           <a:p>
             <a:fld id="{B00729D7-BDA7-41E1-AD79-DC61E6DD2EC2}" type="datetimeFigureOut">
               <a:rPr lang="ko-KR" altLang="en-US" smtClean="0"/>
-              <a:t>2025-02-17</a:t>
+              <a:t>2025-03-19</a:t>
             </a:fld>
             <a:endParaRPr lang="ko-KR" altLang="en-US"/>
           </a:p>
@@ -1769,7 +1769,7 @@
           <a:p>
             <a:fld id="{B00729D7-BDA7-41E1-AD79-DC61E6DD2EC2}" type="datetimeFigureOut">
               <a:rPr lang="ko-KR" altLang="en-US" smtClean="0"/>
-              <a:t>2025-02-17</a:t>
+              <a:t>2025-03-19</a:t>
             </a:fld>
             <a:endParaRPr lang="ko-KR" altLang="en-US"/>
           </a:p>
@@ -2001,7 +2001,7 @@
           <a:p>
             <a:fld id="{B00729D7-BDA7-41E1-AD79-DC61E6DD2EC2}" type="datetimeFigureOut">
               <a:rPr lang="ko-KR" altLang="en-US" smtClean="0"/>
-              <a:t>2025-02-17</a:t>
+              <a:t>2025-03-19</a:t>
             </a:fld>
             <a:endParaRPr lang="ko-KR" altLang="en-US"/>
           </a:p>
@@ -2368,7 +2368,7 @@
           <a:p>
             <a:fld id="{B00729D7-BDA7-41E1-AD79-DC61E6DD2EC2}" type="datetimeFigureOut">
               <a:rPr lang="ko-KR" altLang="en-US" smtClean="0"/>
-              <a:t>2025-02-17</a:t>
+              <a:t>2025-03-19</a:t>
             </a:fld>
             <a:endParaRPr lang="ko-KR" altLang="en-US"/>
           </a:p>
@@ -2486,7 +2486,7 @@
           <a:p>
             <a:fld id="{B00729D7-BDA7-41E1-AD79-DC61E6DD2EC2}" type="datetimeFigureOut">
               <a:rPr lang="ko-KR" altLang="en-US" smtClean="0"/>
-              <a:t>2025-02-17</a:t>
+              <a:t>2025-03-19</a:t>
             </a:fld>
             <a:endParaRPr lang="ko-KR" altLang="en-US"/>
           </a:p>
@@ -2581,7 +2581,7 @@
           <a:p>
             <a:fld id="{B00729D7-BDA7-41E1-AD79-DC61E6DD2EC2}" type="datetimeFigureOut">
               <a:rPr lang="ko-KR" altLang="en-US" smtClean="0"/>
-              <a:t>2025-02-17</a:t>
+              <a:t>2025-03-19</a:t>
             </a:fld>
             <a:endParaRPr lang="ko-KR" altLang="en-US"/>
           </a:p>
@@ -2858,7 +2858,7 @@
           <a:p>
             <a:fld id="{B00729D7-BDA7-41E1-AD79-DC61E6DD2EC2}" type="datetimeFigureOut">
               <a:rPr lang="ko-KR" altLang="en-US" smtClean="0"/>
-              <a:t>2025-02-17</a:t>
+              <a:t>2025-03-19</a:t>
             </a:fld>
             <a:endParaRPr lang="ko-KR" altLang="en-US"/>
           </a:p>
@@ -3071,7 +3071,7 @@
           <a:p>
             <a:fld id="{B00729D7-BDA7-41E1-AD79-DC61E6DD2EC2}" type="datetimeFigureOut">
               <a:rPr lang="ko-KR" altLang="en-US" smtClean="0"/>
-              <a:t>2025-02-17</a:t>
+              <a:t>2025-03-19</a:t>
             </a:fld>
             <a:endParaRPr lang="ko-KR" altLang="en-US"/>
           </a:p>
@@ -7039,7 +7039,29 @@
                 <a:ea typeface="+mj-ea"/>
                 <a:cs typeface="Arial" panose="020B0604020202020204" pitchFamily="34" charset="0"/>
               </a:rPr>
-              <a:t>  (F)</a:t>
+              <a:t>  (F) </a:t>
+            </a:r>
+            <a:r>
+              <a:rPr lang="ko-KR" altLang="en-US" sz="1600" b="1" dirty="0">
+                <a:solidFill>
+                  <a:schemeClr val="tx2"/>
+                </a:solidFill>
+                <a:latin typeface="+mj-ea"/>
+                <a:ea typeface="+mj-ea"/>
+                <a:cs typeface="Arial" panose="020B0604020202020204" pitchFamily="34" charset="0"/>
+              </a:rPr>
+              <a:t>순응교합연구회 </a:t>
+            </a:r>
+            <a:r>
+              <a:rPr lang="en-US" altLang="ko-KR" sz="1600" b="1" dirty="0">
+                <a:solidFill>
+                  <a:schemeClr val="tx2"/>
+                </a:solidFill>
+                <a:latin typeface="+mj-ea"/>
+                <a:ea typeface="+mj-ea"/>
+                <a:cs typeface="Arial" panose="020B0604020202020204" pitchFamily="34" charset="0"/>
+              </a:rPr>
+              <a:t>8y since 2017</a:t>
             </a:r>
           </a:p>
           <a:p>
@@ -22228,7 +22250,7 @@
           </a:ln>
           <a:extLst>
             <a:ext uri="{C572A759-6A51-4108-AA02-DFA0A04FC94B}">
-              <ma14:wrappingTextBoxFlag xmlns:ma14="http://schemas.microsoft.com/office/mac/drawingml/2011/main" xmlns:a14="http://schemas.microsoft.com/office/drawing/2010/main" xmlns:m="http://schemas.openxmlformats.org/officeDocument/2006/math" xmlns="" val="1"/>
+              <ma14:wrappingTextBoxFlag xmlns="" xmlns:m="http://schemas.openxmlformats.org/officeDocument/2006/math" xmlns:a14="http://schemas.microsoft.com/office/drawing/2010/main" xmlns:ma14="http://schemas.microsoft.com/office/mac/drawingml/2011/main" val="1"/>
             </a:ext>
           </a:extLst>
         </p:spPr>
@@ -23012,7 +23034,7 @@
           </a:ln>
           <a:extLst>
             <a:ext uri="{C572A759-6A51-4108-AA02-DFA0A04FC94B}">
-              <ma14:wrappingTextBoxFlag xmlns="" xmlns:m="http://schemas.openxmlformats.org/officeDocument/2006/math" xmlns:a14="http://schemas.microsoft.com/office/drawing/2010/main" xmlns:ma14="http://schemas.microsoft.com/office/mac/drawingml/2011/main" val="1"/>
+              <ma14:wrappingTextBoxFlag xmlns:ma14="http://schemas.microsoft.com/office/mac/drawingml/2011/main" xmlns:a14="http://schemas.microsoft.com/office/drawing/2010/main" xmlns:m="http://schemas.openxmlformats.org/officeDocument/2006/math" xmlns="" val="1"/>
             </a:ext>
           </a:extLst>
         </p:spPr>
@@ -23062,7 +23084,7 @@
           </a:ln>
           <a:extLst>
             <a:ext uri="{C572A759-6A51-4108-AA02-DFA0A04FC94B}">
-              <ma14:wrappingTextBoxFlag xmlns="" xmlns:m="http://schemas.openxmlformats.org/officeDocument/2006/math" xmlns:a14="http://schemas.microsoft.com/office/drawing/2010/main" xmlns:ma14="http://schemas.microsoft.com/office/mac/drawingml/2011/main" val="1"/>
+              <ma14:wrappingTextBoxFlag xmlns:ma14="http://schemas.microsoft.com/office/mac/drawingml/2011/main" xmlns:a14="http://schemas.microsoft.com/office/drawing/2010/main" xmlns:m="http://schemas.openxmlformats.org/officeDocument/2006/math" xmlns="" val="1"/>
             </a:ext>
           </a:extLst>
         </p:spPr>
@@ -23132,7 +23154,7 @@
           </a:ln>
           <a:extLst>
             <a:ext uri="{C572A759-6A51-4108-AA02-DFA0A04FC94B}">
-              <ma14:wrappingTextBoxFlag xmlns="" xmlns:m="http://schemas.openxmlformats.org/officeDocument/2006/math" xmlns:a14="http://schemas.microsoft.com/office/drawing/2010/main" xmlns:ma14="http://schemas.microsoft.com/office/mac/drawingml/2011/main" val="1"/>
+              <ma14:wrappingTextBoxFlag xmlns:ma14="http://schemas.microsoft.com/office/mac/drawingml/2011/main" xmlns:a14="http://schemas.microsoft.com/office/drawing/2010/main" xmlns:m="http://schemas.openxmlformats.org/officeDocument/2006/math" xmlns="" val="1"/>
             </a:ext>
           </a:extLst>
         </p:spPr>
@@ -23202,7 +23224,7 @@
           </a:ln>
           <a:extLst>
             <a:ext uri="{C572A759-6A51-4108-AA02-DFA0A04FC94B}">
-              <ma14:wrappingTextBoxFlag xmlns="" xmlns:m="http://schemas.openxmlformats.org/officeDocument/2006/math" xmlns:a14="http://schemas.microsoft.com/office/drawing/2010/main" xmlns:ma14="http://schemas.microsoft.com/office/mac/drawingml/2011/main" val="1"/>
+              <ma14:wrappingTextBoxFlag xmlns:ma14="http://schemas.microsoft.com/office/mac/drawingml/2011/main" xmlns:a14="http://schemas.microsoft.com/office/drawing/2010/main" xmlns:m="http://schemas.openxmlformats.org/officeDocument/2006/math" xmlns="" val="1"/>
             </a:ext>
           </a:extLst>
         </p:spPr>
@@ -23737,7 +23759,7 @@
           </a:ln>
           <a:extLst>
             <a:ext uri="{C572A759-6A51-4108-AA02-DFA0A04FC94B}">
-              <ma14:wrappingTextBoxFlag xmlns="" xmlns:m="http://schemas.openxmlformats.org/officeDocument/2006/math" xmlns:a14="http://schemas.microsoft.com/office/drawing/2010/main" xmlns:p14="http://schemas.microsoft.com/office/powerpoint/2010/main" xmlns:ma14="http://schemas.microsoft.com/office/mac/drawingml/2011/main" val="1"/>
+              <ma14:wrappingTextBoxFlag xmlns:ma14="http://schemas.microsoft.com/office/mac/drawingml/2011/main" xmlns:p14="http://schemas.microsoft.com/office/powerpoint/2010/main" xmlns:a14="http://schemas.microsoft.com/office/drawing/2010/main" xmlns:m="http://schemas.openxmlformats.org/officeDocument/2006/math" xmlns="" val="1"/>
             </a:ext>
           </a:extLst>
         </p:spPr>
@@ -23905,7 +23927,7 @@
           </a:ln>
           <a:extLst>
             <a:ext uri="{C572A759-6A51-4108-AA02-DFA0A04FC94B}">
-              <ma14:wrappingTextBoxFlag xmlns="" xmlns:m="http://schemas.openxmlformats.org/officeDocument/2006/math" xmlns:a14="http://schemas.microsoft.com/office/drawing/2010/main" xmlns:p14="http://schemas.microsoft.com/office/powerpoint/2010/main" xmlns:ma14="http://schemas.microsoft.com/office/mac/drawingml/2011/main" val="1"/>
+              <ma14:wrappingTextBoxFlag xmlns:ma14="http://schemas.microsoft.com/office/mac/drawingml/2011/main" xmlns:p14="http://schemas.microsoft.com/office/powerpoint/2010/main" xmlns:a14="http://schemas.microsoft.com/office/drawing/2010/main" xmlns:m="http://schemas.openxmlformats.org/officeDocument/2006/math" xmlns="" val="1"/>
             </a:ext>
           </a:extLst>
         </p:spPr>
@@ -24416,7 +24438,7 @@
           </a:ln>
           <a:extLst>
             <a:ext uri="{C572A759-6A51-4108-AA02-DFA0A04FC94B}">
-              <ma14:wrappingTextBoxFlag xmlns="" xmlns:m="http://schemas.openxmlformats.org/officeDocument/2006/math" xmlns:a14="http://schemas.microsoft.com/office/drawing/2010/main" xmlns:p14="http://schemas.microsoft.com/office/powerpoint/2010/main" xmlns:ma14="http://schemas.microsoft.com/office/mac/drawingml/2011/main" val="1"/>
+              <ma14:wrappingTextBoxFlag xmlns:ma14="http://schemas.microsoft.com/office/mac/drawingml/2011/main" xmlns:p14="http://schemas.microsoft.com/office/powerpoint/2010/main" xmlns:a14="http://schemas.microsoft.com/office/drawing/2010/main" xmlns:m="http://schemas.openxmlformats.org/officeDocument/2006/math" xmlns="" val="1"/>
             </a:ext>
           </a:extLst>
         </p:spPr>
@@ -24751,7 +24773,7 @@
     <mc:Choice Requires="p14">
       <p:transition spd="med"/>
     </mc:Choice>
-    <mc:Fallback xmlns="" xmlns:m="http://schemas.openxmlformats.org/officeDocument/2006/math" xmlns:a14="http://schemas.microsoft.com/office/drawing/2010/main">
+    <mc:Fallback xmlns:a14="http://schemas.microsoft.com/office/drawing/2010/main" xmlns:m="http://schemas.openxmlformats.org/officeDocument/2006/math" xmlns="">
       <p:transition spd="slow"/>
     </mc:Fallback>
   </mc:AlternateContent>
@@ -24794,7 +24816,7 @@
           </a:ln>
           <a:extLst>
             <a:ext uri="{C572A759-6A51-4108-AA02-DFA0A04FC94B}">
-              <ma14:wrappingTextBoxFlag xmlns="" xmlns:m="http://schemas.openxmlformats.org/officeDocument/2006/math" xmlns:a14="http://schemas.microsoft.com/office/drawing/2010/main" xmlns:ma14="http://schemas.microsoft.com/office/mac/drawingml/2011/main" val="1"/>
+              <ma14:wrappingTextBoxFlag xmlns:ma14="http://schemas.microsoft.com/office/mac/drawingml/2011/main" xmlns:a14="http://schemas.microsoft.com/office/drawing/2010/main" xmlns:m="http://schemas.openxmlformats.org/officeDocument/2006/math" xmlns="" val="1"/>
             </a:ext>
           </a:extLst>
         </p:spPr>
@@ -24920,7 +24942,7 @@
           </a:ln>
           <a:extLst>
             <a:ext uri="{C572A759-6A51-4108-AA02-DFA0A04FC94B}">
-              <ma14:wrappingTextBoxFlag xmlns="" xmlns:m="http://schemas.openxmlformats.org/officeDocument/2006/math" xmlns:a14="http://schemas.microsoft.com/office/drawing/2010/main" xmlns:ma14="http://schemas.microsoft.com/office/mac/drawingml/2011/main" val="1"/>
+              <ma14:wrappingTextBoxFlag xmlns:ma14="http://schemas.microsoft.com/office/mac/drawingml/2011/main" xmlns:a14="http://schemas.microsoft.com/office/drawing/2010/main" xmlns:m="http://schemas.openxmlformats.org/officeDocument/2006/math" xmlns="" val="1"/>
             </a:ext>
           </a:extLst>
         </p:spPr>
@@ -28316,7 +28338,7 @@
           </a:ln>
           <a:extLst>
             <a:ext uri="{C572A759-6A51-4108-AA02-DFA0A04FC94B}">
-              <ma14:wrappingTextBoxFlag xmlns="" xmlns:m="http://schemas.openxmlformats.org/officeDocument/2006/math" xmlns:a14="http://schemas.microsoft.com/office/drawing/2010/main" xmlns:ma14="http://schemas.microsoft.com/office/mac/drawingml/2011/main" val="1"/>
+              <ma14:wrappingTextBoxFlag xmlns:ma14="http://schemas.microsoft.com/office/mac/drawingml/2011/main" xmlns:a14="http://schemas.microsoft.com/office/drawing/2010/main" xmlns:m="http://schemas.openxmlformats.org/officeDocument/2006/math" xmlns="" val="1"/>
             </a:ext>
           </a:extLst>
         </p:spPr>
@@ -28449,7 +28471,7 @@
           </a:ln>
           <a:extLst>
             <a:ext uri="{C572A759-6A51-4108-AA02-DFA0A04FC94B}">
-              <ma14:wrappingTextBoxFlag xmlns="" xmlns:m="http://schemas.openxmlformats.org/officeDocument/2006/math" xmlns:a14="http://schemas.microsoft.com/office/drawing/2010/main" xmlns:ma14="http://schemas.microsoft.com/office/mac/drawingml/2011/main" val="1"/>
+              <ma14:wrappingTextBoxFlag xmlns:ma14="http://schemas.microsoft.com/office/mac/drawingml/2011/main" xmlns:a14="http://schemas.microsoft.com/office/drawing/2010/main" xmlns:m="http://schemas.openxmlformats.org/officeDocument/2006/math" xmlns="" val="1"/>
             </a:ext>
           </a:extLst>
         </p:spPr>
@@ -28575,7 +28597,7 @@
           </a:ln>
           <a:extLst>
             <a:ext uri="{C572A759-6A51-4108-AA02-DFA0A04FC94B}">
-              <ma14:wrappingTextBoxFlag xmlns="" xmlns:m="http://schemas.openxmlformats.org/officeDocument/2006/math" xmlns:a14="http://schemas.microsoft.com/office/drawing/2010/main" xmlns:ma14="http://schemas.microsoft.com/office/mac/drawingml/2011/main" val="1"/>
+              <ma14:wrappingTextBoxFlag xmlns:ma14="http://schemas.microsoft.com/office/mac/drawingml/2011/main" xmlns:a14="http://schemas.microsoft.com/office/drawing/2010/main" xmlns:m="http://schemas.openxmlformats.org/officeDocument/2006/math" xmlns="" val="1"/>
             </a:ext>
           </a:extLst>
         </p:spPr>
@@ -29045,7 +29067,7 @@
           </a:ln>
           <a:extLst>
             <a:ext uri="{C572A759-6A51-4108-AA02-DFA0A04FC94B}">
-              <ma14:wrappingTextBoxFlag xmlns="" xmlns:m="http://schemas.openxmlformats.org/officeDocument/2006/math" xmlns:a14="http://schemas.microsoft.com/office/drawing/2010/main" xmlns:ma14="http://schemas.microsoft.com/office/mac/drawingml/2011/main" val="1"/>
+              <ma14:wrappingTextBoxFlag xmlns:ma14="http://schemas.microsoft.com/office/mac/drawingml/2011/main" xmlns:a14="http://schemas.microsoft.com/office/drawing/2010/main" xmlns:m="http://schemas.openxmlformats.org/officeDocument/2006/math" xmlns="" val="1"/>
             </a:ext>
           </a:extLst>
         </p:spPr>

--- a/koco_frame.pptx
+++ b/koco_frame.pptx
@@ -499,7 +499,7 @@
           <a:p>
             <a:fld id="{B00729D7-BDA7-41E1-AD79-DC61E6DD2EC2}" type="datetimeFigureOut">
               <a:rPr lang="ko-KR" altLang="en-US" smtClean="0"/>
-              <a:t>2025-03-19</a:t>
+              <a:t>2025-03-22</a:t>
             </a:fld>
             <a:endParaRPr lang="ko-KR" altLang="en-US"/>
           </a:p>
@@ -669,7 +669,7 @@
           <a:p>
             <a:fld id="{B00729D7-BDA7-41E1-AD79-DC61E6DD2EC2}" type="datetimeFigureOut">
               <a:rPr lang="ko-KR" altLang="en-US" smtClean="0"/>
-              <a:t>2025-03-19</a:t>
+              <a:t>2025-03-22</a:t>
             </a:fld>
             <a:endParaRPr lang="ko-KR" altLang="en-US"/>
           </a:p>
@@ -849,7 +849,7 @@
           <a:p>
             <a:fld id="{B00729D7-BDA7-41E1-AD79-DC61E6DD2EC2}" type="datetimeFigureOut">
               <a:rPr lang="ko-KR" altLang="en-US" smtClean="0"/>
-              <a:t>2025-03-19</a:t>
+              <a:t>2025-03-22</a:t>
             </a:fld>
             <a:endParaRPr lang="ko-KR" altLang="en-US"/>
           </a:p>
@@ -1525,7 +1525,7 @@
           <a:p>
             <a:fld id="{B00729D7-BDA7-41E1-AD79-DC61E6DD2EC2}" type="datetimeFigureOut">
               <a:rPr lang="ko-KR" altLang="en-US" smtClean="0"/>
-              <a:t>2025-03-19</a:t>
+              <a:t>2025-03-22</a:t>
             </a:fld>
             <a:endParaRPr lang="ko-KR" altLang="en-US"/>
           </a:p>
@@ -1769,7 +1769,7 @@
           <a:p>
             <a:fld id="{B00729D7-BDA7-41E1-AD79-DC61E6DD2EC2}" type="datetimeFigureOut">
               <a:rPr lang="ko-KR" altLang="en-US" smtClean="0"/>
-              <a:t>2025-03-19</a:t>
+              <a:t>2025-03-22</a:t>
             </a:fld>
             <a:endParaRPr lang="ko-KR" altLang="en-US"/>
           </a:p>
@@ -2001,7 +2001,7 @@
           <a:p>
             <a:fld id="{B00729D7-BDA7-41E1-AD79-DC61E6DD2EC2}" type="datetimeFigureOut">
               <a:rPr lang="ko-KR" altLang="en-US" smtClean="0"/>
-              <a:t>2025-03-19</a:t>
+              <a:t>2025-03-22</a:t>
             </a:fld>
             <a:endParaRPr lang="ko-KR" altLang="en-US"/>
           </a:p>
@@ -2368,7 +2368,7 @@
           <a:p>
             <a:fld id="{B00729D7-BDA7-41E1-AD79-DC61E6DD2EC2}" type="datetimeFigureOut">
               <a:rPr lang="ko-KR" altLang="en-US" smtClean="0"/>
-              <a:t>2025-03-19</a:t>
+              <a:t>2025-03-22</a:t>
             </a:fld>
             <a:endParaRPr lang="ko-KR" altLang="en-US"/>
           </a:p>
@@ -2486,7 +2486,7 @@
           <a:p>
             <a:fld id="{B00729D7-BDA7-41E1-AD79-DC61E6DD2EC2}" type="datetimeFigureOut">
               <a:rPr lang="ko-KR" altLang="en-US" smtClean="0"/>
-              <a:t>2025-03-19</a:t>
+              <a:t>2025-03-22</a:t>
             </a:fld>
             <a:endParaRPr lang="ko-KR" altLang="en-US"/>
           </a:p>
@@ -2581,7 +2581,7 @@
           <a:p>
             <a:fld id="{B00729D7-BDA7-41E1-AD79-DC61E6DD2EC2}" type="datetimeFigureOut">
               <a:rPr lang="ko-KR" altLang="en-US" smtClean="0"/>
-              <a:t>2025-03-19</a:t>
+              <a:t>2025-03-22</a:t>
             </a:fld>
             <a:endParaRPr lang="ko-KR" altLang="en-US"/>
           </a:p>
@@ -2858,7 +2858,7 @@
           <a:p>
             <a:fld id="{B00729D7-BDA7-41E1-AD79-DC61E6DD2EC2}" type="datetimeFigureOut">
               <a:rPr lang="ko-KR" altLang="en-US" smtClean="0"/>
-              <a:t>2025-03-19</a:t>
+              <a:t>2025-03-22</a:t>
             </a:fld>
             <a:endParaRPr lang="ko-KR" altLang="en-US"/>
           </a:p>
@@ -3071,7 +3071,7 @@
           <a:p>
             <a:fld id="{B00729D7-BDA7-41E1-AD79-DC61E6DD2EC2}" type="datetimeFigureOut">
               <a:rPr lang="ko-KR" altLang="en-US" smtClean="0"/>
-              <a:t>2025-03-19</a:t>
+              <a:t>2025-03-22</a:t>
             </a:fld>
             <a:endParaRPr lang="ko-KR" altLang="en-US"/>
           </a:p>
@@ -11996,14 +11996,14 @@
           <p:nvPr>
             <p:extLst>
               <p:ext uri="{D42A27DB-BD31-4B8C-83A1-F6EECF244321}">
-                <p14:modId xmlns:p14="http://schemas.microsoft.com/office/powerpoint/2010/main" val="1749568792"/>
+                <p14:modId xmlns:p14="http://schemas.microsoft.com/office/powerpoint/2010/main" val="3084902523"/>
               </p:ext>
             </p:extLst>
           </p:nvPr>
         </p:nvGraphicFramePr>
         <p:xfrm>
           <a:off x="243585" y="794606"/>
-          <a:ext cx="2065991" cy="5770586"/>
+          <a:ext cx="2065991" cy="5724496"/>
         </p:xfrm>
         <a:graphic>
           <a:graphicData uri="http://schemas.openxmlformats.org/drawingml/2006/table">
@@ -13339,7 +13339,7 @@
                   </a:ext>
                 </a:extLst>
               </a:tr>
-              <a:tr h="152770">
+              <a:tr h="100285">
                 <a:tc>
                   <a:txBody>
                     <a:bodyPr/>
@@ -13511,14 +13511,22 @@
                     <a:p>
                       <a:pPr algn="ctr" fontAlgn="ctr"/>
                       <a:r>
-                        <a:rPr lang="en-US" sz="700" u="none" strike="noStrike">
+                        <a:rPr lang="en-US" sz="700" u="none" strike="noStrike" dirty="0" err="1">
                           <a:effectLst/>
                           <a:latin typeface="+mn-ea"/>
                           <a:ea typeface="+mn-ea"/>
                         </a:rPr>
-                        <a:t>L.Lip E-line</a:t>
+                        <a:t>L.Lip</a:t>
                       </a:r>
-                      <a:endParaRPr lang="en-US" sz="700" b="0" i="0" u="none" strike="noStrike">
+                      <a:r>
+                        <a:rPr lang="en-US" sz="700" u="none" strike="noStrike" dirty="0">
+                          <a:effectLst/>
+                          <a:latin typeface="+mn-ea"/>
+                          <a:ea typeface="+mn-ea"/>
+                        </a:rPr>
+                        <a:t> E-line</a:t>
+                      </a:r>
+                      <a:endParaRPr lang="en-US" sz="700" b="0" i="0" u="none" strike="noStrike" dirty="0">
                         <a:effectLst/>
                         <a:latin typeface="+mn-ea"/>
                         <a:ea typeface="+mn-ea"/>
@@ -13675,14 +13683,14 @@
                     <a:p>
                       <a:pPr algn="ctr" fontAlgn="ctr"/>
                       <a:r>
-                        <a:rPr lang="en-US" sz="700" u="none" strike="noStrike">
+                        <a:rPr lang="en-US" sz="700" u="none" strike="noStrike" dirty="0">
                           <a:effectLst/>
                           <a:latin typeface="+mn-ea"/>
                           <a:ea typeface="+mn-ea"/>
                         </a:rPr>
                         <a:t>FA'B'</a:t>
                       </a:r>
-                      <a:endParaRPr lang="en-US" sz="700" b="0" i="0" u="none" strike="noStrike">
+                      <a:endParaRPr lang="en-US" sz="700" b="0" i="0" u="none" strike="noStrike" dirty="0">
                         <a:effectLst/>
                         <a:latin typeface="+mn-ea"/>
                         <a:ea typeface="+mn-ea"/>
@@ -18106,14 +18114,14 @@
                     <a:p>
                       <a:pPr algn="ctr" fontAlgn="ctr"/>
                       <a:r>
-                        <a:rPr lang="en-US" sz="700" u="none" strike="noStrike">
+                        <a:rPr lang="en-US" sz="700" u="none" strike="noStrike" dirty="0">
                           <a:effectLst/>
                           <a:latin typeface="+mn-ea"/>
                           <a:ea typeface="+mn-ea"/>
                         </a:rPr>
-                        <a:t>APDI(PABA)</a:t>
+                        <a:t>APDI</a:t>
                       </a:r>
-                      <a:endParaRPr lang="en-US" sz="700" b="0" i="0" u="none" strike="noStrike">
+                      <a:endParaRPr lang="en-US" sz="700" b="0" i="0" u="none" strike="noStrike" dirty="0">
                         <a:effectLst/>
                         <a:latin typeface="+mn-ea"/>
                         <a:ea typeface="+mn-ea"/>
@@ -29181,31 +29189,6 @@
           <a:chExt cx="0" cy="0"/>
         </a:xfrm>
       </p:grpSpPr>
-      <p:sp>
-        <p:nvSpPr>
-          <p:cNvPr id="2" name="제목 1">
-            <a:extLst>
-              <a:ext uri="{FF2B5EF4-FFF2-40B4-BE49-F238E27FC236}">
-                <a16:creationId xmlns:a16="http://schemas.microsoft.com/office/drawing/2014/main" id="{976147FE-A153-B348-7A75-33F30DDB9832}"/>
-              </a:ext>
-            </a:extLst>
-          </p:cNvPr>
-          <p:cNvSpPr>
-            <a:spLocks noGrp="1"/>
-          </p:cNvSpPr>
-          <p:nvPr>
-            <p:ph type="title"/>
-          </p:nvPr>
-        </p:nvSpPr>
-        <p:spPr/>
-        <p:txBody>
-          <a:bodyPr/>
-          <a:lstStyle/>
-          <a:p>
-            <a:endParaRPr lang="ko-KR" altLang="en-US" dirty="0"/>
-          </a:p>
-        </p:txBody>
-      </p:sp>
     </p:spTree>
     <p:extLst>
       <p:ext uri="{BB962C8B-B14F-4D97-AF65-F5344CB8AC3E}">
@@ -29236,31 +29219,6 @@
           <a:chExt cx="0" cy="0"/>
         </a:xfrm>
       </p:grpSpPr>
-      <p:sp>
-        <p:nvSpPr>
-          <p:cNvPr id="2" name="제목 1">
-            <a:extLst>
-              <a:ext uri="{FF2B5EF4-FFF2-40B4-BE49-F238E27FC236}">
-                <a16:creationId xmlns:a16="http://schemas.microsoft.com/office/drawing/2014/main" id="{976147FE-A153-B348-7A75-33F30DDB9832}"/>
-              </a:ext>
-            </a:extLst>
-          </p:cNvPr>
-          <p:cNvSpPr>
-            <a:spLocks noGrp="1"/>
-          </p:cNvSpPr>
-          <p:nvPr>
-            <p:ph type="title"/>
-          </p:nvPr>
-        </p:nvSpPr>
-        <p:spPr/>
-        <p:txBody>
-          <a:bodyPr/>
-          <a:lstStyle/>
-          <a:p>
-            <a:endParaRPr lang="ko-KR" altLang="en-US" dirty="0"/>
-          </a:p>
-        </p:txBody>
-      </p:sp>
     </p:spTree>
     <p:extLst>
       <p:ext uri="{BB962C8B-B14F-4D97-AF65-F5344CB8AC3E}">

--- a/koco_frame.pptx
+++ b/koco_frame.pptx
@@ -11996,14 +11996,14 @@
           <p:nvPr>
             <p:extLst>
               <p:ext uri="{D42A27DB-BD31-4B8C-83A1-F6EECF244321}">
-                <p14:modId xmlns:p14="http://schemas.microsoft.com/office/powerpoint/2010/main" val="3084902523"/>
+                <p14:modId xmlns:p14="http://schemas.microsoft.com/office/powerpoint/2010/main" val="642388886"/>
               </p:ext>
             </p:extLst>
           </p:nvPr>
         </p:nvGraphicFramePr>
         <p:xfrm>
-          <a:off x="243585" y="794606"/>
-          <a:ext cx="2065991" cy="5724496"/>
+          <a:off x="188638" y="761933"/>
+          <a:ext cx="2065991" cy="5787026"/>
         </p:xfrm>
         <a:graphic>
           <a:graphicData uri="http://schemas.openxmlformats.org/drawingml/2006/table">
@@ -12035,14 +12035,14 @@
                     <a:p>
                       <a:pPr algn="ctr" fontAlgn="ctr"/>
                       <a:r>
-                        <a:rPr lang="en-US" sz="700" u="none" strike="noStrike">
+                        <a:rPr lang="en-US" sz="700" u="none" strike="noStrike" dirty="0">
                           <a:effectLst/>
                           <a:latin typeface="+mn-ea"/>
                           <a:ea typeface="+mn-ea"/>
                         </a:rPr>
                         <a:t>ANB</a:t>
                       </a:r>
-                      <a:endParaRPr lang="en-US" sz="700" b="0" i="0" u="none" strike="noStrike">
+                      <a:endParaRPr lang="en-US" sz="700" b="0" i="0" u="none" strike="noStrike" dirty="0">
                         <a:effectLst/>
                         <a:latin typeface="+mn-ea"/>
                         <a:ea typeface="+mn-ea"/>
@@ -12112,14 +12112,14 @@
                     <a:p>
                       <a:pPr algn="ctr" fontAlgn="ctr"/>
                       <a:r>
-                        <a:rPr lang="en-US" altLang="ko-KR" sz="600" u="none" strike="noStrike">
+                        <a:rPr lang="en-US" altLang="ko-KR" sz="600" u="none" strike="noStrike" dirty="0">
                           <a:effectLst/>
                           <a:latin typeface="+mn-ea"/>
                           <a:ea typeface="+mn-ea"/>
                         </a:rPr>
                         <a:t>0</a:t>
                       </a:r>
-                      <a:endParaRPr lang="en-US" altLang="ko-KR" sz="600" b="0" i="0" u="none" strike="noStrike">
+                      <a:endParaRPr lang="en-US" altLang="ko-KR" sz="600" b="0" i="0" u="none" strike="noStrike" dirty="0">
                         <a:solidFill>
                           <a:srgbClr val="000000"/>
                         </a:solidFill>
@@ -12276,14 +12276,14 @@
                     <a:p>
                       <a:pPr algn="ctr" fontAlgn="ctr"/>
                       <a:r>
-                        <a:rPr lang="en-US" altLang="ko-KR" sz="600" u="none" strike="noStrike">
+                        <a:rPr lang="en-US" altLang="ko-KR" sz="600" u="none" strike="noStrike" dirty="0">
                           <a:effectLst/>
                           <a:latin typeface="+mn-ea"/>
                           <a:ea typeface="+mn-ea"/>
                         </a:rPr>
                         <a:t>0</a:t>
                       </a:r>
-                      <a:endParaRPr lang="en-US" altLang="ko-KR" sz="600" b="0" i="0" u="none" strike="noStrike">
+                      <a:endParaRPr lang="en-US" altLang="ko-KR" sz="600" b="0" i="0" u="none" strike="noStrike" dirty="0">
                         <a:solidFill>
                           <a:srgbClr val="000000"/>
                         </a:solidFill>
@@ -12768,14 +12768,14 @@
                     <a:p>
                       <a:pPr algn="ctr" fontAlgn="ctr"/>
                       <a:r>
-                        <a:rPr lang="en-US" altLang="ko-KR" sz="600" u="none" strike="noStrike">
+                        <a:rPr lang="en-US" altLang="ko-KR" sz="600" u="none" strike="noStrike" dirty="0">
                           <a:effectLst/>
                           <a:latin typeface="+mn-ea"/>
                           <a:ea typeface="+mn-ea"/>
                         </a:rPr>
                         <a:t>0</a:t>
                       </a:r>
-                      <a:endParaRPr lang="en-US" altLang="ko-KR" sz="600" b="0" i="0" u="none" strike="noStrike">
+                      <a:endParaRPr lang="en-US" altLang="ko-KR" sz="600" b="0" i="0" u="none" strike="noStrike" dirty="0">
                         <a:solidFill>
                           <a:srgbClr val="000000"/>
                         </a:solidFill>
@@ -13175,7 +13175,7 @@
                   </a:ext>
                 </a:extLst>
               </a:tr>
-              <a:tr h="111418">
+              <a:tr h="142776">
                 <a:tc>
                   <a:txBody>
                     <a:bodyPr/>
@@ -13339,7 +13339,7 @@
                   </a:ext>
                 </a:extLst>
               </a:tr>
-              <a:tr h="100285">
+              <a:tr h="137852">
                 <a:tc>
                   <a:txBody>
                     <a:bodyPr/>
@@ -13511,20 +13511,12 @@
                     <a:p>
                       <a:pPr algn="ctr" fontAlgn="ctr"/>
                       <a:r>
-                        <a:rPr lang="en-US" sz="700" u="none" strike="noStrike" dirty="0" err="1">
-                          <a:effectLst/>
-                          <a:latin typeface="+mn-ea"/>
-                          <a:ea typeface="+mn-ea"/>
-                        </a:rPr>
-                        <a:t>L.Lip</a:t>
-                      </a:r>
-                      <a:r>
                         <a:rPr lang="en-US" sz="700" u="none" strike="noStrike" dirty="0">
                           <a:effectLst/>
                           <a:latin typeface="+mn-ea"/>
                           <a:ea typeface="+mn-ea"/>
                         </a:rPr>
-                        <a:t> E-line</a:t>
+                        <a:t>E-line</a:t>
                       </a:r>
                       <a:endParaRPr lang="en-US" sz="700" b="0" i="0" u="none" strike="noStrike" dirty="0">
                         <a:effectLst/>
@@ -13760,14 +13752,14 @@
                     <a:p>
                       <a:pPr algn="ctr" fontAlgn="ctr"/>
                       <a:r>
-                        <a:rPr lang="en-US" altLang="ko-KR" sz="600" u="none" strike="noStrike">
+                        <a:rPr lang="en-US" altLang="ko-KR" sz="600" u="none" strike="noStrike" dirty="0">
                           <a:effectLst/>
                           <a:latin typeface="+mn-ea"/>
                           <a:ea typeface="+mn-ea"/>
                         </a:rPr>
                         <a:t>0</a:t>
                       </a:r>
-                      <a:endParaRPr lang="en-US" altLang="ko-KR" sz="600" b="0" i="0" u="none" strike="noStrike">
+                      <a:endParaRPr lang="en-US" altLang="ko-KR" sz="600" b="0" i="0" u="none" strike="noStrike" dirty="0">
                         <a:solidFill>
                           <a:srgbClr val="000000"/>
                         </a:solidFill>
@@ -14416,14 +14408,14 @@
                     <a:p>
                       <a:pPr algn="ctr" fontAlgn="ctr"/>
                       <a:r>
-                        <a:rPr lang="en-US" altLang="ko-KR" sz="600" u="none" strike="noStrike">
+                        <a:rPr lang="en-US" altLang="ko-KR" sz="600" u="none" strike="noStrike" dirty="0">
                           <a:effectLst/>
                           <a:latin typeface="+mn-ea"/>
                           <a:ea typeface="+mn-ea"/>
                         </a:rPr>
                         <a:t>0</a:t>
                       </a:r>
-                      <a:endParaRPr lang="en-US" altLang="ko-KR" sz="600" b="0" i="0" u="none" strike="noStrike">
+                      <a:endParaRPr lang="en-US" altLang="ko-KR" sz="600" b="0" i="0" u="none" strike="noStrike" dirty="0">
                         <a:solidFill>
                           <a:srgbClr val="000000"/>
                         </a:solidFill>
@@ -14908,14 +14900,14 @@
                     <a:p>
                       <a:pPr algn="ctr" fontAlgn="ctr"/>
                       <a:r>
-                        <a:rPr lang="en-US" altLang="ko-KR" sz="600" u="none" strike="noStrike">
+                        <a:rPr lang="en-US" altLang="ko-KR" sz="600" u="none" strike="noStrike" dirty="0">
                           <a:effectLst/>
                           <a:latin typeface="+mn-ea"/>
                           <a:ea typeface="+mn-ea"/>
                         </a:rPr>
                         <a:t>0</a:t>
                       </a:r>
-                      <a:endParaRPr lang="en-US" altLang="ko-KR" sz="600" b="0" i="0" u="none" strike="noStrike">
+                      <a:endParaRPr lang="en-US" altLang="ko-KR" sz="600" b="0" i="0" u="none" strike="noStrike" dirty="0">
                         <a:solidFill>
                           <a:srgbClr val="000000"/>
                         </a:solidFill>
@@ -15400,14 +15392,14 @@
                     <a:p>
                       <a:pPr algn="ctr" fontAlgn="ctr"/>
                       <a:r>
-                        <a:rPr lang="en-US" altLang="ko-KR" sz="600" u="none" strike="noStrike">
+                        <a:rPr lang="en-US" altLang="ko-KR" sz="600" u="none" strike="noStrike" dirty="0">
                           <a:effectLst/>
                           <a:latin typeface="+mn-ea"/>
                           <a:ea typeface="+mn-ea"/>
                         </a:rPr>
                         <a:t>0</a:t>
                       </a:r>
-                      <a:endParaRPr lang="en-US" altLang="ko-KR" sz="600" b="0" i="0" u="none" strike="noStrike">
+                      <a:endParaRPr lang="en-US" altLang="ko-KR" sz="600" b="0" i="0" u="none" strike="noStrike" dirty="0">
                         <a:solidFill>
                           <a:srgbClr val="000000"/>
                         </a:solidFill>
@@ -15731,14 +15723,14 @@
                     <a:p>
                       <a:pPr algn="ctr" fontAlgn="ctr"/>
                       <a:r>
-                        <a:rPr lang="en-US" altLang="ko-KR" sz="600" u="none" strike="noStrike">
+                        <a:rPr lang="en-US" altLang="ko-KR" sz="600" u="none" strike="noStrike" dirty="0">
                           <a:effectLst/>
                           <a:latin typeface="+mn-ea"/>
                           <a:ea typeface="+mn-ea"/>
                         </a:rPr>
                         <a:t>0</a:t>
                       </a:r>
-                      <a:endParaRPr lang="en-US" altLang="ko-KR" sz="600" b="0" i="0" u="none" strike="noStrike">
+                      <a:endParaRPr lang="en-US" altLang="ko-KR" sz="600" b="0" i="0" u="none" strike="noStrike" dirty="0">
                         <a:solidFill>
                           <a:srgbClr val="000000"/>
                         </a:solidFill>
@@ -16387,14 +16379,14 @@
                     <a:p>
                       <a:pPr algn="ctr" fontAlgn="ctr"/>
                       <a:r>
-                        <a:rPr lang="en-US" altLang="ko-KR" sz="600" u="none" strike="noStrike">
+                        <a:rPr lang="en-US" altLang="ko-KR" sz="600" u="none" strike="noStrike" dirty="0">
                           <a:effectLst/>
                           <a:latin typeface="+mn-ea"/>
                           <a:ea typeface="+mn-ea"/>
                         </a:rPr>
                         <a:t>0</a:t>
                       </a:r>
-                      <a:endParaRPr lang="en-US" altLang="ko-KR" sz="600" b="0" i="0" u="none" strike="noStrike">
+                      <a:endParaRPr lang="en-US" altLang="ko-KR" sz="600" b="0" i="0" u="none" strike="noStrike" dirty="0">
                         <a:solidFill>
                           <a:srgbClr val="000000"/>
                         </a:solidFill>
@@ -19493,7 +19485,7 @@
         </p:nvSpPr>
         <p:spPr>
           <a:xfrm>
-            <a:off x="225650" y="469547"/>
+            <a:off x="381063" y="246083"/>
             <a:ext cx="1989405" cy="307777"/>
           </a:xfrm>
           <a:prstGeom prst="rect">
@@ -19516,8 +19508,25 @@
                 <a:latin typeface="+mn-ea"/>
                 <a:cs typeface="Times New Roman Bold" panose="02020803070505020304" pitchFamily="18" charset="0"/>
               </a:rPr>
-              <a:t>CEPH:</a:t>
-            </a:r>
+              <a:t>CEPH </a:t>
+            </a:r>
+            <a:r>
+              <a:rPr lang="ko-KR" altLang="en-US" sz="1400" b="1" dirty="0">
+                <a:solidFill>
+                  <a:srgbClr val="000000"/>
+                </a:solidFill>
+                <a:latin typeface="+mn-ea"/>
+                <a:cs typeface="Times New Roman Bold" panose="02020803070505020304" pitchFamily="18" charset="0"/>
+              </a:rPr>
+              <a:t>데이터</a:t>
+            </a:r>
+            <a:endParaRPr lang="en-US" altLang="ko-KR" sz="1400" b="1" dirty="0">
+              <a:solidFill>
+                <a:srgbClr val="000000"/>
+              </a:solidFill>
+              <a:latin typeface="+mn-ea"/>
+              <a:cs typeface="Times New Roman Bold" panose="02020803070505020304" pitchFamily="18" charset="0"/>
+            </a:endParaRPr>
           </a:p>
         </p:txBody>
       </p:sp>
@@ -22258,7 +22267,7 @@
           </a:ln>
           <a:extLst>
             <a:ext uri="{C572A759-6A51-4108-AA02-DFA0A04FC94B}">
-              <ma14:wrappingTextBoxFlag xmlns="" xmlns:m="http://schemas.openxmlformats.org/officeDocument/2006/math" xmlns:a14="http://schemas.microsoft.com/office/drawing/2010/main" xmlns:ma14="http://schemas.microsoft.com/office/mac/drawingml/2011/main" val="1"/>
+              <ma14:wrappingTextBoxFlag xmlns:ma14="http://schemas.microsoft.com/office/mac/drawingml/2011/main" xmlns:a14="http://schemas.microsoft.com/office/drawing/2010/main" xmlns:m="http://schemas.openxmlformats.org/officeDocument/2006/math" xmlns="" val="1"/>
             </a:ext>
           </a:extLst>
         </p:spPr>
@@ -23042,7 +23051,7 @@
           </a:ln>
           <a:extLst>
             <a:ext uri="{C572A759-6A51-4108-AA02-DFA0A04FC94B}">
-              <ma14:wrappingTextBoxFlag xmlns:ma14="http://schemas.microsoft.com/office/mac/drawingml/2011/main" xmlns:a14="http://schemas.microsoft.com/office/drawing/2010/main" xmlns:m="http://schemas.openxmlformats.org/officeDocument/2006/math" xmlns="" val="1"/>
+              <ma14:wrappingTextBoxFlag xmlns="" xmlns:m="http://schemas.openxmlformats.org/officeDocument/2006/math" xmlns:a14="http://schemas.microsoft.com/office/drawing/2010/main" xmlns:ma14="http://schemas.microsoft.com/office/mac/drawingml/2011/main" val="1"/>
             </a:ext>
           </a:extLst>
         </p:spPr>
@@ -23092,7 +23101,7 @@
           </a:ln>
           <a:extLst>
             <a:ext uri="{C572A759-6A51-4108-AA02-DFA0A04FC94B}">
-              <ma14:wrappingTextBoxFlag xmlns:ma14="http://schemas.microsoft.com/office/mac/drawingml/2011/main" xmlns:a14="http://schemas.microsoft.com/office/drawing/2010/main" xmlns:m="http://schemas.openxmlformats.org/officeDocument/2006/math" xmlns="" val="1"/>
+              <ma14:wrappingTextBoxFlag xmlns="" xmlns:m="http://schemas.openxmlformats.org/officeDocument/2006/math" xmlns:a14="http://schemas.microsoft.com/office/drawing/2010/main" xmlns:ma14="http://schemas.microsoft.com/office/mac/drawingml/2011/main" val="1"/>
             </a:ext>
           </a:extLst>
         </p:spPr>
@@ -23162,7 +23171,7 @@
           </a:ln>
           <a:extLst>
             <a:ext uri="{C572A759-6A51-4108-AA02-DFA0A04FC94B}">
-              <ma14:wrappingTextBoxFlag xmlns:ma14="http://schemas.microsoft.com/office/mac/drawingml/2011/main" xmlns:a14="http://schemas.microsoft.com/office/drawing/2010/main" xmlns:m="http://schemas.openxmlformats.org/officeDocument/2006/math" xmlns="" val="1"/>
+              <ma14:wrappingTextBoxFlag xmlns="" xmlns:m="http://schemas.openxmlformats.org/officeDocument/2006/math" xmlns:a14="http://schemas.microsoft.com/office/drawing/2010/main" xmlns:ma14="http://schemas.microsoft.com/office/mac/drawingml/2011/main" val="1"/>
             </a:ext>
           </a:extLst>
         </p:spPr>
@@ -23232,7 +23241,7 @@
           </a:ln>
           <a:extLst>
             <a:ext uri="{C572A759-6A51-4108-AA02-DFA0A04FC94B}">
-              <ma14:wrappingTextBoxFlag xmlns:ma14="http://schemas.microsoft.com/office/mac/drawingml/2011/main" xmlns:a14="http://schemas.microsoft.com/office/drawing/2010/main" xmlns:m="http://schemas.openxmlformats.org/officeDocument/2006/math" xmlns="" val="1"/>
+              <ma14:wrappingTextBoxFlag xmlns="" xmlns:m="http://schemas.openxmlformats.org/officeDocument/2006/math" xmlns:a14="http://schemas.microsoft.com/office/drawing/2010/main" xmlns:ma14="http://schemas.microsoft.com/office/mac/drawingml/2011/main" val="1"/>
             </a:ext>
           </a:extLst>
         </p:spPr>
@@ -23767,7 +23776,7 @@
           </a:ln>
           <a:extLst>
             <a:ext uri="{C572A759-6A51-4108-AA02-DFA0A04FC94B}">
-              <ma14:wrappingTextBoxFlag xmlns:ma14="http://schemas.microsoft.com/office/mac/drawingml/2011/main" xmlns:p14="http://schemas.microsoft.com/office/powerpoint/2010/main" xmlns:a14="http://schemas.microsoft.com/office/drawing/2010/main" xmlns:m="http://schemas.openxmlformats.org/officeDocument/2006/math" xmlns="" val="1"/>
+              <ma14:wrappingTextBoxFlag xmlns="" xmlns:m="http://schemas.openxmlformats.org/officeDocument/2006/math" xmlns:a14="http://schemas.microsoft.com/office/drawing/2010/main" xmlns:p14="http://schemas.microsoft.com/office/powerpoint/2010/main" xmlns:ma14="http://schemas.microsoft.com/office/mac/drawingml/2011/main" val="1"/>
             </a:ext>
           </a:extLst>
         </p:spPr>
@@ -23935,7 +23944,7 @@
           </a:ln>
           <a:extLst>
             <a:ext uri="{C572A759-6A51-4108-AA02-DFA0A04FC94B}">
-              <ma14:wrappingTextBoxFlag xmlns:ma14="http://schemas.microsoft.com/office/mac/drawingml/2011/main" xmlns:p14="http://schemas.microsoft.com/office/powerpoint/2010/main" xmlns:a14="http://schemas.microsoft.com/office/drawing/2010/main" xmlns:m="http://schemas.openxmlformats.org/officeDocument/2006/math" xmlns="" val="1"/>
+              <ma14:wrappingTextBoxFlag xmlns="" xmlns:m="http://schemas.openxmlformats.org/officeDocument/2006/math" xmlns:a14="http://schemas.microsoft.com/office/drawing/2010/main" xmlns:p14="http://schemas.microsoft.com/office/powerpoint/2010/main" xmlns:ma14="http://schemas.microsoft.com/office/mac/drawingml/2011/main" val="1"/>
             </a:ext>
           </a:extLst>
         </p:spPr>
@@ -24446,7 +24455,7 @@
           </a:ln>
           <a:extLst>
             <a:ext uri="{C572A759-6A51-4108-AA02-DFA0A04FC94B}">
-              <ma14:wrappingTextBoxFlag xmlns:ma14="http://schemas.microsoft.com/office/mac/drawingml/2011/main" xmlns:p14="http://schemas.microsoft.com/office/powerpoint/2010/main" xmlns:a14="http://schemas.microsoft.com/office/drawing/2010/main" xmlns:m="http://schemas.openxmlformats.org/officeDocument/2006/math" xmlns="" val="1"/>
+              <ma14:wrappingTextBoxFlag xmlns="" xmlns:m="http://schemas.openxmlformats.org/officeDocument/2006/math" xmlns:a14="http://schemas.microsoft.com/office/drawing/2010/main" xmlns:p14="http://schemas.microsoft.com/office/powerpoint/2010/main" xmlns:ma14="http://schemas.microsoft.com/office/mac/drawingml/2011/main" val="1"/>
             </a:ext>
           </a:extLst>
         </p:spPr>
@@ -24781,7 +24790,7 @@
     <mc:Choice Requires="p14">
       <p:transition spd="med"/>
     </mc:Choice>
-    <mc:Fallback xmlns:a14="http://schemas.microsoft.com/office/drawing/2010/main" xmlns:m="http://schemas.openxmlformats.org/officeDocument/2006/math" xmlns="">
+    <mc:Fallback xmlns="" xmlns:m="http://schemas.openxmlformats.org/officeDocument/2006/math" xmlns:a14="http://schemas.microsoft.com/office/drawing/2010/main">
       <p:transition spd="slow"/>
     </mc:Fallback>
   </mc:AlternateContent>
@@ -24824,7 +24833,7 @@
           </a:ln>
           <a:extLst>
             <a:ext uri="{C572A759-6A51-4108-AA02-DFA0A04FC94B}">
-              <ma14:wrappingTextBoxFlag xmlns:ma14="http://schemas.microsoft.com/office/mac/drawingml/2011/main" xmlns:a14="http://schemas.microsoft.com/office/drawing/2010/main" xmlns:m="http://schemas.openxmlformats.org/officeDocument/2006/math" xmlns="" val="1"/>
+              <ma14:wrappingTextBoxFlag xmlns="" xmlns:m="http://schemas.openxmlformats.org/officeDocument/2006/math" xmlns:a14="http://schemas.microsoft.com/office/drawing/2010/main" xmlns:ma14="http://schemas.microsoft.com/office/mac/drawingml/2011/main" val="1"/>
             </a:ext>
           </a:extLst>
         </p:spPr>
@@ -24950,7 +24959,7 @@
           </a:ln>
           <a:extLst>
             <a:ext uri="{C572A759-6A51-4108-AA02-DFA0A04FC94B}">
-              <ma14:wrappingTextBoxFlag xmlns:ma14="http://schemas.microsoft.com/office/mac/drawingml/2011/main" xmlns:a14="http://schemas.microsoft.com/office/drawing/2010/main" xmlns:m="http://schemas.openxmlformats.org/officeDocument/2006/math" xmlns="" val="1"/>
+              <ma14:wrappingTextBoxFlag xmlns="" xmlns:m="http://schemas.openxmlformats.org/officeDocument/2006/math" xmlns:a14="http://schemas.microsoft.com/office/drawing/2010/main" xmlns:ma14="http://schemas.microsoft.com/office/mac/drawingml/2011/main" val="1"/>
             </a:ext>
           </a:extLst>
         </p:spPr>
@@ -28346,7 +28355,7 @@
           </a:ln>
           <a:extLst>
             <a:ext uri="{C572A759-6A51-4108-AA02-DFA0A04FC94B}">
-              <ma14:wrappingTextBoxFlag xmlns:ma14="http://schemas.microsoft.com/office/mac/drawingml/2011/main" xmlns:a14="http://schemas.microsoft.com/office/drawing/2010/main" xmlns:m="http://schemas.openxmlformats.org/officeDocument/2006/math" xmlns="" val="1"/>
+              <ma14:wrappingTextBoxFlag xmlns="" xmlns:m="http://schemas.openxmlformats.org/officeDocument/2006/math" xmlns:a14="http://schemas.microsoft.com/office/drawing/2010/main" xmlns:ma14="http://schemas.microsoft.com/office/mac/drawingml/2011/main" val="1"/>
             </a:ext>
           </a:extLst>
         </p:spPr>
@@ -28479,7 +28488,7 @@
           </a:ln>
           <a:extLst>
             <a:ext uri="{C572A759-6A51-4108-AA02-DFA0A04FC94B}">
-              <ma14:wrappingTextBoxFlag xmlns:ma14="http://schemas.microsoft.com/office/mac/drawingml/2011/main" xmlns:a14="http://schemas.microsoft.com/office/drawing/2010/main" xmlns:m="http://schemas.openxmlformats.org/officeDocument/2006/math" xmlns="" val="1"/>
+              <ma14:wrappingTextBoxFlag xmlns="" xmlns:m="http://schemas.openxmlformats.org/officeDocument/2006/math" xmlns:a14="http://schemas.microsoft.com/office/drawing/2010/main" xmlns:ma14="http://schemas.microsoft.com/office/mac/drawingml/2011/main" val="1"/>
             </a:ext>
           </a:extLst>
         </p:spPr>
@@ -28605,7 +28614,7 @@
           </a:ln>
           <a:extLst>
             <a:ext uri="{C572A759-6A51-4108-AA02-DFA0A04FC94B}">
-              <ma14:wrappingTextBoxFlag xmlns:ma14="http://schemas.microsoft.com/office/mac/drawingml/2011/main" xmlns:a14="http://schemas.microsoft.com/office/drawing/2010/main" xmlns:m="http://schemas.openxmlformats.org/officeDocument/2006/math" xmlns="" val="1"/>
+              <ma14:wrappingTextBoxFlag xmlns="" xmlns:m="http://schemas.openxmlformats.org/officeDocument/2006/math" xmlns:a14="http://schemas.microsoft.com/office/drawing/2010/main" xmlns:ma14="http://schemas.microsoft.com/office/mac/drawingml/2011/main" val="1"/>
             </a:ext>
           </a:extLst>
         </p:spPr>
@@ -29075,7 +29084,7 @@
           </a:ln>
           <a:extLst>
             <a:ext uri="{C572A759-6A51-4108-AA02-DFA0A04FC94B}">
-              <ma14:wrappingTextBoxFlag xmlns:ma14="http://schemas.microsoft.com/office/mac/drawingml/2011/main" xmlns:a14="http://schemas.microsoft.com/office/drawing/2010/main" xmlns:m="http://schemas.openxmlformats.org/officeDocument/2006/math" xmlns="" val="1"/>
+              <ma14:wrappingTextBoxFlag xmlns="" xmlns:m="http://schemas.openxmlformats.org/officeDocument/2006/math" xmlns:a14="http://schemas.microsoft.com/office/drawing/2010/main" xmlns:ma14="http://schemas.microsoft.com/office/mac/drawingml/2011/main" val="1"/>
             </a:ext>
           </a:extLst>
         </p:spPr>

--- a/koco_frame.pptx
+++ b/koco_frame.pptx
@@ -499,7 +499,7 @@
           <a:p>
             <a:fld id="{B00729D7-BDA7-41E1-AD79-DC61E6DD2EC2}" type="datetimeFigureOut">
               <a:rPr lang="ko-KR" altLang="en-US" smtClean="0"/>
-              <a:t>2025-03-22</a:t>
+              <a:t>2025-03-23</a:t>
             </a:fld>
             <a:endParaRPr lang="ko-KR" altLang="en-US"/>
           </a:p>
@@ -669,7 +669,7 @@
           <a:p>
             <a:fld id="{B00729D7-BDA7-41E1-AD79-DC61E6DD2EC2}" type="datetimeFigureOut">
               <a:rPr lang="ko-KR" altLang="en-US" smtClean="0"/>
-              <a:t>2025-03-22</a:t>
+              <a:t>2025-03-23</a:t>
             </a:fld>
             <a:endParaRPr lang="ko-KR" altLang="en-US"/>
           </a:p>
@@ -849,7 +849,7 @@
           <a:p>
             <a:fld id="{B00729D7-BDA7-41E1-AD79-DC61E6DD2EC2}" type="datetimeFigureOut">
               <a:rPr lang="ko-KR" altLang="en-US" smtClean="0"/>
-              <a:t>2025-03-22</a:t>
+              <a:t>2025-03-23</a:t>
             </a:fld>
             <a:endParaRPr lang="ko-KR" altLang="en-US"/>
           </a:p>
@@ -1525,7 +1525,7 @@
           <a:p>
             <a:fld id="{B00729D7-BDA7-41E1-AD79-DC61E6DD2EC2}" type="datetimeFigureOut">
               <a:rPr lang="ko-KR" altLang="en-US" smtClean="0"/>
-              <a:t>2025-03-22</a:t>
+              <a:t>2025-03-23</a:t>
             </a:fld>
             <a:endParaRPr lang="ko-KR" altLang="en-US"/>
           </a:p>
@@ -1769,7 +1769,7 @@
           <a:p>
             <a:fld id="{B00729D7-BDA7-41E1-AD79-DC61E6DD2EC2}" type="datetimeFigureOut">
               <a:rPr lang="ko-KR" altLang="en-US" smtClean="0"/>
-              <a:t>2025-03-22</a:t>
+              <a:t>2025-03-23</a:t>
             </a:fld>
             <a:endParaRPr lang="ko-KR" altLang="en-US"/>
           </a:p>
@@ -2001,7 +2001,7 @@
           <a:p>
             <a:fld id="{B00729D7-BDA7-41E1-AD79-DC61E6DD2EC2}" type="datetimeFigureOut">
               <a:rPr lang="ko-KR" altLang="en-US" smtClean="0"/>
-              <a:t>2025-03-22</a:t>
+              <a:t>2025-03-23</a:t>
             </a:fld>
             <a:endParaRPr lang="ko-KR" altLang="en-US"/>
           </a:p>
@@ -2368,7 +2368,7 @@
           <a:p>
             <a:fld id="{B00729D7-BDA7-41E1-AD79-DC61E6DD2EC2}" type="datetimeFigureOut">
               <a:rPr lang="ko-KR" altLang="en-US" smtClean="0"/>
-              <a:t>2025-03-22</a:t>
+              <a:t>2025-03-23</a:t>
             </a:fld>
             <a:endParaRPr lang="ko-KR" altLang="en-US"/>
           </a:p>
@@ -2486,7 +2486,7 @@
           <a:p>
             <a:fld id="{B00729D7-BDA7-41E1-AD79-DC61E6DD2EC2}" type="datetimeFigureOut">
               <a:rPr lang="ko-KR" altLang="en-US" smtClean="0"/>
-              <a:t>2025-03-22</a:t>
+              <a:t>2025-03-23</a:t>
             </a:fld>
             <a:endParaRPr lang="ko-KR" altLang="en-US"/>
           </a:p>
@@ -2581,7 +2581,7 @@
           <a:p>
             <a:fld id="{B00729D7-BDA7-41E1-AD79-DC61E6DD2EC2}" type="datetimeFigureOut">
               <a:rPr lang="ko-KR" altLang="en-US" smtClean="0"/>
-              <a:t>2025-03-22</a:t>
+              <a:t>2025-03-23</a:t>
             </a:fld>
             <a:endParaRPr lang="ko-KR" altLang="en-US"/>
           </a:p>
@@ -2858,7 +2858,7 @@
           <a:p>
             <a:fld id="{B00729D7-BDA7-41E1-AD79-DC61E6DD2EC2}" type="datetimeFigureOut">
               <a:rPr lang="ko-KR" altLang="en-US" smtClean="0"/>
-              <a:t>2025-03-22</a:t>
+              <a:t>2025-03-23</a:t>
             </a:fld>
             <a:endParaRPr lang="ko-KR" altLang="en-US"/>
           </a:p>
@@ -3071,7 +3071,7 @@
           <a:p>
             <a:fld id="{B00729D7-BDA7-41E1-AD79-DC61E6DD2EC2}" type="datetimeFigureOut">
               <a:rPr lang="ko-KR" altLang="en-US" smtClean="0"/>
-              <a:t>2025-03-22</a:t>
+              <a:t>2025-03-23</a:t>
             </a:fld>
             <a:endParaRPr lang="ko-KR" altLang="en-US"/>
           </a:p>
@@ -11996,7 +11996,7 @@
           <p:nvPr>
             <p:extLst>
               <p:ext uri="{D42A27DB-BD31-4B8C-83A1-F6EECF244321}">
-                <p14:modId xmlns:p14="http://schemas.microsoft.com/office/powerpoint/2010/main" val="642388886"/>
+                <p14:modId xmlns:p14="http://schemas.microsoft.com/office/powerpoint/2010/main" val="1021680342"/>
               </p:ext>
             </p:extLst>
           </p:nvPr>
@@ -17778,14 +17778,14 @@
                     <a:p>
                       <a:pPr algn="ctr" fontAlgn="ctr"/>
                       <a:r>
-                        <a:rPr lang="en-US" sz="700" u="none" strike="noStrike">
+                        <a:rPr lang="en-US" sz="700" u="none" strike="noStrike" dirty="0">
                           <a:effectLst/>
                           <a:latin typeface="+mn-ea"/>
                           <a:ea typeface="+mn-ea"/>
                         </a:rPr>
-                        <a:t>incisor Overbite</a:t>
+                        <a:t>Incisor Overbite</a:t>
                       </a:r>
-                      <a:endParaRPr lang="en-US" sz="700" b="0" i="0" u="none" strike="noStrike">
+                      <a:endParaRPr lang="en-US" sz="700" b="0" i="0" u="none" strike="noStrike" dirty="0">
                         <a:effectLst/>
                         <a:latin typeface="+mn-ea"/>
                         <a:ea typeface="+mn-ea"/>
@@ -17947,9 +17947,17 @@
                           <a:latin typeface="+mn-ea"/>
                           <a:ea typeface="+mn-ea"/>
                         </a:rPr>
-                        <a:t>incisor Overjet</a:t>
+                        <a:t>Incisor </a:t>
                       </a:r>
-                      <a:endParaRPr lang="en-US" sz="700" b="0" i="0" u="none" strike="noStrike">
+                      <a:r>
+                        <a:rPr lang="en-US" sz="700" u="none" strike="noStrike" dirty="0">
+                          <a:effectLst/>
+                          <a:latin typeface="+mn-ea"/>
+                          <a:ea typeface="+mn-ea"/>
+                        </a:rPr>
+                        <a:t>Overjet</a:t>
+                      </a:r>
+                      <a:endParaRPr lang="en-US" sz="700" b="0" i="0" u="none" strike="noStrike" dirty="0">
                         <a:effectLst/>
                         <a:latin typeface="+mn-ea"/>
                         <a:ea typeface="+mn-ea"/>
@@ -22267,7 +22275,7 @@
           </a:ln>
           <a:extLst>
             <a:ext uri="{C572A759-6A51-4108-AA02-DFA0A04FC94B}">
-              <ma14:wrappingTextBoxFlag xmlns:ma14="http://schemas.microsoft.com/office/mac/drawingml/2011/main" xmlns:a14="http://schemas.microsoft.com/office/drawing/2010/main" xmlns:m="http://schemas.openxmlformats.org/officeDocument/2006/math" xmlns="" val="1"/>
+              <ma14:wrappingTextBoxFlag xmlns="" xmlns:m="http://schemas.openxmlformats.org/officeDocument/2006/math" xmlns:a14="http://schemas.microsoft.com/office/drawing/2010/main" xmlns:ma14="http://schemas.microsoft.com/office/mac/drawingml/2011/main" val="1"/>
             </a:ext>
           </a:extLst>
         </p:spPr>
@@ -23051,7 +23059,7 @@
           </a:ln>
           <a:extLst>
             <a:ext uri="{C572A759-6A51-4108-AA02-DFA0A04FC94B}">
-              <ma14:wrappingTextBoxFlag xmlns="" xmlns:m="http://schemas.openxmlformats.org/officeDocument/2006/math" xmlns:a14="http://schemas.microsoft.com/office/drawing/2010/main" xmlns:ma14="http://schemas.microsoft.com/office/mac/drawingml/2011/main" val="1"/>
+              <ma14:wrappingTextBoxFlag xmlns:ma14="http://schemas.microsoft.com/office/mac/drawingml/2011/main" xmlns:a14="http://schemas.microsoft.com/office/drawing/2010/main" xmlns:m="http://schemas.openxmlformats.org/officeDocument/2006/math" xmlns="" val="1"/>
             </a:ext>
           </a:extLst>
         </p:spPr>
@@ -23101,7 +23109,7 @@
           </a:ln>
           <a:extLst>
             <a:ext uri="{C572A759-6A51-4108-AA02-DFA0A04FC94B}">
-              <ma14:wrappingTextBoxFlag xmlns="" xmlns:m="http://schemas.openxmlformats.org/officeDocument/2006/math" xmlns:a14="http://schemas.microsoft.com/office/drawing/2010/main" xmlns:ma14="http://schemas.microsoft.com/office/mac/drawingml/2011/main" val="1"/>
+              <ma14:wrappingTextBoxFlag xmlns:ma14="http://schemas.microsoft.com/office/mac/drawingml/2011/main" xmlns:a14="http://schemas.microsoft.com/office/drawing/2010/main" xmlns:m="http://schemas.openxmlformats.org/officeDocument/2006/math" xmlns="" val="1"/>
             </a:ext>
           </a:extLst>
         </p:spPr>
@@ -23171,7 +23179,7 @@
           </a:ln>
           <a:extLst>
             <a:ext uri="{C572A759-6A51-4108-AA02-DFA0A04FC94B}">
-              <ma14:wrappingTextBoxFlag xmlns="" xmlns:m="http://schemas.openxmlformats.org/officeDocument/2006/math" xmlns:a14="http://schemas.microsoft.com/office/drawing/2010/main" xmlns:ma14="http://schemas.microsoft.com/office/mac/drawingml/2011/main" val="1"/>
+              <ma14:wrappingTextBoxFlag xmlns:ma14="http://schemas.microsoft.com/office/mac/drawingml/2011/main" xmlns:a14="http://schemas.microsoft.com/office/drawing/2010/main" xmlns:m="http://schemas.openxmlformats.org/officeDocument/2006/math" xmlns="" val="1"/>
             </a:ext>
           </a:extLst>
         </p:spPr>
@@ -23241,7 +23249,7 @@
           </a:ln>
           <a:extLst>
             <a:ext uri="{C572A759-6A51-4108-AA02-DFA0A04FC94B}">
-              <ma14:wrappingTextBoxFlag xmlns="" xmlns:m="http://schemas.openxmlformats.org/officeDocument/2006/math" xmlns:a14="http://schemas.microsoft.com/office/drawing/2010/main" xmlns:ma14="http://schemas.microsoft.com/office/mac/drawingml/2011/main" val="1"/>
+              <ma14:wrappingTextBoxFlag xmlns:ma14="http://schemas.microsoft.com/office/mac/drawingml/2011/main" xmlns:a14="http://schemas.microsoft.com/office/drawing/2010/main" xmlns:m="http://schemas.openxmlformats.org/officeDocument/2006/math" xmlns="" val="1"/>
             </a:ext>
           </a:extLst>
         </p:spPr>
@@ -23776,7 +23784,7 @@
           </a:ln>
           <a:extLst>
             <a:ext uri="{C572A759-6A51-4108-AA02-DFA0A04FC94B}">
-              <ma14:wrappingTextBoxFlag xmlns="" xmlns:m="http://schemas.openxmlformats.org/officeDocument/2006/math" xmlns:a14="http://schemas.microsoft.com/office/drawing/2010/main" xmlns:p14="http://schemas.microsoft.com/office/powerpoint/2010/main" xmlns:ma14="http://schemas.microsoft.com/office/mac/drawingml/2011/main" val="1"/>
+              <ma14:wrappingTextBoxFlag xmlns:ma14="http://schemas.microsoft.com/office/mac/drawingml/2011/main" xmlns:p14="http://schemas.microsoft.com/office/powerpoint/2010/main" xmlns:a14="http://schemas.microsoft.com/office/drawing/2010/main" xmlns:m="http://schemas.openxmlformats.org/officeDocument/2006/math" xmlns="" val="1"/>
             </a:ext>
           </a:extLst>
         </p:spPr>
@@ -23944,7 +23952,7 @@
           </a:ln>
           <a:extLst>
             <a:ext uri="{C572A759-6A51-4108-AA02-DFA0A04FC94B}">
-              <ma14:wrappingTextBoxFlag xmlns="" xmlns:m="http://schemas.openxmlformats.org/officeDocument/2006/math" xmlns:a14="http://schemas.microsoft.com/office/drawing/2010/main" xmlns:p14="http://schemas.microsoft.com/office/powerpoint/2010/main" xmlns:ma14="http://schemas.microsoft.com/office/mac/drawingml/2011/main" val="1"/>
+              <ma14:wrappingTextBoxFlag xmlns:ma14="http://schemas.microsoft.com/office/mac/drawingml/2011/main" xmlns:p14="http://schemas.microsoft.com/office/powerpoint/2010/main" xmlns:a14="http://schemas.microsoft.com/office/drawing/2010/main" xmlns:m="http://schemas.openxmlformats.org/officeDocument/2006/math" xmlns="" val="1"/>
             </a:ext>
           </a:extLst>
         </p:spPr>
@@ -24455,7 +24463,7 @@
           </a:ln>
           <a:extLst>
             <a:ext uri="{C572A759-6A51-4108-AA02-DFA0A04FC94B}">
-              <ma14:wrappingTextBoxFlag xmlns="" xmlns:m="http://schemas.openxmlformats.org/officeDocument/2006/math" xmlns:a14="http://schemas.microsoft.com/office/drawing/2010/main" xmlns:p14="http://schemas.microsoft.com/office/powerpoint/2010/main" xmlns:ma14="http://schemas.microsoft.com/office/mac/drawingml/2011/main" val="1"/>
+              <ma14:wrappingTextBoxFlag xmlns:ma14="http://schemas.microsoft.com/office/mac/drawingml/2011/main" xmlns:p14="http://schemas.microsoft.com/office/powerpoint/2010/main" xmlns:a14="http://schemas.microsoft.com/office/drawing/2010/main" xmlns:m="http://schemas.openxmlformats.org/officeDocument/2006/math" xmlns="" val="1"/>
             </a:ext>
           </a:extLst>
         </p:spPr>
@@ -24790,7 +24798,7 @@
     <mc:Choice Requires="p14">
       <p:transition spd="med"/>
     </mc:Choice>
-    <mc:Fallback xmlns="" xmlns:m="http://schemas.openxmlformats.org/officeDocument/2006/math" xmlns:a14="http://schemas.microsoft.com/office/drawing/2010/main">
+    <mc:Fallback xmlns:a14="http://schemas.microsoft.com/office/drawing/2010/main" xmlns:m="http://schemas.openxmlformats.org/officeDocument/2006/math" xmlns="">
       <p:transition spd="slow"/>
     </mc:Fallback>
   </mc:AlternateContent>
@@ -24833,7 +24841,7 @@
           </a:ln>
           <a:extLst>
             <a:ext uri="{C572A759-6A51-4108-AA02-DFA0A04FC94B}">
-              <ma14:wrappingTextBoxFlag xmlns="" xmlns:m="http://schemas.openxmlformats.org/officeDocument/2006/math" xmlns:a14="http://schemas.microsoft.com/office/drawing/2010/main" xmlns:ma14="http://schemas.microsoft.com/office/mac/drawingml/2011/main" val="1"/>
+              <ma14:wrappingTextBoxFlag xmlns:ma14="http://schemas.microsoft.com/office/mac/drawingml/2011/main" xmlns:a14="http://schemas.microsoft.com/office/drawing/2010/main" xmlns:m="http://schemas.openxmlformats.org/officeDocument/2006/math" xmlns="" val="1"/>
             </a:ext>
           </a:extLst>
         </p:spPr>
@@ -24959,7 +24967,7 @@
           </a:ln>
           <a:extLst>
             <a:ext uri="{C572A759-6A51-4108-AA02-DFA0A04FC94B}">
-              <ma14:wrappingTextBoxFlag xmlns="" xmlns:m="http://schemas.openxmlformats.org/officeDocument/2006/math" xmlns:a14="http://schemas.microsoft.com/office/drawing/2010/main" xmlns:ma14="http://schemas.microsoft.com/office/mac/drawingml/2011/main" val="1"/>
+              <ma14:wrappingTextBoxFlag xmlns:ma14="http://schemas.microsoft.com/office/mac/drawingml/2011/main" xmlns:a14="http://schemas.microsoft.com/office/drawing/2010/main" xmlns:m="http://schemas.openxmlformats.org/officeDocument/2006/math" xmlns="" val="1"/>
             </a:ext>
           </a:extLst>
         </p:spPr>
@@ -28355,7 +28363,7 @@
           </a:ln>
           <a:extLst>
             <a:ext uri="{C572A759-6A51-4108-AA02-DFA0A04FC94B}">
-              <ma14:wrappingTextBoxFlag xmlns="" xmlns:m="http://schemas.openxmlformats.org/officeDocument/2006/math" xmlns:a14="http://schemas.microsoft.com/office/drawing/2010/main" xmlns:ma14="http://schemas.microsoft.com/office/mac/drawingml/2011/main" val="1"/>
+              <ma14:wrappingTextBoxFlag xmlns:ma14="http://schemas.microsoft.com/office/mac/drawingml/2011/main" xmlns:a14="http://schemas.microsoft.com/office/drawing/2010/main" xmlns:m="http://schemas.openxmlformats.org/officeDocument/2006/math" xmlns="" val="1"/>
             </a:ext>
           </a:extLst>
         </p:spPr>
@@ -28488,7 +28496,7 @@
           </a:ln>
           <a:extLst>
             <a:ext uri="{C572A759-6A51-4108-AA02-DFA0A04FC94B}">
-              <ma14:wrappingTextBoxFlag xmlns="" xmlns:m="http://schemas.openxmlformats.org/officeDocument/2006/math" xmlns:a14="http://schemas.microsoft.com/office/drawing/2010/main" xmlns:ma14="http://schemas.microsoft.com/office/mac/drawingml/2011/main" val="1"/>
+              <ma14:wrappingTextBoxFlag xmlns:ma14="http://schemas.microsoft.com/office/mac/drawingml/2011/main" xmlns:a14="http://schemas.microsoft.com/office/drawing/2010/main" xmlns:m="http://schemas.openxmlformats.org/officeDocument/2006/math" xmlns="" val="1"/>
             </a:ext>
           </a:extLst>
         </p:spPr>
@@ -28614,7 +28622,7 @@
           </a:ln>
           <a:extLst>
             <a:ext uri="{C572A759-6A51-4108-AA02-DFA0A04FC94B}">
-              <ma14:wrappingTextBoxFlag xmlns="" xmlns:m="http://schemas.openxmlformats.org/officeDocument/2006/math" xmlns:a14="http://schemas.microsoft.com/office/drawing/2010/main" xmlns:ma14="http://schemas.microsoft.com/office/mac/drawingml/2011/main" val="1"/>
+              <ma14:wrappingTextBoxFlag xmlns:ma14="http://schemas.microsoft.com/office/mac/drawingml/2011/main" xmlns:a14="http://schemas.microsoft.com/office/drawing/2010/main" xmlns:m="http://schemas.openxmlformats.org/officeDocument/2006/math" xmlns="" val="1"/>
             </a:ext>
           </a:extLst>
         </p:spPr>
@@ -29084,7 +29092,7 @@
           </a:ln>
           <a:extLst>
             <a:ext uri="{C572A759-6A51-4108-AA02-DFA0A04FC94B}">
-              <ma14:wrappingTextBoxFlag xmlns="" xmlns:m="http://schemas.openxmlformats.org/officeDocument/2006/math" xmlns:a14="http://schemas.microsoft.com/office/drawing/2010/main" xmlns:ma14="http://schemas.microsoft.com/office/mac/drawingml/2011/main" val="1"/>
+              <ma14:wrappingTextBoxFlag xmlns:ma14="http://schemas.microsoft.com/office/mac/drawingml/2011/main" xmlns:a14="http://schemas.microsoft.com/office/drawing/2010/main" xmlns:m="http://schemas.openxmlformats.org/officeDocument/2006/math" xmlns="" val="1"/>
             </a:ext>
           </a:extLst>
         </p:spPr>

--- a/koco_frame.pptx
+++ b/koco_frame.pptx
@@ -500,7 +500,7 @@
           <a:p>
             <a:fld id="{B00729D7-BDA7-41E1-AD79-DC61E6DD2EC2}" type="datetimeFigureOut">
               <a:rPr lang="ko-KR" altLang="en-US" smtClean="0"/>
-              <a:t>2026-01-29</a:t>
+              <a:t>2026-01-30</a:t>
             </a:fld>
             <a:endParaRPr lang="ko-KR" altLang="en-US"/>
           </a:p>
@@ -670,7 +670,7 @@
           <a:p>
             <a:fld id="{B00729D7-BDA7-41E1-AD79-DC61E6DD2EC2}" type="datetimeFigureOut">
               <a:rPr lang="ko-KR" altLang="en-US" smtClean="0"/>
-              <a:t>2026-01-29</a:t>
+              <a:t>2026-01-30</a:t>
             </a:fld>
             <a:endParaRPr lang="ko-KR" altLang="en-US"/>
           </a:p>
@@ -850,7 +850,7 @@
           <a:p>
             <a:fld id="{B00729D7-BDA7-41E1-AD79-DC61E6DD2EC2}" type="datetimeFigureOut">
               <a:rPr lang="ko-KR" altLang="en-US" smtClean="0"/>
-              <a:t>2026-01-29</a:t>
+              <a:t>2026-01-30</a:t>
             </a:fld>
             <a:endParaRPr lang="ko-KR" altLang="en-US"/>
           </a:p>
@@ -1526,7 +1526,7 @@
           <a:p>
             <a:fld id="{B00729D7-BDA7-41E1-AD79-DC61E6DD2EC2}" type="datetimeFigureOut">
               <a:rPr lang="ko-KR" altLang="en-US" smtClean="0"/>
-              <a:t>2026-01-29</a:t>
+              <a:t>2026-01-30</a:t>
             </a:fld>
             <a:endParaRPr lang="ko-KR" altLang="en-US"/>
           </a:p>
@@ -1770,7 +1770,7 @@
           <a:p>
             <a:fld id="{B00729D7-BDA7-41E1-AD79-DC61E6DD2EC2}" type="datetimeFigureOut">
               <a:rPr lang="ko-KR" altLang="en-US" smtClean="0"/>
-              <a:t>2026-01-29</a:t>
+              <a:t>2026-01-30</a:t>
             </a:fld>
             <a:endParaRPr lang="ko-KR" altLang="en-US"/>
           </a:p>
@@ -2002,7 +2002,7 @@
           <a:p>
             <a:fld id="{B00729D7-BDA7-41E1-AD79-DC61E6DD2EC2}" type="datetimeFigureOut">
               <a:rPr lang="ko-KR" altLang="en-US" smtClean="0"/>
-              <a:t>2026-01-29</a:t>
+              <a:t>2026-01-30</a:t>
             </a:fld>
             <a:endParaRPr lang="ko-KR" altLang="en-US"/>
           </a:p>
@@ -2369,7 +2369,7 @@
           <a:p>
             <a:fld id="{B00729D7-BDA7-41E1-AD79-DC61E6DD2EC2}" type="datetimeFigureOut">
               <a:rPr lang="ko-KR" altLang="en-US" smtClean="0"/>
-              <a:t>2026-01-29</a:t>
+              <a:t>2026-01-30</a:t>
             </a:fld>
             <a:endParaRPr lang="ko-KR" altLang="en-US"/>
           </a:p>
@@ -2487,7 +2487,7 @@
           <a:p>
             <a:fld id="{B00729D7-BDA7-41E1-AD79-DC61E6DD2EC2}" type="datetimeFigureOut">
               <a:rPr lang="ko-KR" altLang="en-US" smtClean="0"/>
-              <a:t>2026-01-29</a:t>
+              <a:t>2026-01-30</a:t>
             </a:fld>
             <a:endParaRPr lang="ko-KR" altLang="en-US"/>
           </a:p>
@@ -2582,7 +2582,7 @@
           <a:p>
             <a:fld id="{B00729D7-BDA7-41E1-AD79-DC61E6DD2EC2}" type="datetimeFigureOut">
               <a:rPr lang="ko-KR" altLang="en-US" smtClean="0"/>
-              <a:t>2026-01-29</a:t>
+              <a:t>2026-01-30</a:t>
             </a:fld>
             <a:endParaRPr lang="ko-KR" altLang="en-US"/>
           </a:p>
@@ -2859,7 +2859,7 @@
           <a:p>
             <a:fld id="{B00729D7-BDA7-41E1-AD79-DC61E6DD2EC2}" type="datetimeFigureOut">
               <a:rPr lang="ko-KR" altLang="en-US" smtClean="0"/>
-              <a:t>2026-01-29</a:t>
+              <a:t>2026-01-30</a:t>
             </a:fld>
             <a:endParaRPr lang="ko-KR" altLang="en-US"/>
           </a:p>
@@ -3072,7 +3072,7 @@
           <a:p>
             <a:fld id="{B00729D7-BDA7-41E1-AD79-DC61E6DD2EC2}" type="datetimeFigureOut">
               <a:rPr lang="ko-KR" altLang="en-US" smtClean="0"/>
-              <a:t>2026-01-29</a:t>
+              <a:t>2026-01-30</a:t>
             </a:fld>
             <a:endParaRPr lang="ko-KR" altLang="en-US"/>
           </a:p>
@@ -3480,97 +3480,6 @@
           <a:chExt cx="0" cy="0"/>
         </a:xfrm>
       </p:grpSpPr>
-      <p:sp>
-        <p:nvSpPr>
-          <p:cNvPr id="2" name="부제목 1">
-            <a:extLst>
-              <a:ext uri="{FF2B5EF4-FFF2-40B4-BE49-F238E27FC236}">
-                <a16:creationId xmlns:a16="http://schemas.microsoft.com/office/drawing/2014/main" id="{ADEC82A2-2BB8-384D-3D2A-B8427299E740}"/>
-              </a:ext>
-            </a:extLst>
-          </p:cNvPr>
-          <p:cNvSpPr>
-            <a:spLocks noGrp="1"/>
-          </p:cNvSpPr>
-          <p:nvPr>
-            <p:ph type="subTitle" idx="1"/>
-          </p:nvPr>
-        </p:nvSpPr>
-        <p:spPr>
-          <a:xfrm>
-            <a:off x="1143000" y="4602777"/>
-            <a:ext cx="6858000" cy="1655762"/>
-          </a:xfrm>
-        </p:spPr>
-        <p:txBody>
-          <a:bodyPr/>
-          <a:lstStyle/>
-          <a:p>
-            <a:endParaRPr lang="ko-KR" altLang="en-US"/>
-          </a:p>
-        </p:txBody>
-      </p:sp>
-      <p:sp>
-        <p:nvSpPr>
-          <p:cNvPr id="3" name="제목 2">
-            <a:extLst>
-              <a:ext uri="{FF2B5EF4-FFF2-40B4-BE49-F238E27FC236}">
-                <a16:creationId xmlns:a16="http://schemas.microsoft.com/office/drawing/2014/main" id="{591E2648-6F33-7B56-DA5C-F57E06BB57FD}"/>
-              </a:ext>
-            </a:extLst>
-          </p:cNvPr>
-          <p:cNvSpPr>
-            <a:spLocks noGrp="1"/>
-          </p:cNvSpPr>
-          <p:nvPr>
-            <p:ph type="title"/>
-          </p:nvPr>
-        </p:nvSpPr>
-        <p:spPr/>
-        <p:txBody>
-          <a:bodyPr/>
-          <a:lstStyle/>
-          <a:p>
-            <a:endParaRPr lang="ko-KR" altLang="en-US" dirty="0"/>
-          </a:p>
-        </p:txBody>
-      </p:sp>
-      <p:pic>
-        <p:nvPicPr>
-          <p:cNvPr id="6" name="그림 개체 틀 5" descr="그래픽, 클립아트, 그래픽 디자인, 예술이(가) 표시된 사진&#10;&#10;AI 생성 콘텐츠는 정확하지 않을 수 있습니다.">
-            <a:extLst>
-              <a:ext uri="{FF2B5EF4-FFF2-40B4-BE49-F238E27FC236}">
-                <a16:creationId xmlns:a16="http://schemas.microsoft.com/office/drawing/2014/main" id="{1810F924-C654-7473-450B-FA928C194D4B}"/>
-              </a:ext>
-            </a:extLst>
-          </p:cNvPr>
-          <p:cNvPicPr>
-            <a:picLocks noGrp="1" noChangeAspect="1"/>
-          </p:cNvPicPr>
-          <p:nvPr>
-            <p:ph type="pic" sz="quarter" idx="10"/>
-          </p:nvPr>
-        </p:nvPicPr>
-        <p:blipFill>
-          <a:blip r:embed="rId2">
-            <a:extLst>
-              <a:ext uri="{28A0092B-C50C-407E-A947-70E740481C1C}">
-                <a14:useLocalDpi xmlns:a14="http://schemas.microsoft.com/office/drawing/2010/main" val="0"/>
-              </a:ext>
-            </a:extLst>
-          </a:blip>
-          <a:srcRect t="11176" b="11176"/>
-          <a:stretch>
-            <a:fillRect/>
-          </a:stretch>
-        </p:blipFill>
-        <p:spPr>
-          <a:xfrm>
-            <a:off x="6118300" y="3137731"/>
-            <a:ext cx="1304925" cy="1014413"/>
-          </a:xfrm>
-        </p:spPr>
-      </p:pic>
     </p:spTree>
     <p:extLst>
       <p:ext uri="{BB962C8B-B14F-4D97-AF65-F5344CB8AC3E}">
@@ -6207,7 +6116,7 @@
           </a:ln>
           <a:extLst>
             <a:ext uri="{C572A759-6A51-4108-AA02-DFA0A04FC94B}">
-              <ma14:wrappingTextBoxFlag xmlns:ma14="http://schemas.microsoft.com/office/mac/drawingml/2011/main" xmlns:a14="http://schemas.microsoft.com/office/drawing/2010/main" xmlns:m="http://schemas.openxmlformats.org/officeDocument/2006/math" xmlns="" val="1"/>
+              <ma14:wrappingTextBoxFlag xmlns="" xmlns:m="http://schemas.openxmlformats.org/officeDocument/2006/math" xmlns:a14="http://schemas.microsoft.com/office/drawing/2010/main" xmlns:ma14="http://schemas.microsoft.com/office/mac/drawingml/2011/main" val="1"/>
             </a:ext>
           </a:extLst>
         </p:spPr>
@@ -6991,7 +6900,7 @@
           </a:ln>
           <a:extLst>
             <a:ext uri="{C572A759-6A51-4108-AA02-DFA0A04FC94B}">
-              <ma14:wrappingTextBoxFlag xmlns="" xmlns:m="http://schemas.openxmlformats.org/officeDocument/2006/math" xmlns:a14="http://schemas.microsoft.com/office/drawing/2010/main" xmlns:ma14="http://schemas.microsoft.com/office/mac/drawingml/2011/main" val="1"/>
+              <ma14:wrappingTextBoxFlag xmlns:ma14="http://schemas.microsoft.com/office/mac/drawingml/2011/main" xmlns:a14="http://schemas.microsoft.com/office/drawing/2010/main" xmlns:m="http://schemas.openxmlformats.org/officeDocument/2006/math" xmlns="" val="1"/>
             </a:ext>
           </a:extLst>
         </p:spPr>
@@ -7041,7 +6950,7 @@
           </a:ln>
           <a:extLst>
             <a:ext uri="{C572A759-6A51-4108-AA02-DFA0A04FC94B}">
-              <ma14:wrappingTextBoxFlag xmlns="" xmlns:m="http://schemas.openxmlformats.org/officeDocument/2006/math" xmlns:a14="http://schemas.microsoft.com/office/drawing/2010/main" xmlns:ma14="http://schemas.microsoft.com/office/mac/drawingml/2011/main" val="1"/>
+              <ma14:wrappingTextBoxFlag xmlns:ma14="http://schemas.microsoft.com/office/mac/drawingml/2011/main" xmlns:a14="http://schemas.microsoft.com/office/drawing/2010/main" xmlns:m="http://schemas.openxmlformats.org/officeDocument/2006/math" xmlns="" val="1"/>
             </a:ext>
           </a:extLst>
         </p:spPr>
@@ -7111,7 +7020,7 @@
           </a:ln>
           <a:extLst>
             <a:ext uri="{C572A759-6A51-4108-AA02-DFA0A04FC94B}">
-              <ma14:wrappingTextBoxFlag xmlns="" xmlns:m="http://schemas.openxmlformats.org/officeDocument/2006/math" xmlns:a14="http://schemas.microsoft.com/office/drawing/2010/main" xmlns:ma14="http://schemas.microsoft.com/office/mac/drawingml/2011/main" val="1"/>
+              <ma14:wrappingTextBoxFlag xmlns:ma14="http://schemas.microsoft.com/office/mac/drawingml/2011/main" xmlns:a14="http://schemas.microsoft.com/office/drawing/2010/main" xmlns:m="http://schemas.openxmlformats.org/officeDocument/2006/math" xmlns="" val="1"/>
             </a:ext>
           </a:extLst>
         </p:spPr>
@@ -7181,7 +7090,7 @@
           </a:ln>
           <a:extLst>
             <a:ext uri="{C572A759-6A51-4108-AA02-DFA0A04FC94B}">
-              <ma14:wrappingTextBoxFlag xmlns="" xmlns:m="http://schemas.openxmlformats.org/officeDocument/2006/math" xmlns:a14="http://schemas.microsoft.com/office/drawing/2010/main" xmlns:ma14="http://schemas.microsoft.com/office/mac/drawingml/2011/main" val="1"/>
+              <ma14:wrappingTextBoxFlag xmlns:ma14="http://schemas.microsoft.com/office/mac/drawingml/2011/main" xmlns:a14="http://schemas.microsoft.com/office/drawing/2010/main" xmlns:m="http://schemas.openxmlformats.org/officeDocument/2006/math" xmlns="" val="1"/>
             </a:ext>
           </a:extLst>
         </p:spPr>
@@ -7716,7 +7625,7 @@
           </a:ln>
           <a:extLst>
             <a:ext uri="{C572A759-6A51-4108-AA02-DFA0A04FC94B}">
-              <ma14:wrappingTextBoxFlag xmlns="" xmlns:m="http://schemas.openxmlformats.org/officeDocument/2006/math" xmlns:a14="http://schemas.microsoft.com/office/drawing/2010/main" xmlns:p14="http://schemas.microsoft.com/office/powerpoint/2010/main" xmlns:ma14="http://schemas.microsoft.com/office/mac/drawingml/2011/main" val="1"/>
+              <ma14:wrappingTextBoxFlag xmlns:ma14="http://schemas.microsoft.com/office/mac/drawingml/2011/main" xmlns:p14="http://schemas.microsoft.com/office/powerpoint/2010/main" xmlns:a14="http://schemas.microsoft.com/office/drawing/2010/main" xmlns:m="http://schemas.openxmlformats.org/officeDocument/2006/math" xmlns="" val="1"/>
             </a:ext>
           </a:extLst>
         </p:spPr>
@@ -7884,7 +7793,7 @@
           </a:ln>
           <a:extLst>
             <a:ext uri="{C572A759-6A51-4108-AA02-DFA0A04FC94B}">
-              <ma14:wrappingTextBoxFlag xmlns="" xmlns:m="http://schemas.openxmlformats.org/officeDocument/2006/math" xmlns:a14="http://schemas.microsoft.com/office/drawing/2010/main" xmlns:p14="http://schemas.microsoft.com/office/powerpoint/2010/main" xmlns:ma14="http://schemas.microsoft.com/office/mac/drawingml/2011/main" val="1"/>
+              <ma14:wrappingTextBoxFlag xmlns:ma14="http://schemas.microsoft.com/office/mac/drawingml/2011/main" xmlns:p14="http://schemas.microsoft.com/office/powerpoint/2010/main" xmlns:a14="http://schemas.microsoft.com/office/drawing/2010/main" xmlns:m="http://schemas.openxmlformats.org/officeDocument/2006/math" xmlns="" val="1"/>
             </a:ext>
           </a:extLst>
         </p:spPr>
@@ -8395,7 +8304,7 @@
           </a:ln>
           <a:extLst>
             <a:ext uri="{C572A759-6A51-4108-AA02-DFA0A04FC94B}">
-              <ma14:wrappingTextBoxFlag xmlns="" xmlns:m="http://schemas.openxmlformats.org/officeDocument/2006/math" xmlns:a14="http://schemas.microsoft.com/office/drawing/2010/main" xmlns:p14="http://schemas.microsoft.com/office/powerpoint/2010/main" xmlns:ma14="http://schemas.microsoft.com/office/mac/drawingml/2011/main" val="1"/>
+              <ma14:wrappingTextBoxFlag xmlns:ma14="http://schemas.microsoft.com/office/mac/drawingml/2011/main" xmlns:p14="http://schemas.microsoft.com/office/powerpoint/2010/main" xmlns:a14="http://schemas.microsoft.com/office/drawing/2010/main" xmlns:m="http://schemas.openxmlformats.org/officeDocument/2006/math" xmlns="" val="1"/>
             </a:ext>
           </a:extLst>
         </p:spPr>
@@ -8730,7 +8639,7 @@
     <mc:Choice Requires="p14">
       <p:transition spd="med"/>
     </mc:Choice>
-    <mc:Fallback xmlns="" xmlns:m="http://schemas.openxmlformats.org/officeDocument/2006/math" xmlns:a14="http://schemas.microsoft.com/office/drawing/2010/main">
+    <mc:Fallback xmlns:a14="http://schemas.microsoft.com/office/drawing/2010/main" xmlns:m="http://schemas.openxmlformats.org/officeDocument/2006/math" xmlns="">
       <p:transition spd="slow"/>
     </mc:Fallback>
   </mc:AlternateContent>
@@ -8773,7 +8682,7 @@
           </a:ln>
           <a:extLst>
             <a:ext uri="{C572A759-6A51-4108-AA02-DFA0A04FC94B}">
-              <ma14:wrappingTextBoxFlag xmlns="" xmlns:m="http://schemas.openxmlformats.org/officeDocument/2006/math" xmlns:a14="http://schemas.microsoft.com/office/drawing/2010/main" xmlns:ma14="http://schemas.microsoft.com/office/mac/drawingml/2011/main" val="1"/>
+              <ma14:wrappingTextBoxFlag xmlns:ma14="http://schemas.microsoft.com/office/mac/drawingml/2011/main" xmlns:a14="http://schemas.microsoft.com/office/drawing/2010/main" xmlns:m="http://schemas.openxmlformats.org/officeDocument/2006/math" xmlns="" val="1"/>
             </a:ext>
           </a:extLst>
         </p:spPr>
@@ -8899,7 +8808,7 @@
           </a:ln>
           <a:extLst>
             <a:ext uri="{C572A759-6A51-4108-AA02-DFA0A04FC94B}">
-              <ma14:wrappingTextBoxFlag xmlns="" xmlns:m="http://schemas.openxmlformats.org/officeDocument/2006/math" xmlns:a14="http://schemas.microsoft.com/office/drawing/2010/main" xmlns:ma14="http://schemas.microsoft.com/office/mac/drawingml/2011/main" val="1"/>
+              <ma14:wrappingTextBoxFlag xmlns:ma14="http://schemas.microsoft.com/office/mac/drawingml/2011/main" xmlns:a14="http://schemas.microsoft.com/office/drawing/2010/main" xmlns:m="http://schemas.openxmlformats.org/officeDocument/2006/math" xmlns="" val="1"/>
             </a:ext>
           </a:extLst>
         </p:spPr>
@@ -12295,7 +12204,7 @@
           </a:ln>
           <a:extLst>
             <a:ext uri="{C572A759-6A51-4108-AA02-DFA0A04FC94B}">
-              <ma14:wrappingTextBoxFlag xmlns="" xmlns:m="http://schemas.openxmlformats.org/officeDocument/2006/math" xmlns:a14="http://schemas.microsoft.com/office/drawing/2010/main" xmlns:ma14="http://schemas.microsoft.com/office/mac/drawingml/2011/main" val="1"/>
+              <ma14:wrappingTextBoxFlag xmlns:ma14="http://schemas.microsoft.com/office/mac/drawingml/2011/main" xmlns:a14="http://schemas.microsoft.com/office/drawing/2010/main" xmlns:m="http://schemas.openxmlformats.org/officeDocument/2006/math" xmlns="" val="1"/>
             </a:ext>
           </a:extLst>
         </p:spPr>
@@ -12428,7 +12337,7 @@
           </a:ln>
           <a:extLst>
             <a:ext uri="{C572A759-6A51-4108-AA02-DFA0A04FC94B}">
-              <ma14:wrappingTextBoxFlag xmlns="" xmlns:m="http://schemas.openxmlformats.org/officeDocument/2006/math" xmlns:a14="http://schemas.microsoft.com/office/drawing/2010/main" xmlns:ma14="http://schemas.microsoft.com/office/mac/drawingml/2011/main" val="1"/>
+              <ma14:wrappingTextBoxFlag xmlns:ma14="http://schemas.microsoft.com/office/mac/drawingml/2011/main" xmlns:a14="http://schemas.microsoft.com/office/drawing/2010/main" xmlns:m="http://schemas.openxmlformats.org/officeDocument/2006/math" xmlns="" val="1"/>
             </a:ext>
           </a:extLst>
         </p:spPr>
@@ -12554,7 +12463,7 @@
           </a:ln>
           <a:extLst>
             <a:ext uri="{C572A759-6A51-4108-AA02-DFA0A04FC94B}">
-              <ma14:wrappingTextBoxFlag xmlns="" xmlns:m="http://schemas.openxmlformats.org/officeDocument/2006/math" xmlns:a14="http://schemas.microsoft.com/office/drawing/2010/main" xmlns:ma14="http://schemas.microsoft.com/office/mac/drawingml/2011/main" val="1"/>
+              <ma14:wrappingTextBoxFlag xmlns:ma14="http://schemas.microsoft.com/office/mac/drawingml/2011/main" xmlns:a14="http://schemas.microsoft.com/office/drawing/2010/main" xmlns:m="http://schemas.openxmlformats.org/officeDocument/2006/math" xmlns="" val="1"/>
             </a:ext>
           </a:extLst>
         </p:spPr>
@@ -13024,7 +12933,7 @@
           </a:ln>
           <a:extLst>
             <a:ext uri="{C572A759-6A51-4108-AA02-DFA0A04FC94B}">
-              <ma14:wrappingTextBoxFlag xmlns="" xmlns:m="http://schemas.openxmlformats.org/officeDocument/2006/math" xmlns:a14="http://schemas.microsoft.com/office/drawing/2010/main" xmlns:ma14="http://schemas.microsoft.com/office/mac/drawingml/2011/main" val="1"/>
+              <ma14:wrappingTextBoxFlag xmlns:ma14="http://schemas.microsoft.com/office/mac/drawingml/2011/main" xmlns:a14="http://schemas.microsoft.com/office/drawing/2010/main" xmlns:m="http://schemas.openxmlformats.org/officeDocument/2006/math" xmlns="" val="1"/>
             </a:ext>
           </a:extLst>
         </p:spPr>
